--- a/diagrams-xml/MyBahaya_FYP1.pptx
+++ b/diagrams-xml/MyBahaya_FYP1.pptx
@@ -4,9 +4,6 @@
   <p:sldMasterIdLst>
     <p:sldMasterId id="2147483648" r:id="rId1"/>
   </p:sldMasterIdLst>
-  <p:notesMasterIdLst>
-    <p:notesMasterId r:id="rId13"/>
-  </p:notesMasterIdLst>
   <p:sldIdLst>
     <p:sldId id="256" r:id="rId2"/>
     <p:sldId id="257" r:id="rId3"/>
@@ -19,8 +16,13 @@
     <p:sldId id="264" r:id="rId10"/>
     <p:sldId id="265" r:id="rId11"/>
     <p:sldId id="266" r:id="rId12"/>
+    <p:sldId id="267" r:id="rId13"/>
+    <p:sldId id="268" r:id="rId14"/>
   </p:sldIdLst>
-  <p:sldSz cx="9144000" cy="5143500" type="screen16x9"/>
+  <p:notesMasterIdLst>
+    <p:notesMasterId r:id="rId15"/>
+  </p:notesMasterIdLst>
+  <p:sldSz cx="9144000" cy="5143500"/>
   <p:notesSz cx="5143500" cy="9144000"/>
   <p:defaultTextStyle>
     <a:lvl1pPr marL="0" algn="l" defTabSz="914400" rtl="0" eaLnBrk="1" latinLnBrk="0" hangingPunct="1">
@@ -114,11 +116,6 @@
       </a:defRPr>
     </a:lvl9pPr>
   </p:defaultTextStyle>
-  <p:extLst>
-    <p:ext uri="{EFAFB233-063F-42B5-8137-9DF3F51BA10A}">
-      <p15:sldGuideLst xmlns:p15="http://schemas.microsoft.com/office/powerpoint/2012/main"/>
-    </p:ext>
-  </p:extLst>
 </p:presentation>
 </file>
 
@@ -144,10 +141,234 @@
           <a:chExt cx="0" cy="0"/>
         </a:xfrm>
       </p:grpSpPr>
+      <p:sp>
+        <p:nvSpPr>
+          <p:cNvPr id="2" name="Header Placeholder 1"/>
+          <p:cNvSpPr>
+            <a:spLocks noGrp="1"/>
+          </p:cNvSpPr>
+          <p:nvPr>
+            <p:ph type="hdr" sz="quarter"/>
+          </p:nvPr>
+        </p:nvSpPr>
+        <p:spPr>
+          <a:xfrm>
+            <a:off x="0" y="0"/>
+            <a:ext cx="2971800" cy="458788"/>
+          </a:xfrm>
+          <a:prstGeom prst="rect">
+            <a:avLst/>
+          </a:prstGeom>
+        </p:spPr>
+        <p:txBody>
+          <a:bodyPr vert="horz" lIns="91440" tIns="45720" rIns="91440" bIns="45720" rtlCol="0"/>
+          <a:lstStyle>
+            <a:lvl1pPr algn="l">
+              <a:defRPr sz="1200"/>
+            </a:lvl1pPr>
+          </a:lstStyle>
+          <a:p>
+            <a:endParaRPr lang="en-US"/>
+          </a:p>
+        </p:txBody>
+      </p:sp>
+      <p:sp>
+        <p:nvSpPr>
+          <p:cNvPr id="3" name="Date Placeholder 2"/>
+          <p:cNvSpPr>
+            <a:spLocks noGrp="1"/>
+          </p:cNvSpPr>
+          <p:nvPr>
+            <p:ph type="dt" idx="1"/>
+          </p:nvPr>
+        </p:nvSpPr>
+        <p:spPr>
+          <a:xfrm>
+            <a:off x="3884613" y="0"/>
+            <a:ext cx="2971800" cy="458788"/>
+          </a:xfrm>
+          <a:prstGeom prst="rect">
+            <a:avLst/>
+          </a:prstGeom>
+        </p:spPr>
+        <p:txBody>
+          <a:bodyPr vert="horz" lIns="91440" tIns="45720" rIns="91440" bIns="45720" rtlCol="0"/>
+          <a:lstStyle>
+            <a:lvl1pPr algn="r">
+              <a:defRPr sz="1200"/>
+            </a:lvl1pPr>
+          </a:lstStyle>
+          <a:p>
+            <a:fld id="{5282F153-3F37-0F45-9E97-73ACFA13230C}" type="datetimeFigureOut">
+              <a:rPr lang="en-US"/>
+              <a:t>7/23/19</a:t>
+            </a:fld>
+            <a:endParaRPr lang="en-US"/>
+          </a:p>
+        </p:txBody>
+      </p:sp>
+      <p:sp>
+        <p:nvSpPr>
+          <p:cNvPr id="4" name="Slide Image Placeholder 3"/>
+          <p:cNvSpPr>
+            <a:spLocks noGrp="1" noRot="1" noChangeAspect="1"/>
+          </p:cNvSpPr>
+          <p:nvPr>
+            <p:ph type="sldImg" idx="2"/>
+          </p:nvPr>
+        </p:nvSpPr>
+        <p:spPr>
+          <a:xfrm>
+            <a:off x="685800" y="1143000"/>
+            <a:ext cx="5486400" cy="3086100"/>
+          </a:xfrm>
+          <a:prstGeom prst="rect">
+            <a:avLst/>
+          </a:prstGeom>
+          <a:noFill/>
+          <a:ln w="12700">
+            <a:solidFill>
+              <a:prstClr val="black"/>
+            </a:solidFill>
+          </a:ln>
+        </p:spPr>
+        <p:txBody>
+          <a:bodyPr vert="horz" lIns="91440" tIns="45720" rIns="91440" bIns="45720" rtlCol="0" anchor="ctr"/>
+          <a:lstStyle/>
+          <a:p>
+            <a:endParaRPr lang="en-US"/>
+          </a:p>
+        </p:txBody>
+      </p:sp>
+      <p:sp>
+        <p:nvSpPr>
+          <p:cNvPr id="5" name="Notes Placeholder 4"/>
+          <p:cNvSpPr>
+            <a:spLocks noGrp="1"/>
+          </p:cNvSpPr>
+          <p:nvPr>
+            <p:ph type="body" sz="quarter" idx="3"/>
+          </p:nvPr>
+        </p:nvSpPr>
+        <p:spPr>
+          <a:xfrm>
+            <a:off x="685800" y="4400550"/>
+            <a:ext cx="5486400" cy="3600450"/>
+          </a:xfrm>
+          <a:prstGeom prst="rect">
+            <a:avLst/>
+          </a:prstGeom>
+        </p:spPr>
+        <p:txBody>
+          <a:bodyPr vert="horz" lIns="91440" tIns="45720" rIns="91440" bIns="45720" rtlCol="0"/>
+          <a:lstStyle/>
+          <a:p>
+            <a:pPr lvl="0"/>
+            <a:r>
+              <a:rPr lang="en-US"/>
+              <a:t>Click to edit Master text styles</a:t>
+            </a:r>
+          </a:p>
+          <a:p>
+            <a:pPr lvl="1"/>
+            <a:r>
+              <a:rPr lang="en-US"/>
+              <a:t>Second level</a:t>
+            </a:r>
+          </a:p>
+          <a:p>
+            <a:pPr lvl="2"/>
+            <a:r>
+              <a:rPr lang="en-US"/>
+              <a:t>Third level</a:t>
+            </a:r>
+          </a:p>
+          <a:p>
+            <a:pPr lvl="3"/>
+            <a:r>
+              <a:rPr lang="en-US"/>
+              <a:t>Fourth level</a:t>
+            </a:r>
+          </a:p>
+          <a:p>
+            <a:pPr lvl="4"/>
+            <a:r>
+              <a:rPr lang="en-US"/>
+              <a:t>Fifth level</a:t>
+            </a:r>
+          </a:p>
+        </p:txBody>
+      </p:sp>
+      <p:sp>
+        <p:nvSpPr>
+          <p:cNvPr id="6" name="Footer Placeholder 5"/>
+          <p:cNvSpPr>
+            <a:spLocks noGrp="1"/>
+          </p:cNvSpPr>
+          <p:nvPr>
+            <p:ph type="ftr" sz="quarter" idx="4"/>
+          </p:nvPr>
+        </p:nvSpPr>
+        <p:spPr>
+          <a:xfrm>
+            <a:off x="0" y="8685213"/>
+            <a:ext cx="2971800" cy="458787"/>
+          </a:xfrm>
+          <a:prstGeom prst="rect">
+            <a:avLst/>
+          </a:prstGeom>
+        </p:spPr>
+        <p:txBody>
+          <a:bodyPr vert="horz" lIns="91440" tIns="45720" rIns="91440" bIns="45720" rtlCol="0" anchor="b"/>
+          <a:lstStyle>
+            <a:lvl1pPr algn="l">
+              <a:defRPr sz="1200"/>
+            </a:lvl1pPr>
+          </a:lstStyle>
+          <a:p>
+            <a:endParaRPr lang="en-US"/>
+          </a:p>
+        </p:txBody>
+      </p:sp>
+      <p:sp>
+        <p:nvSpPr>
+          <p:cNvPr id="7" name="Slide Number Placeholder 6"/>
+          <p:cNvSpPr>
+            <a:spLocks noGrp="1"/>
+          </p:cNvSpPr>
+          <p:nvPr>
+            <p:ph type="sldNum" sz="quarter" idx="5"/>
+          </p:nvPr>
+        </p:nvSpPr>
+        <p:spPr>
+          <a:xfrm>
+            <a:off x="3884613" y="8685213"/>
+            <a:ext cx="2971800" cy="458787"/>
+          </a:xfrm>
+          <a:prstGeom prst="rect">
+            <a:avLst/>
+          </a:prstGeom>
+        </p:spPr>
+        <p:txBody>
+          <a:bodyPr vert="horz" lIns="91440" tIns="45720" rIns="91440" bIns="45720" rtlCol="0" anchor="b"/>
+          <a:lstStyle>
+            <a:lvl1pPr algn="r">
+              <a:defRPr sz="1200"/>
+            </a:lvl1pPr>
+          </a:lstStyle>
+          <a:p>
+            <a:fld id="{CE5E9CC1-C706-0F49-92D6-E571CC5EEA8F}" type="slidenum">
+              <a:rPr lang="en-US"/>
+              <a:t>‹#›</a:t>
+            </a:fld>
+            <a:endParaRPr lang="en-US"/>
+          </a:p>
+        </p:txBody>
+      </p:sp>
     </p:spTree>
     <p:extLst>
       <p:ext uri="{BB962C8B-B14F-4D97-AF65-F5344CB8AC3E}">
-        <p14:creationId xmlns:p14="http://schemas.microsoft.com/office/powerpoint/2010/main" val="4277568683"/>
+        <p14:creationId xmlns:p14="http://schemas.microsoft.com/office/powerpoint/2010/main" val="1024086991"/>
       </p:ext>
     </p:extLst>
   </p:cSld>
@@ -295,6 +516,7 @@
               <a:rPr lang="en-US" dirty="0"/>
               <a:t>Assalamualaikum. Good morning, evaluators. My name is Ahmad Shukri. Today I present MyBahaya — an AI-powered emergency reporting and real-time community alert platform for Malaysia.</a:t>
             </a:r>
+            <a:endParaRPr lang="en-US" dirty="0"/>
           </a:p>
         </p:txBody>
       </p:sp>
@@ -382,6 +604,7 @@
               <a:rPr lang="en-US" dirty="0"/>
               <a:t>Three-tier architecture: Client (Flutter + Web browser), Application (Spring Boot REST API on VPS), Data (Firebase Firestore, MinIO, Gemini AI, FCM).</a:t>
             </a:r>
+            <a:endParaRPr lang="en-US" dirty="0"/>
           </a:p>
         </p:txBody>
       </p:sp>
@@ -469,6 +692,7 @@
               <a:rPr lang="en-US" dirty="0"/>
               <a:t>MyBahaya addresses all four identified problems and is fully deployed. Ready for the tool demo. Open for questions.</a:t>
             </a:r>
+            <a:endParaRPr lang="en-US" dirty="0"/>
           </a:p>
         </p:txBody>
       </p:sp>
@@ -490,6 +714,182 @@
             <a:fld id="{F7021451-1387-4CA6-816F-3879F97B5CBC}" type="slidenum">
               <a:rPr lang="en-US"/>
               <a:t>11</a:t>
+            </a:fld>
+            <a:endParaRPr lang="en-US"/>
+          </a:p>
+        </p:txBody>
+      </p:sp>
+    </p:spTree>
+    <p:extLst>
+      <p:ext uri="{BB962C8B-B14F-4D97-AF65-F5344CB8AC3E}">
+        <p14:creationId xmlns:p14="http://schemas.microsoft.com/office/powerpoint/2010/main" val="1024086991"/>
+      </p:ext>
+    </p:extLst>
+  </p:cSld>
+  <p:clrMapOvr>
+    <a:masterClrMapping/>
+  </p:clrMapOvr>
+</p:notes>
+</file>
+
+<file path=ppt/notesSlides/notesSlide12.xml><?xml version="1.0" encoding="utf-8"?>
+<p:notes xmlns:a="http://schemas.openxmlformats.org/drawingml/2006/main" xmlns:r="http://schemas.openxmlformats.org/officeDocument/2006/relationships" xmlns:p="http://schemas.openxmlformats.org/presentationml/2006/main">
+  <p:cSld>
+    <p:spTree>
+      <p:nvGrpSpPr>
+        <p:cNvPr id="1" name=""/>
+        <p:cNvGrpSpPr/>
+        <p:nvPr/>
+      </p:nvGrpSpPr>
+      <p:grpSpPr>
+        <a:xfrm>
+          <a:off x="0" y="0"/>
+          <a:ext cx="0" cy="0"/>
+          <a:chOff x="0" y="0"/>
+          <a:chExt cx="0" cy="0"/>
+        </a:xfrm>
+      </p:grpSpPr>
+      <p:sp>
+        <p:nvSpPr>
+          <p:cNvPr id="2" name="Slide Image Placeholder 1"/>
+          <p:cNvSpPr>
+            <a:spLocks noGrp="1" noRot="1" noChangeAspect="1"/>
+          </p:cNvSpPr>
+          <p:nvPr>
+            <p:ph type="sldImg"/>
+          </p:nvPr>
+        </p:nvSpPr>
+        <p:spPr/>
+      </p:sp>
+      <p:sp>
+        <p:nvSpPr>
+          <p:cNvPr id="3" name="Notes Placeholder 2"/>
+          <p:cNvSpPr>
+            <a:spLocks noGrp="1"/>
+          </p:cNvSpPr>
+          <p:nvPr>
+            <p:ph type="body" idx="1"/>
+          </p:nvPr>
+        </p:nvSpPr>
+        <p:spPr/>
+        <p:txBody>
+          <a:bodyPr/>
+          <a:lstStyle/>
+          <a:p>
+            <a:r>
+              <a:rPr lang="en-US" dirty="0"/>
+              <a:t>All 25 unit tests pass in 5.6 seconds. Firebase and MinIO are mocked so tests run entirely offline. Covers state machine, validation, AI parsing, routing, and notifications.</a:t>
+            </a:r>
+            <a:endParaRPr lang="en-US" dirty="0"/>
+          </a:p>
+        </p:txBody>
+      </p:sp>
+      <p:sp>
+        <p:nvSpPr>
+          <p:cNvPr id="4" name="Slide Number Placeholder 3"/>
+          <p:cNvSpPr>
+            <a:spLocks noGrp="1"/>
+          </p:cNvSpPr>
+          <p:nvPr>
+            <p:ph type="sldNum" sz="quarter" idx="10"/>
+          </p:nvPr>
+        </p:nvSpPr>
+        <p:spPr/>
+        <p:txBody>
+          <a:bodyPr/>
+          <a:lstStyle/>
+          <a:p>
+            <a:fld id="{F7021451-1387-4CA6-816F-3879F97B5CBC}" type="slidenum">
+              <a:rPr lang="en-US"/>
+              <a:t>12</a:t>
+            </a:fld>
+            <a:endParaRPr lang="en-US"/>
+          </a:p>
+        </p:txBody>
+      </p:sp>
+    </p:spTree>
+    <p:extLst>
+      <p:ext uri="{BB962C8B-B14F-4D97-AF65-F5344CB8AC3E}">
+        <p14:creationId xmlns:p14="http://schemas.microsoft.com/office/powerpoint/2010/main" val="1024086991"/>
+      </p:ext>
+    </p:extLst>
+  </p:cSld>
+  <p:clrMapOvr>
+    <a:masterClrMapping/>
+  </p:clrMapOvr>
+</p:notes>
+</file>
+
+<file path=ppt/notesSlides/notesSlide13.xml><?xml version="1.0" encoding="utf-8"?>
+<p:notes xmlns:a="http://schemas.openxmlformats.org/drawingml/2006/main" xmlns:r="http://schemas.openxmlformats.org/officeDocument/2006/relationships" xmlns:p="http://schemas.openxmlformats.org/presentationml/2006/main">
+  <p:cSld>
+    <p:spTree>
+      <p:nvGrpSpPr>
+        <p:cNvPr id="1" name=""/>
+        <p:cNvGrpSpPr/>
+        <p:nvPr/>
+      </p:nvGrpSpPr>
+      <p:grpSpPr>
+        <a:xfrm>
+          <a:off x="0" y="0"/>
+          <a:ext cx="0" cy="0"/>
+          <a:chOff x="0" y="0"/>
+          <a:chExt cx="0" cy="0"/>
+        </a:xfrm>
+      </p:grpSpPr>
+      <p:sp>
+        <p:nvSpPr>
+          <p:cNvPr id="2" name="Slide Image Placeholder 1"/>
+          <p:cNvSpPr>
+            <a:spLocks noGrp="1" noRot="1" noChangeAspect="1"/>
+          </p:cNvSpPr>
+          <p:nvPr>
+            <p:ph type="sldImg"/>
+          </p:nvPr>
+        </p:nvSpPr>
+        <p:spPr/>
+      </p:sp>
+      <p:sp>
+        <p:nvSpPr>
+          <p:cNvPr id="3" name="Notes Placeholder 2"/>
+          <p:cNvSpPr>
+            <a:spLocks noGrp="1"/>
+          </p:cNvSpPr>
+          <p:nvPr>
+            <p:ph type="body" idx="1"/>
+          </p:nvPr>
+        </p:nvSpPr>
+        <p:spPr/>
+        <p:txBody>
+          <a:bodyPr/>
+          <a:lstStyle/>
+          <a:p>
+            <a:r>
+              <a:rPr lang="en-US" dirty="0"/>
+              <a:t>UAT was conducted manually against the live deployed backend. Each scenario maps to a user story from the requirements. All 6 passed on first run.</a:t>
+            </a:r>
+            <a:endParaRPr lang="en-US" dirty="0"/>
+          </a:p>
+        </p:txBody>
+      </p:sp>
+      <p:sp>
+        <p:nvSpPr>
+          <p:cNvPr id="4" name="Slide Number Placeholder 3"/>
+          <p:cNvSpPr>
+            <a:spLocks noGrp="1"/>
+          </p:cNvSpPr>
+          <p:nvPr>
+            <p:ph type="sldNum" sz="quarter" idx="10"/>
+          </p:nvPr>
+        </p:nvSpPr>
+        <p:spPr/>
+        <p:txBody>
+          <a:bodyPr/>
+          <a:lstStyle/>
+          <a:p>
+            <a:fld id="{F7021451-1387-4CA6-816F-3879F97B5CBC}" type="slidenum">
+              <a:rPr lang="en-US"/>
+              <a:t>13</a:t>
             </a:fld>
             <a:endParaRPr lang="en-US"/>
           </a:p>
@@ -556,6 +956,7 @@
               <a:rPr lang="en-US" dirty="0"/>
               <a:t>MyBahaya has three user types: citizens, organizations, admins. Flow: submit → AI → route → notify → track.</a:t>
             </a:r>
+            <a:endParaRPr lang="en-US" dirty="0"/>
           </a:p>
         </p:txBody>
       </p:sp>
@@ -643,6 +1044,7 @@
               <a:rPr lang="en-US" dirty="0"/>
               <a:t>Four problems: no reporting app, slow routing, no community awareness, fake reports. These gaps justify MyBahaya.</a:t>
             </a:r>
+            <a:endParaRPr lang="en-US" dirty="0"/>
           </a:p>
         </p:txBody>
       </p:sp>
@@ -730,6 +1132,7 @@
               <a:rPr lang="en-US" dirty="0"/>
               <a:t>All statistics from real sources. 99.5% phone ownership confirms mobile reach. 84.7% ambulance delay + response times exceeding WHO benchmarks prove the problem. 169,000 fake calls in 2025 and only 2-3% real calls justify AI fake detection in MyBahaya.</a:t>
             </a:r>
+            <a:endParaRPr lang="en-US" dirty="0"/>
           </a:p>
         </p:txBody>
       </p:sp>
@@ -817,6 +1220,7 @@
               <a:rPr lang="en-US" dirty="0"/>
               <a:t>Only MyBahaya provides all six features. Competitors lack AI analysis, auto routing, and fake detection.</a:t>
             </a:r>
+            <a:endParaRPr lang="en-US" dirty="0"/>
           </a:p>
         </p:txBody>
       </p:sp>
@@ -904,6 +1308,7 @@
               <a:rPr lang="en-US" dirty="0"/>
               <a:t>Three objectives: build mobile reporting app, implement Gemini AI analysis, design geolocation routing system.</a:t>
             </a:r>
+            <a:endParaRPr lang="en-US" dirty="0"/>
           </a:p>
         </p:txBody>
       </p:sp>
@@ -991,6 +1396,7 @@
               <a:rPr lang="en-US" dirty="0"/>
               <a:t>Scope: Android for citizens, organizations, admins. Peninsular Malaysia. Five categories. iOS and government APIs excluded in FYP1.</a:t>
             </a:r>
+            <a:endParaRPr lang="en-US" dirty="0"/>
           </a:p>
         </p:txBody>
       </p:sp>
@@ -1078,6 +1484,7 @@
               <a:rPr lang="en-US" dirty="0"/>
               <a:t>Five Firestore collections. Reports link to Users via userId, to Organisations via assignedOrgId, and mirror sanitised data to Public Incidents. Admins manage the platform.</a:t>
             </a:r>
+            <a:endParaRPr lang="en-US" dirty="0"/>
           </a:p>
         </p:txBody>
       </p:sp>
@@ -1165,6 +1572,7 @@
               <a:rPr lang="en-US" dirty="0"/>
               <a:t>Agile SDLC chosen for its iterative nature. Six phases: Planning through Deployment. Each sprint reviewed with supervisor.</a:t>
             </a:r>
+            <a:endParaRPr lang="en-US" dirty="0"/>
           </a:p>
         </p:txBody>
       </p:sp>
@@ -1237,11 +1645,6 @@
 <file path=ppt/slideMasters/slideMaster1.xml><?xml version="1.0" encoding="utf-8"?>
 <p:sldMaster xmlns:a="http://schemas.openxmlformats.org/drawingml/2006/main" xmlns:r="http://schemas.openxmlformats.org/officeDocument/2006/relationships" xmlns:p="http://schemas.openxmlformats.org/presentationml/2006/main">
   <p:cSld>
-    <p:bg>
-      <p:bgRef idx="1001">
-        <a:schemeClr val="bg1"/>
-      </p:bgRef>
-    </p:bg>
     <p:spTree>
       <p:nvGrpSpPr>
         <p:cNvPr id="1" name=""/>
@@ -1524,7 +1927,6 @@
         <a:solidFill>
           <a:srgbClr val="341515"/>
         </a:solidFill>
-        <a:effectLst/>
       </p:bgPr>
     </p:bg>
     <p:spTree>
@@ -1567,13 +1969,6 @@
             <a:prstDash val="solid"/>
           </a:ln>
         </p:spPr>
-        <p:txBody>
-          <a:bodyPr/>
-          <a:lstStyle/>
-          <a:p>
-            <a:endParaRPr lang="en-US"/>
-          </a:p>
-        </p:txBody>
       </p:sp>
       <p:sp>
         <p:nvSpPr>
@@ -1601,13 +1996,6 @@
             <a:prstDash val="solid"/>
           </a:ln>
         </p:spPr>
-        <p:txBody>
-          <a:bodyPr/>
-          <a:lstStyle/>
-          <a:p>
-            <a:endParaRPr lang="en-US"/>
-          </a:p>
-        </p:txBody>
       </p:sp>
       <p:sp>
         <p:nvSpPr>
@@ -1630,7 +2018,7 @@
           <a:bodyPr wrap="square" lIns="0" tIns="0" rIns="0" bIns="0" rtlCol="0" anchor="ctr"/>
           <a:lstStyle/>
           <a:p>
-            <a:pPr marL="0" indent="0" algn="l">
+            <a:pPr algn="l" indent="0" marL="0">
               <a:buNone/>
             </a:pPr>
             <a:r>
@@ -1669,7 +2057,7 @@
           <a:bodyPr wrap="square" lIns="0" tIns="0" rIns="0" bIns="0" rtlCol="0" anchor="ctr"/>
           <a:lstStyle/>
           <a:p>
-            <a:pPr marL="0" indent="0" algn="l">
+            <a:pPr algn="l" indent="0" marL="0">
               <a:buNone/>
             </a:pPr>
             <a:r>
@@ -1709,13 +2097,6 @@
             <a:prstDash val="solid"/>
           </a:ln>
         </p:spPr>
-        <p:txBody>
-          <a:bodyPr/>
-          <a:lstStyle/>
-          <a:p>
-            <a:endParaRPr lang="en-US"/>
-          </a:p>
-        </p:txBody>
       </p:sp>
       <p:sp>
         <p:nvSpPr>
@@ -1738,7 +2119,7 @@
           <a:bodyPr wrap="square" lIns="0" tIns="0" rIns="0" bIns="0" rtlCol="0" anchor="ctr"/>
           <a:lstStyle/>
           <a:p>
-            <a:pPr marL="0" indent="0" algn="l">
+            <a:pPr algn="l" indent="0" marL="0">
               <a:buNone/>
             </a:pPr>
             <a:r>
@@ -1772,7 +2153,6 @@
         <a:solidFill>
           <a:srgbClr val="FFFFFF"/>
         </a:solidFill>
-        <a:effectLst/>
       </p:bgPr>
     </p:bg>
     <p:spTree>
@@ -1810,7 +2190,7 @@
           <a:bodyPr wrap="square" lIns="0" tIns="0" rIns="0" bIns="0" rtlCol="0" anchor="ctr"/>
           <a:lstStyle/>
           <a:p>
-            <a:pPr marL="0" indent="0" algn="l">
+            <a:pPr algn="l" indent="0" marL="0">
               <a:buNone/>
             </a:pPr>
             <a:r>
@@ -1854,13 +2234,6 @@
             <a:prstDash val="dash"/>
           </a:ln>
         </p:spPr>
-        <p:txBody>
-          <a:bodyPr/>
-          <a:lstStyle/>
-          <a:p>
-            <a:endParaRPr lang="en-US"/>
-          </a:p>
-        </p:txBody>
       </p:sp>
       <p:sp>
         <p:nvSpPr>
@@ -1883,7 +2256,7 @@
           <a:bodyPr wrap="square" lIns="0" tIns="0" rIns="0" bIns="0" rtlCol="0" anchor="ctr"/>
           <a:lstStyle/>
           <a:p>
-            <a:pPr marL="0" indent="0" algn="ctr">
+            <a:pPr algn="ctr" indent="0" marL="0">
               <a:buNone/>
             </a:pPr>
             <a:r>
@@ -1922,7 +2295,7 @@
           <a:bodyPr wrap="square" lIns="0" tIns="0" rIns="0" bIns="0" rtlCol="0" anchor="ctr"/>
           <a:lstStyle/>
           <a:p>
-            <a:pPr marL="0" indent="0" algn="ctr">
+            <a:pPr algn="ctr" indent="0" marL="0">
               <a:buNone/>
             </a:pPr>
             <a:r>
@@ -1966,13 +2339,6 @@
             <a:prstDash val="solid"/>
           </a:ln>
         </p:spPr>
-        <p:txBody>
-          <a:bodyPr/>
-          <a:lstStyle/>
-          <a:p>
-            <a:endParaRPr lang="en-US"/>
-          </a:p>
-        </p:txBody>
       </p:sp>
       <p:sp>
         <p:nvSpPr>
@@ -1995,7 +2361,7 @@
           <a:bodyPr wrap="square" lIns="0" tIns="0" rIns="0" bIns="0" rtlCol="0" anchor="ctr"/>
           <a:lstStyle/>
           <a:p>
-            <a:pPr marL="0" indent="0" algn="ctr">
+            <a:pPr algn="ctr" indent="0" marL="0">
               <a:buNone/>
             </a:pPr>
             <a:r>
@@ -2039,13 +2405,6 @@
             <a:prstDash val="solid"/>
           </a:ln>
         </p:spPr>
-        <p:txBody>
-          <a:bodyPr/>
-          <a:lstStyle/>
-          <a:p>
-            <a:endParaRPr lang="en-US"/>
-          </a:p>
-        </p:txBody>
       </p:sp>
       <p:sp>
         <p:nvSpPr>
@@ -2068,7 +2427,7 @@
           <a:bodyPr wrap="square" lIns="0" tIns="0" rIns="0" bIns="0" rtlCol="0" anchor="ctr"/>
           <a:lstStyle/>
           <a:p>
-            <a:pPr marL="0" indent="0" algn="ctr">
+            <a:pPr algn="ctr" indent="0" marL="0">
               <a:buNone/>
             </a:pPr>
             <a:r>
@@ -2112,13 +2471,6 @@
             <a:prstDash val="solid"/>
           </a:ln>
         </p:spPr>
-        <p:txBody>
-          <a:bodyPr/>
-          <a:lstStyle/>
-          <a:p>
-            <a:endParaRPr lang="en-US"/>
-          </a:p>
-        </p:txBody>
       </p:sp>
       <p:sp>
         <p:nvSpPr>
@@ -2141,7 +2493,7 @@
           <a:bodyPr wrap="square" lIns="0" tIns="0" rIns="0" bIns="0" rtlCol="0" anchor="ctr"/>
           <a:lstStyle/>
           <a:p>
-            <a:pPr marL="0" indent="0" algn="ctr">
+            <a:pPr algn="ctr" indent="0" marL="0">
               <a:buNone/>
             </a:pPr>
             <a:r>
@@ -2185,13 +2537,6 @@
             <a:prstDash val="solid"/>
           </a:ln>
         </p:spPr>
-        <p:txBody>
-          <a:bodyPr/>
-          <a:lstStyle/>
-          <a:p>
-            <a:endParaRPr lang="en-US"/>
-          </a:p>
-        </p:txBody>
       </p:sp>
       <p:sp>
         <p:nvSpPr>
@@ -2214,7 +2559,7 @@
           <a:bodyPr wrap="square" lIns="0" tIns="0" rIns="0" bIns="0" rtlCol="0" anchor="ctr"/>
           <a:lstStyle/>
           <a:p>
-            <a:pPr marL="0" indent="0" algn="ctr">
+            <a:pPr algn="ctr" indent="0" marL="0">
               <a:buNone/>
             </a:pPr>
             <a:r>
@@ -2258,13 +2603,6 @@
             <a:prstDash val="solid"/>
           </a:ln>
         </p:spPr>
-        <p:txBody>
-          <a:bodyPr/>
-          <a:lstStyle/>
-          <a:p>
-            <a:endParaRPr lang="en-US"/>
-          </a:p>
-        </p:txBody>
       </p:sp>
       <p:sp>
         <p:nvSpPr>
@@ -2287,7 +2625,7 @@
           <a:bodyPr wrap="square" lIns="0" tIns="0" rIns="0" bIns="0" rtlCol="0" anchor="ctr"/>
           <a:lstStyle/>
           <a:p>
-            <a:pPr marL="0" indent="0" algn="ctr">
+            <a:pPr algn="ctr" indent="0" marL="0">
               <a:buNone/>
             </a:pPr>
             <a:r>
@@ -2331,13 +2669,6 @@
             <a:prstDash val="solid"/>
           </a:ln>
         </p:spPr>
-        <p:txBody>
-          <a:bodyPr/>
-          <a:lstStyle/>
-          <a:p>
-            <a:endParaRPr lang="en-US"/>
-          </a:p>
-        </p:txBody>
       </p:sp>
       <p:sp>
         <p:nvSpPr>
@@ -2360,7 +2691,7 @@
           <a:bodyPr wrap="square" lIns="0" tIns="0" rIns="0" bIns="0" rtlCol="0" anchor="ctr"/>
           <a:lstStyle/>
           <a:p>
-            <a:pPr marL="0" indent="0" algn="ctr">
+            <a:pPr algn="ctr" indent="0" marL="0">
               <a:buNone/>
             </a:pPr>
             <a:r>
@@ -2378,36 +2709,6 @@
           </a:p>
         </p:txBody>
       </p:sp>
-      <p:pic>
-        <p:nvPicPr>
-          <p:cNvPr id="19" name="Picture 18">
-            <a:extLst>
-              <a:ext uri="{FF2B5EF4-FFF2-40B4-BE49-F238E27FC236}">
-                <a16:creationId xmlns:a16="http://schemas.microsoft.com/office/drawing/2014/main" id="{CC29B228-3C51-44CD-7613-2F8BB820CE2F}"/>
-              </a:ext>
-            </a:extLst>
-          </p:cNvPr>
-          <p:cNvPicPr>
-            <a:picLocks noChangeAspect="1"/>
-          </p:cNvPicPr>
-          <p:nvPr/>
-        </p:nvPicPr>
-        <p:blipFill>
-          <a:blip r:embed="rId3"/>
-          <a:stretch>
-            <a:fillRect/>
-          </a:stretch>
-        </p:blipFill>
-        <p:spPr>
-          <a:xfrm>
-            <a:off x="1980500" y="914400"/>
-            <a:ext cx="5170174" cy="3657600"/>
-          </a:xfrm>
-          <a:prstGeom prst="rect">
-            <a:avLst/>
-          </a:prstGeom>
-        </p:spPr>
-      </p:pic>
     </p:spTree>
   </p:cSld>
   <p:clrMapOvr>
@@ -2424,7 +2725,6 @@
         <a:solidFill>
           <a:srgbClr val="341515"/>
         </a:solidFill>
-        <a:effectLst/>
       </p:bgPr>
     </p:bg>
     <p:spTree>
@@ -2467,13 +2767,6 @@
             <a:prstDash val="solid"/>
           </a:ln>
         </p:spPr>
-        <p:txBody>
-          <a:bodyPr/>
-          <a:lstStyle/>
-          <a:p>
-            <a:endParaRPr lang="en-US"/>
-          </a:p>
-        </p:txBody>
       </p:sp>
       <p:sp>
         <p:nvSpPr>
@@ -2501,13 +2794,6 @@
             <a:prstDash val="solid"/>
           </a:ln>
         </p:spPr>
-        <p:txBody>
-          <a:bodyPr/>
-          <a:lstStyle/>
-          <a:p>
-            <a:endParaRPr lang="en-US"/>
-          </a:p>
-        </p:txBody>
       </p:sp>
       <p:sp>
         <p:nvSpPr>
@@ -2530,7 +2816,7 @@
           <a:bodyPr wrap="square" lIns="0" tIns="0" rIns="0" bIns="0" rtlCol="0" anchor="ctr"/>
           <a:lstStyle/>
           <a:p>
-            <a:pPr marL="0" indent="0" algn="l">
+            <a:pPr algn="l" indent="0" marL="0">
               <a:buNone/>
             </a:pPr>
             <a:r>
@@ -2572,13 +2858,6 @@
             <a:prstDash val="solid"/>
           </a:ln>
         </p:spPr>
-        <p:txBody>
-          <a:bodyPr/>
-          <a:lstStyle/>
-          <a:p>
-            <a:endParaRPr lang="en-US"/>
-          </a:p>
-        </p:txBody>
       </p:sp>
       <p:sp>
         <p:nvSpPr>
@@ -2601,7 +2880,7 @@
           <a:bodyPr wrap="square" lIns="0" tIns="0" rIns="0" bIns="0" rtlCol="0" anchor="ctr"/>
           <a:lstStyle/>
           <a:p>
-            <a:pPr marL="0" indent="0" algn="ctr">
+            <a:pPr algn="ctr" indent="0" marL="0">
               <a:buNone/>
             </a:pPr>
             <a:r>
@@ -2640,7 +2919,7 @@
           <a:bodyPr wrap="square" lIns="0" tIns="0" rIns="0" bIns="0" rtlCol="0" anchor="ctr"/>
           <a:lstStyle/>
           <a:p>
-            <a:pPr marL="0" indent="0" algn="l">
+            <a:pPr algn="l" indent="0" marL="0">
               <a:buNone/>
             </a:pPr>
             <a:r>
@@ -2682,13 +2961,6 @@
             <a:prstDash val="solid"/>
           </a:ln>
         </p:spPr>
-        <p:txBody>
-          <a:bodyPr/>
-          <a:lstStyle/>
-          <a:p>
-            <a:endParaRPr lang="en-US"/>
-          </a:p>
-        </p:txBody>
       </p:sp>
       <p:sp>
         <p:nvSpPr>
@@ -2711,7 +2983,7 @@
           <a:bodyPr wrap="square" lIns="0" tIns="0" rIns="0" bIns="0" rtlCol="0" anchor="ctr"/>
           <a:lstStyle/>
           <a:p>
-            <a:pPr marL="0" indent="0" algn="ctr">
+            <a:pPr algn="ctr" indent="0" marL="0">
               <a:buNone/>
             </a:pPr>
             <a:r>
@@ -2750,7 +3022,7 @@
           <a:bodyPr wrap="square" lIns="0" tIns="0" rIns="0" bIns="0" rtlCol="0" anchor="ctr"/>
           <a:lstStyle/>
           <a:p>
-            <a:pPr marL="0" indent="0" algn="l">
+            <a:pPr algn="l" indent="0" marL="0">
               <a:buNone/>
             </a:pPr>
             <a:r>
@@ -2792,13 +3064,6 @@
             <a:prstDash val="solid"/>
           </a:ln>
         </p:spPr>
-        <p:txBody>
-          <a:bodyPr/>
-          <a:lstStyle/>
-          <a:p>
-            <a:endParaRPr lang="en-US"/>
-          </a:p>
-        </p:txBody>
       </p:sp>
       <p:sp>
         <p:nvSpPr>
@@ -2821,7 +3086,7 @@
           <a:bodyPr wrap="square" lIns="0" tIns="0" rIns="0" bIns="0" rtlCol="0" anchor="ctr"/>
           <a:lstStyle/>
           <a:p>
-            <a:pPr marL="0" indent="0" algn="ctr">
+            <a:pPr algn="ctr" indent="0" marL="0">
               <a:buNone/>
             </a:pPr>
             <a:r>
@@ -2860,7 +3125,7 @@
           <a:bodyPr wrap="square" lIns="0" tIns="0" rIns="0" bIns="0" rtlCol="0" anchor="ctr"/>
           <a:lstStyle/>
           <a:p>
-            <a:pPr marL="0" indent="0" algn="l">
+            <a:pPr algn="l" indent="0" marL="0">
               <a:buNone/>
             </a:pPr>
             <a:r>
@@ -2902,13 +3167,6 @@
             <a:prstDash val="solid"/>
           </a:ln>
         </p:spPr>
-        <p:txBody>
-          <a:bodyPr/>
-          <a:lstStyle/>
-          <a:p>
-            <a:endParaRPr lang="en-US"/>
-          </a:p>
-        </p:txBody>
       </p:sp>
       <p:sp>
         <p:nvSpPr>
@@ -2931,7 +3189,7 @@
           <a:bodyPr wrap="square" lIns="0" tIns="0" rIns="0" bIns="0" rtlCol="0" anchor="ctr"/>
           <a:lstStyle/>
           <a:p>
-            <a:pPr marL="0" indent="0" algn="ctr">
+            <a:pPr algn="ctr" indent="0" marL="0">
               <a:buNone/>
             </a:pPr>
             <a:r>
@@ -2970,7 +3228,7 @@
           <a:bodyPr wrap="square" lIns="0" tIns="0" rIns="0" bIns="0" rtlCol="0" anchor="ctr"/>
           <a:lstStyle/>
           <a:p>
-            <a:pPr marL="0" indent="0" algn="l">
+            <a:pPr algn="l" indent="0" marL="0">
               <a:buNone/>
             </a:pPr>
             <a:r>
@@ -3009,7 +3267,7 @@
           <a:bodyPr wrap="square" lIns="0" tIns="0" rIns="0" bIns="0" rtlCol="0" anchor="ctr"/>
           <a:lstStyle/>
           <a:p>
-            <a:pPr marL="0" indent="0" algn="ctr">
+            <a:pPr algn="ctr" indent="0" marL="0">
               <a:buNone/>
             </a:pPr>
             <a:r>
@@ -3024,6 +3282,4069 @@
               <a:t>Thank you  ·  Terima kasih  ·  Q&amp;A</a:t>
             </a:r>
             <a:endParaRPr lang="en-US" sz="1300" dirty="0"/>
+          </a:p>
+        </p:txBody>
+      </p:sp>
+    </p:spTree>
+  </p:cSld>
+  <p:clrMapOvr>
+    <a:masterClrMapping/>
+  </p:clrMapOvr>
+</p:sld>
+</file>
+
+<file path=ppt/slides/slide12.xml><?xml version="1.0" encoding="utf-8"?>
+<p:sld xmlns:a="http://schemas.openxmlformats.org/drawingml/2006/main" xmlns:r="http://schemas.openxmlformats.org/officeDocument/2006/relationships" xmlns:p="http://schemas.openxmlformats.org/presentationml/2006/main">
+  <p:cSld name="Slide 12">
+    <p:bg>
+      <p:bgPr>
+        <a:solidFill>
+          <a:srgbClr val="FFFFFF"/>
+        </a:solidFill>
+      </p:bgPr>
+    </p:bg>
+    <p:spTree>
+      <p:nvGrpSpPr>
+        <p:cNvPr id="1" name=""/>
+        <p:cNvGrpSpPr/>
+        <p:nvPr/>
+      </p:nvGrpSpPr>
+      <p:grpSpPr>
+        <a:xfrm>
+          <a:off x="0" y="0"/>
+          <a:ext cx="0" cy="0"/>
+          <a:chOff x="0" y="0"/>
+          <a:chExt cx="0" cy="0"/>
+        </a:xfrm>
+      </p:grpSpPr>
+      <p:sp>
+        <p:nvSpPr>
+          <p:cNvPr id="2" name="Text 0"/>
+          <p:cNvSpPr/>
+          <p:nvPr/>
+        </p:nvSpPr>
+        <p:spPr>
+          <a:xfrm>
+            <a:off x="457200" y="164592"/>
+            <a:ext cx="8229600" cy="594360"/>
+          </a:xfrm>
+          <a:prstGeom prst="rect">
+            <a:avLst/>
+          </a:prstGeom>
+          <a:noFill/>
+          <a:ln/>
+        </p:spPr>
+        <p:txBody>
+          <a:bodyPr wrap="square" lIns="0" tIns="0" rIns="0" bIns="0" rtlCol="0" anchor="ctr"/>
+          <a:lstStyle/>
+          <a:p>
+            <a:pPr algn="l" indent="0" marL="0">
+              <a:buNone/>
+            </a:pPr>
+            <a:r>
+              <a:rPr lang="en-US" sz="3000" b="1" dirty="0">
+                <a:solidFill>
+                  <a:srgbClr val="341515"/>
+                </a:solidFill>
+                <a:latin typeface="Cambria" pitchFamily="34" charset="0"/>
+                <a:ea typeface="Cambria" pitchFamily="34" charset="-122"/>
+                <a:cs typeface="Cambria" pitchFamily="34" charset="-120"/>
+              </a:rPr>
+              <a:t>Testing Results</a:t>
+            </a:r>
+            <a:endParaRPr lang="en-US" sz="3000" dirty="0"/>
+          </a:p>
+        </p:txBody>
+      </p:sp>
+      <p:sp>
+        <p:nvSpPr>
+          <p:cNvPr id="3" name="Text 1"/>
+          <p:cNvSpPr/>
+          <p:nvPr/>
+        </p:nvSpPr>
+        <p:spPr>
+          <a:xfrm>
+            <a:off x="457200" y="777240"/>
+            <a:ext cx="7772400" cy="320040"/>
+          </a:xfrm>
+          <a:prstGeom prst="rect">
+            <a:avLst/>
+          </a:prstGeom>
+          <a:noFill/>
+          <a:ln/>
+        </p:spPr>
+        <p:txBody>
+          <a:bodyPr wrap="square" lIns="0" tIns="0" rIns="0" bIns="0" rtlCol="0" anchor="ctr"/>
+          <a:lstStyle/>
+          <a:p>
+            <a:pPr algn="l" indent="0" marL="0">
+              <a:buNone/>
+            </a:pPr>
+            <a:r>
+              <a:rPr lang="en-US" sz="1150" dirty="0">
+                <a:solidFill>
+                  <a:srgbClr val="666666"/>
+                </a:solidFill>
+                <a:latin typeface="Calibri" pitchFamily="34" charset="0"/>
+                <a:ea typeface="Calibri" pitchFamily="34" charset="-122"/>
+                <a:cs typeface="Calibri" pitchFamily="34" charset="-120"/>
+              </a:rPr>
+              <a:t>Unit testing across six backend modules — JUnit 5 + Mockito, no external dependencies.</a:t>
+            </a:r>
+            <a:endParaRPr lang="en-US" sz="1150" dirty="0"/>
+          </a:p>
+        </p:txBody>
+      </p:sp>
+      <p:sp>
+        <p:nvSpPr>
+          <p:cNvPr id="4" name="Shape 2"/>
+          <p:cNvSpPr/>
+          <p:nvPr/>
+        </p:nvSpPr>
+        <p:spPr>
+          <a:xfrm>
+            <a:off x="457200" y="1170432"/>
+            <a:ext cx="6858000" cy="384048"/>
+          </a:xfrm>
+          <a:prstGeom prst="rect">
+            <a:avLst/>
+          </a:prstGeom>
+          <a:solidFill>
+            <a:srgbClr val="F5F5F5"/>
+          </a:solidFill>
+          <a:ln w="6350">
+            <a:solidFill>
+              <a:srgbClr val="E0E0E0"/>
+            </a:solidFill>
+            <a:prstDash val="solid"/>
+          </a:ln>
+        </p:spPr>
+      </p:sp>
+      <p:sp>
+        <p:nvSpPr>
+          <p:cNvPr id="5" name="Text 3"/>
+          <p:cNvSpPr/>
+          <p:nvPr/>
+        </p:nvSpPr>
+        <p:spPr>
+          <a:xfrm>
+            <a:off x="502920" y="1188720"/>
+            <a:ext cx="640080" cy="347472"/>
+          </a:xfrm>
+          <a:prstGeom prst="rect">
+            <a:avLst/>
+          </a:prstGeom>
+          <a:noFill/>
+          <a:ln/>
+        </p:spPr>
+        <p:txBody>
+          <a:bodyPr wrap="square" lIns="0" tIns="0" rIns="0" bIns="0" rtlCol="0" anchor="ctr"/>
+          <a:lstStyle/>
+          <a:p>
+            <a:pPr algn="l" indent="0" marL="0">
+              <a:buNone/>
+            </a:pPr>
+            <a:r>
+              <a:rPr lang="en-US" sz="1050" b="1" dirty="0">
+                <a:solidFill>
+                  <a:srgbClr val="341515"/>
+                </a:solidFill>
+                <a:latin typeface="Calibri" pitchFamily="34" charset="0"/>
+                <a:ea typeface="Calibri" pitchFamily="34" charset="-122"/>
+                <a:cs typeface="Calibri" pitchFamily="34" charset="-120"/>
+              </a:rPr>
+              <a:t>Module</a:t>
+            </a:r>
+            <a:endParaRPr lang="en-US" sz="1050" dirty="0"/>
+          </a:p>
+        </p:txBody>
+      </p:sp>
+      <p:sp>
+        <p:nvSpPr>
+          <p:cNvPr id="6" name="Text 4"/>
+          <p:cNvSpPr/>
+          <p:nvPr/>
+        </p:nvSpPr>
+        <p:spPr>
+          <a:xfrm>
+            <a:off x="1234440" y="1188720"/>
+            <a:ext cx="3657600" cy="347472"/>
+          </a:xfrm>
+          <a:prstGeom prst="rect">
+            <a:avLst/>
+          </a:prstGeom>
+          <a:noFill/>
+          <a:ln/>
+        </p:spPr>
+        <p:txBody>
+          <a:bodyPr wrap="square" lIns="0" tIns="0" rIns="0" bIns="0" rtlCol="0" anchor="ctr"/>
+          <a:lstStyle/>
+          <a:p>
+            <a:pPr algn="l" indent="0" marL="0">
+              <a:buNone/>
+            </a:pPr>
+            <a:r>
+              <a:rPr lang="en-US" sz="1050" b="1" dirty="0">
+                <a:solidFill>
+                  <a:srgbClr val="341515"/>
+                </a:solidFill>
+                <a:latin typeface="Calibri" pitchFamily="34" charset="0"/>
+                <a:ea typeface="Calibri" pitchFamily="34" charset="-122"/>
+                <a:cs typeface="Calibri" pitchFamily="34" charset="-120"/>
+              </a:rPr>
+              <a:t>Description</a:t>
+            </a:r>
+            <a:endParaRPr lang="en-US" sz="1050" dirty="0"/>
+          </a:p>
+        </p:txBody>
+      </p:sp>
+      <p:sp>
+        <p:nvSpPr>
+          <p:cNvPr id="7" name="Text 5"/>
+          <p:cNvSpPr/>
+          <p:nvPr/>
+        </p:nvSpPr>
+        <p:spPr>
+          <a:xfrm>
+            <a:off x="4983480" y="1188720"/>
+            <a:ext cx="822960" cy="347472"/>
+          </a:xfrm>
+          <a:prstGeom prst="rect">
+            <a:avLst/>
+          </a:prstGeom>
+          <a:noFill/>
+          <a:ln/>
+        </p:spPr>
+        <p:txBody>
+          <a:bodyPr wrap="square" lIns="0" tIns="0" rIns="0" bIns="0" rtlCol="0" anchor="ctr"/>
+          <a:lstStyle/>
+          <a:p>
+            <a:pPr algn="ctr" indent="0" marL="0">
+              <a:buNone/>
+            </a:pPr>
+            <a:r>
+              <a:rPr lang="en-US" sz="1050" b="1" dirty="0">
+                <a:solidFill>
+                  <a:srgbClr val="341515"/>
+                </a:solidFill>
+                <a:latin typeface="Calibri" pitchFamily="34" charset="0"/>
+                <a:ea typeface="Calibri" pitchFamily="34" charset="-122"/>
+                <a:cs typeface="Calibri" pitchFamily="34" charset="-120"/>
+              </a:rPr>
+              <a:t>Cases</a:t>
+            </a:r>
+            <a:endParaRPr lang="en-US" sz="1050" dirty="0"/>
+          </a:p>
+        </p:txBody>
+      </p:sp>
+      <p:sp>
+        <p:nvSpPr>
+          <p:cNvPr id="8" name="Text 6"/>
+          <p:cNvSpPr/>
+          <p:nvPr/>
+        </p:nvSpPr>
+        <p:spPr>
+          <a:xfrm>
+            <a:off x="5806440" y="1188720"/>
+            <a:ext cx="731520" cy="347472"/>
+          </a:xfrm>
+          <a:prstGeom prst="rect">
+            <a:avLst/>
+          </a:prstGeom>
+          <a:noFill/>
+          <a:ln/>
+        </p:spPr>
+        <p:txBody>
+          <a:bodyPr wrap="square" lIns="0" tIns="0" rIns="0" bIns="0" rtlCol="0" anchor="ctr"/>
+          <a:lstStyle/>
+          <a:p>
+            <a:pPr algn="ctr" indent="0" marL="0">
+              <a:buNone/>
+            </a:pPr>
+            <a:r>
+              <a:rPr lang="en-US" sz="1050" b="1" dirty="0">
+                <a:solidFill>
+                  <a:srgbClr val="341515"/>
+                </a:solidFill>
+                <a:latin typeface="Calibri" pitchFamily="34" charset="0"/>
+                <a:ea typeface="Calibri" pitchFamily="34" charset="-122"/>
+                <a:cs typeface="Calibri" pitchFamily="34" charset="-120"/>
+              </a:rPr>
+              <a:t>Pass</a:t>
+            </a:r>
+            <a:endParaRPr lang="en-US" sz="1050" dirty="0"/>
+          </a:p>
+        </p:txBody>
+      </p:sp>
+      <p:sp>
+        <p:nvSpPr>
+          <p:cNvPr id="9" name="Text 7"/>
+          <p:cNvSpPr/>
+          <p:nvPr/>
+        </p:nvSpPr>
+        <p:spPr>
+          <a:xfrm>
+            <a:off x="6537960" y="1188720"/>
+            <a:ext cx="548640" cy="347472"/>
+          </a:xfrm>
+          <a:prstGeom prst="rect">
+            <a:avLst/>
+          </a:prstGeom>
+          <a:noFill/>
+          <a:ln/>
+        </p:spPr>
+        <p:txBody>
+          <a:bodyPr wrap="square" lIns="0" tIns="0" rIns="0" bIns="0" rtlCol="0" anchor="ctr"/>
+          <a:lstStyle/>
+          <a:p>
+            <a:pPr algn="ctr" indent="0" marL="0">
+              <a:buNone/>
+            </a:pPr>
+            <a:r>
+              <a:rPr lang="en-US" sz="1050" b="1" dirty="0">
+                <a:solidFill>
+                  <a:srgbClr val="341515"/>
+                </a:solidFill>
+                <a:latin typeface="Calibri" pitchFamily="34" charset="0"/>
+                <a:ea typeface="Calibri" pitchFamily="34" charset="-122"/>
+                <a:cs typeface="Calibri" pitchFamily="34" charset="-120"/>
+              </a:rPr>
+              <a:t>Fail</a:t>
+            </a:r>
+            <a:endParaRPr lang="en-US" sz="1050" dirty="0"/>
+          </a:p>
+        </p:txBody>
+      </p:sp>
+      <p:sp>
+        <p:nvSpPr>
+          <p:cNvPr id="10" name="Shape 8"/>
+          <p:cNvSpPr/>
+          <p:nvPr/>
+        </p:nvSpPr>
+        <p:spPr>
+          <a:xfrm>
+            <a:off x="457200" y="1572768"/>
+            <a:ext cx="6858000" cy="393192"/>
+          </a:xfrm>
+          <a:prstGeom prst="rect">
+            <a:avLst/>
+          </a:prstGeom>
+          <a:solidFill>
+            <a:srgbClr val="FAFAFA"/>
+          </a:solidFill>
+          <a:ln w="3810">
+            <a:solidFill>
+              <a:srgbClr val="E8E8E8"/>
+            </a:solidFill>
+            <a:prstDash val="solid"/>
+          </a:ln>
+        </p:spPr>
+      </p:sp>
+      <p:sp>
+        <p:nvSpPr>
+          <p:cNvPr id="11" name="Shape 9"/>
+          <p:cNvSpPr/>
+          <p:nvPr/>
+        </p:nvSpPr>
+        <p:spPr>
+          <a:xfrm>
+            <a:off x="502920" y="1636776"/>
+            <a:ext cx="457200" cy="256032"/>
+          </a:xfrm>
+          <a:prstGeom prst="roundRect">
+            <a:avLst>
+              <a:gd name="adj" fmla="val 14286"/>
+            </a:avLst>
+          </a:prstGeom>
+          <a:solidFill>
+            <a:srgbClr val="341515"/>
+          </a:solidFill>
+          <a:ln w="12700">
+            <a:solidFill>
+              <a:srgbClr val="341515"/>
+            </a:solidFill>
+            <a:prstDash val="solid"/>
+          </a:ln>
+        </p:spPr>
+      </p:sp>
+      <p:sp>
+        <p:nvSpPr>
+          <p:cNvPr id="12" name="Text 10"/>
+          <p:cNvSpPr/>
+          <p:nvPr/>
+        </p:nvSpPr>
+        <p:spPr>
+          <a:xfrm>
+            <a:off x="502920" y="1636776"/>
+            <a:ext cx="457200" cy="256032"/>
+          </a:xfrm>
+          <a:prstGeom prst="rect">
+            <a:avLst/>
+          </a:prstGeom>
+          <a:noFill/>
+          <a:ln/>
+        </p:spPr>
+        <p:txBody>
+          <a:bodyPr wrap="square" lIns="0" tIns="0" rIns="0" bIns="0" rtlCol="0" anchor="ctr"/>
+          <a:lstStyle/>
+          <a:p>
+            <a:pPr algn="ctr" indent="0" marL="0">
+              <a:buNone/>
+            </a:pPr>
+            <a:r>
+              <a:rPr lang="en-US" sz="950" b="1" dirty="0">
+                <a:solidFill>
+                  <a:srgbClr val="FFFFFF"/>
+                </a:solidFill>
+                <a:latin typeface="Cambria" pitchFamily="34" charset="0"/>
+                <a:ea typeface="Cambria" pitchFamily="34" charset="-122"/>
+                <a:cs typeface="Cambria" pitchFamily="34" charset="-120"/>
+              </a:rPr>
+              <a:t>1</a:t>
+            </a:r>
+            <a:endParaRPr lang="en-US" sz="950" dirty="0"/>
+          </a:p>
+        </p:txBody>
+      </p:sp>
+      <p:sp>
+        <p:nvSpPr>
+          <p:cNvPr id="13" name="Text 11"/>
+          <p:cNvSpPr/>
+          <p:nvPr/>
+        </p:nvSpPr>
+        <p:spPr>
+          <a:xfrm>
+            <a:off x="1051560" y="1618488"/>
+            <a:ext cx="3749040" cy="301752"/>
+          </a:xfrm>
+          <a:prstGeom prst="rect">
+            <a:avLst/>
+          </a:prstGeom>
+          <a:noFill/>
+          <a:ln/>
+        </p:spPr>
+        <p:txBody>
+          <a:bodyPr wrap="square" lIns="0" tIns="0" rIns="0" bIns="0" rtlCol="0" anchor="ctr"/>
+          <a:lstStyle/>
+          <a:p>
+            <a:pPr algn="l" indent="0" marL="0">
+              <a:buNone/>
+            </a:pPr>
+            <a:r>
+              <a:rPr lang="en-US" sz="1100" dirty="0">
+                <a:solidFill>
+                  <a:srgbClr val="2A1515"/>
+                </a:solidFill>
+                <a:latin typeface="Calibri" pitchFamily="34" charset="0"/>
+                <a:ea typeface="Calibri" pitchFamily="34" charset="-122"/>
+                <a:cs typeface="Calibri" pitchFamily="34" charset="-120"/>
+              </a:rPr>
+              <a:t>Authentication &amp; token filtering</a:t>
+            </a:r>
+            <a:endParaRPr lang="en-US" sz="1100" dirty="0"/>
+          </a:p>
+        </p:txBody>
+      </p:sp>
+      <p:sp>
+        <p:nvSpPr>
+          <p:cNvPr id="14" name="Text 12"/>
+          <p:cNvSpPr/>
+          <p:nvPr/>
+        </p:nvSpPr>
+        <p:spPr>
+          <a:xfrm>
+            <a:off x="4983480" y="1618488"/>
+            <a:ext cx="822960" cy="301752"/>
+          </a:xfrm>
+          <a:prstGeom prst="rect">
+            <a:avLst/>
+          </a:prstGeom>
+          <a:noFill/>
+          <a:ln/>
+        </p:spPr>
+        <p:txBody>
+          <a:bodyPr wrap="square" lIns="0" tIns="0" rIns="0" bIns="0" rtlCol="0" anchor="ctr"/>
+          <a:lstStyle/>
+          <a:p>
+            <a:pPr algn="ctr" indent="0" marL="0">
+              <a:buNone/>
+            </a:pPr>
+            <a:r>
+              <a:rPr lang="en-US" sz="1100" dirty="0">
+                <a:solidFill>
+                  <a:srgbClr val="2A1515"/>
+                </a:solidFill>
+                <a:latin typeface="Calibri" pitchFamily="34" charset="0"/>
+                <a:ea typeface="Calibri" pitchFamily="34" charset="-122"/>
+                <a:cs typeface="Calibri" pitchFamily="34" charset="-120"/>
+              </a:rPr>
+              <a:t>4</a:t>
+            </a:r>
+            <a:endParaRPr lang="en-US" sz="1100" dirty="0"/>
+          </a:p>
+        </p:txBody>
+      </p:sp>
+      <p:sp>
+        <p:nvSpPr>
+          <p:cNvPr id="15" name="Text 13"/>
+          <p:cNvSpPr/>
+          <p:nvPr/>
+        </p:nvSpPr>
+        <p:spPr>
+          <a:xfrm>
+            <a:off x="5806440" y="1618488"/>
+            <a:ext cx="731520" cy="301752"/>
+          </a:xfrm>
+          <a:prstGeom prst="rect">
+            <a:avLst/>
+          </a:prstGeom>
+          <a:noFill/>
+          <a:ln/>
+        </p:spPr>
+        <p:txBody>
+          <a:bodyPr wrap="square" lIns="0" tIns="0" rIns="0" bIns="0" rtlCol="0" anchor="ctr"/>
+          <a:lstStyle/>
+          <a:p>
+            <a:pPr algn="ctr" indent="0" marL="0">
+              <a:buNone/>
+            </a:pPr>
+            <a:r>
+              <a:rPr lang="en-US" sz="1100" b="1" dirty="0">
+                <a:solidFill>
+                  <a:srgbClr val="1A7A1A"/>
+                </a:solidFill>
+                <a:latin typeface="Calibri" pitchFamily="34" charset="0"/>
+                <a:ea typeface="Calibri" pitchFamily="34" charset="-122"/>
+                <a:cs typeface="Calibri" pitchFamily="34" charset="-120"/>
+              </a:rPr>
+              <a:t>4</a:t>
+            </a:r>
+            <a:endParaRPr lang="en-US" sz="1100" dirty="0"/>
+          </a:p>
+        </p:txBody>
+      </p:sp>
+      <p:sp>
+        <p:nvSpPr>
+          <p:cNvPr id="16" name="Text 14"/>
+          <p:cNvSpPr/>
+          <p:nvPr/>
+        </p:nvSpPr>
+        <p:spPr>
+          <a:xfrm>
+            <a:off x="6537960" y="1618488"/>
+            <a:ext cx="548640" cy="301752"/>
+          </a:xfrm>
+          <a:prstGeom prst="rect">
+            <a:avLst/>
+          </a:prstGeom>
+          <a:noFill/>
+          <a:ln/>
+        </p:spPr>
+        <p:txBody>
+          <a:bodyPr wrap="square" lIns="0" tIns="0" rIns="0" bIns="0" rtlCol="0" anchor="ctr"/>
+          <a:lstStyle/>
+          <a:p>
+            <a:pPr algn="ctr" indent="0" marL="0">
+              <a:buNone/>
+            </a:pPr>
+            <a:r>
+              <a:rPr lang="en-US" sz="1100" dirty="0">
+                <a:solidFill>
+                  <a:srgbClr val="2A1515"/>
+                </a:solidFill>
+                <a:latin typeface="Calibri" pitchFamily="34" charset="0"/>
+                <a:ea typeface="Calibri" pitchFamily="34" charset="-122"/>
+                <a:cs typeface="Calibri" pitchFamily="34" charset="-120"/>
+              </a:rPr>
+              <a:t>0</a:t>
+            </a:r>
+            <a:endParaRPr lang="en-US" sz="1100" dirty="0"/>
+          </a:p>
+        </p:txBody>
+      </p:sp>
+      <p:sp>
+        <p:nvSpPr>
+          <p:cNvPr id="17" name="Shape 15"/>
+          <p:cNvSpPr/>
+          <p:nvPr/>
+        </p:nvSpPr>
+        <p:spPr>
+          <a:xfrm>
+            <a:off x="457200" y="1975104"/>
+            <a:ext cx="6858000" cy="393192"/>
+          </a:xfrm>
+          <a:prstGeom prst="rect">
+            <a:avLst/>
+          </a:prstGeom>
+          <a:solidFill>
+            <a:srgbClr val="FFFFFF"/>
+          </a:solidFill>
+          <a:ln w="3810">
+            <a:solidFill>
+              <a:srgbClr val="E8E8E8"/>
+            </a:solidFill>
+            <a:prstDash val="solid"/>
+          </a:ln>
+        </p:spPr>
+      </p:sp>
+      <p:sp>
+        <p:nvSpPr>
+          <p:cNvPr id="18" name="Shape 16"/>
+          <p:cNvSpPr/>
+          <p:nvPr/>
+        </p:nvSpPr>
+        <p:spPr>
+          <a:xfrm>
+            <a:off x="502920" y="2039112"/>
+            <a:ext cx="457200" cy="256032"/>
+          </a:xfrm>
+          <a:prstGeom prst="roundRect">
+            <a:avLst>
+              <a:gd name="adj" fmla="val 14286"/>
+            </a:avLst>
+          </a:prstGeom>
+          <a:solidFill>
+            <a:srgbClr val="341515"/>
+          </a:solidFill>
+          <a:ln w="12700">
+            <a:solidFill>
+              <a:srgbClr val="341515"/>
+            </a:solidFill>
+            <a:prstDash val="solid"/>
+          </a:ln>
+        </p:spPr>
+      </p:sp>
+      <p:sp>
+        <p:nvSpPr>
+          <p:cNvPr id="19" name="Text 17"/>
+          <p:cNvSpPr/>
+          <p:nvPr/>
+        </p:nvSpPr>
+        <p:spPr>
+          <a:xfrm>
+            <a:off x="502920" y="2039112"/>
+            <a:ext cx="457200" cy="256032"/>
+          </a:xfrm>
+          <a:prstGeom prst="rect">
+            <a:avLst/>
+          </a:prstGeom>
+          <a:noFill/>
+          <a:ln/>
+        </p:spPr>
+        <p:txBody>
+          <a:bodyPr wrap="square" lIns="0" tIns="0" rIns="0" bIns="0" rtlCol="0" anchor="ctr"/>
+          <a:lstStyle/>
+          <a:p>
+            <a:pPr algn="ctr" indent="0" marL="0">
+              <a:buNone/>
+            </a:pPr>
+            <a:r>
+              <a:rPr lang="en-US" sz="950" b="1" dirty="0">
+                <a:solidFill>
+                  <a:srgbClr val="FFFFFF"/>
+                </a:solidFill>
+                <a:latin typeface="Cambria" pitchFamily="34" charset="0"/>
+                <a:ea typeface="Cambria" pitchFamily="34" charset="-122"/>
+                <a:cs typeface="Cambria" pitchFamily="34" charset="-120"/>
+              </a:rPr>
+              <a:t>2</a:t>
+            </a:r>
+            <a:endParaRPr lang="en-US" sz="950" dirty="0"/>
+          </a:p>
+        </p:txBody>
+      </p:sp>
+      <p:sp>
+        <p:nvSpPr>
+          <p:cNvPr id="20" name="Text 18"/>
+          <p:cNvSpPr/>
+          <p:nvPr/>
+        </p:nvSpPr>
+        <p:spPr>
+          <a:xfrm>
+            <a:off x="1051560" y="2020824"/>
+            <a:ext cx="3749040" cy="301752"/>
+          </a:xfrm>
+          <a:prstGeom prst="rect">
+            <a:avLst/>
+          </a:prstGeom>
+          <a:noFill/>
+          <a:ln/>
+        </p:spPr>
+        <p:txBody>
+          <a:bodyPr wrap="square" lIns="0" tIns="0" rIns="0" bIns="0" rtlCol="0" anchor="ctr"/>
+          <a:lstStyle/>
+          <a:p>
+            <a:pPr algn="l" indent="0" marL="0">
+              <a:buNone/>
+            </a:pPr>
+            <a:r>
+              <a:rPr lang="en-US" sz="1100" dirty="0">
+                <a:solidFill>
+                  <a:srgbClr val="2A1515"/>
+                </a:solidFill>
+                <a:latin typeface="Calibri" pitchFamily="34" charset="0"/>
+                <a:ea typeface="Calibri" pitchFamily="34" charset="-122"/>
+                <a:cs typeface="Calibri" pitchFamily="34" charset="-120"/>
+              </a:rPr>
+              <a:t>Report submission validation</a:t>
+            </a:r>
+            <a:endParaRPr lang="en-US" sz="1100" dirty="0"/>
+          </a:p>
+        </p:txBody>
+      </p:sp>
+      <p:sp>
+        <p:nvSpPr>
+          <p:cNvPr id="21" name="Text 19"/>
+          <p:cNvSpPr/>
+          <p:nvPr/>
+        </p:nvSpPr>
+        <p:spPr>
+          <a:xfrm>
+            <a:off x="4983480" y="2020824"/>
+            <a:ext cx="822960" cy="301752"/>
+          </a:xfrm>
+          <a:prstGeom prst="rect">
+            <a:avLst/>
+          </a:prstGeom>
+          <a:noFill/>
+          <a:ln/>
+        </p:spPr>
+        <p:txBody>
+          <a:bodyPr wrap="square" lIns="0" tIns="0" rIns="0" bIns="0" rtlCol="0" anchor="ctr"/>
+          <a:lstStyle/>
+          <a:p>
+            <a:pPr algn="ctr" indent="0" marL="0">
+              <a:buNone/>
+            </a:pPr>
+            <a:r>
+              <a:rPr lang="en-US" sz="1100" dirty="0">
+                <a:solidFill>
+                  <a:srgbClr val="2A1515"/>
+                </a:solidFill>
+                <a:latin typeface="Calibri" pitchFamily="34" charset="0"/>
+                <a:ea typeface="Calibri" pitchFamily="34" charset="-122"/>
+                <a:cs typeface="Calibri" pitchFamily="34" charset="-120"/>
+              </a:rPr>
+              <a:t>4</a:t>
+            </a:r>
+            <a:endParaRPr lang="en-US" sz="1100" dirty="0"/>
+          </a:p>
+        </p:txBody>
+      </p:sp>
+      <p:sp>
+        <p:nvSpPr>
+          <p:cNvPr id="22" name="Text 20"/>
+          <p:cNvSpPr/>
+          <p:nvPr/>
+        </p:nvSpPr>
+        <p:spPr>
+          <a:xfrm>
+            <a:off x="5806440" y="2020824"/>
+            <a:ext cx="731520" cy="301752"/>
+          </a:xfrm>
+          <a:prstGeom prst="rect">
+            <a:avLst/>
+          </a:prstGeom>
+          <a:noFill/>
+          <a:ln/>
+        </p:spPr>
+        <p:txBody>
+          <a:bodyPr wrap="square" lIns="0" tIns="0" rIns="0" bIns="0" rtlCol="0" anchor="ctr"/>
+          <a:lstStyle/>
+          <a:p>
+            <a:pPr algn="ctr" indent="0" marL="0">
+              <a:buNone/>
+            </a:pPr>
+            <a:r>
+              <a:rPr lang="en-US" sz="1100" b="1" dirty="0">
+                <a:solidFill>
+                  <a:srgbClr val="1A7A1A"/>
+                </a:solidFill>
+                <a:latin typeface="Calibri" pitchFamily="34" charset="0"/>
+                <a:ea typeface="Calibri" pitchFamily="34" charset="-122"/>
+                <a:cs typeface="Calibri" pitchFamily="34" charset="-120"/>
+              </a:rPr>
+              <a:t>4</a:t>
+            </a:r>
+            <a:endParaRPr lang="en-US" sz="1100" dirty="0"/>
+          </a:p>
+        </p:txBody>
+      </p:sp>
+      <p:sp>
+        <p:nvSpPr>
+          <p:cNvPr id="23" name="Text 21"/>
+          <p:cNvSpPr/>
+          <p:nvPr/>
+        </p:nvSpPr>
+        <p:spPr>
+          <a:xfrm>
+            <a:off x="6537960" y="2020824"/>
+            <a:ext cx="548640" cy="301752"/>
+          </a:xfrm>
+          <a:prstGeom prst="rect">
+            <a:avLst/>
+          </a:prstGeom>
+          <a:noFill/>
+          <a:ln/>
+        </p:spPr>
+        <p:txBody>
+          <a:bodyPr wrap="square" lIns="0" tIns="0" rIns="0" bIns="0" rtlCol="0" anchor="ctr"/>
+          <a:lstStyle/>
+          <a:p>
+            <a:pPr algn="ctr" indent="0" marL="0">
+              <a:buNone/>
+            </a:pPr>
+            <a:r>
+              <a:rPr lang="en-US" sz="1100" dirty="0">
+                <a:solidFill>
+                  <a:srgbClr val="2A1515"/>
+                </a:solidFill>
+                <a:latin typeface="Calibri" pitchFamily="34" charset="0"/>
+                <a:ea typeface="Calibri" pitchFamily="34" charset="-122"/>
+                <a:cs typeface="Calibri" pitchFamily="34" charset="-120"/>
+              </a:rPr>
+              <a:t>0</a:t>
+            </a:r>
+            <a:endParaRPr lang="en-US" sz="1100" dirty="0"/>
+          </a:p>
+        </p:txBody>
+      </p:sp>
+      <p:sp>
+        <p:nvSpPr>
+          <p:cNvPr id="24" name="Shape 22"/>
+          <p:cNvSpPr/>
+          <p:nvPr/>
+        </p:nvSpPr>
+        <p:spPr>
+          <a:xfrm>
+            <a:off x="457200" y="2377440"/>
+            <a:ext cx="6858000" cy="393192"/>
+          </a:xfrm>
+          <a:prstGeom prst="rect">
+            <a:avLst/>
+          </a:prstGeom>
+          <a:solidFill>
+            <a:srgbClr val="FAFAFA"/>
+          </a:solidFill>
+          <a:ln w="3810">
+            <a:solidFill>
+              <a:srgbClr val="E8E8E8"/>
+            </a:solidFill>
+            <a:prstDash val="solid"/>
+          </a:ln>
+        </p:spPr>
+      </p:sp>
+      <p:sp>
+        <p:nvSpPr>
+          <p:cNvPr id="25" name="Shape 23"/>
+          <p:cNvSpPr/>
+          <p:nvPr/>
+        </p:nvSpPr>
+        <p:spPr>
+          <a:xfrm>
+            <a:off x="502920" y="2441448"/>
+            <a:ext cx="457200" cy="256032"/>
+          </a:xfrm>
+          <a:prstGeom prst="roundRect">
+            <a:avLst>
+              <a:gd name="adj" fmla="val 14286"/>
+            </a:avLst>
+          </a:prstGeom>
+          <a:solidFill>
+            <a:srgbClr val="341515"/>
+          </a:solidFill>
+          <a:ln w="12700">
+            <a:solidFill>
+              <a:srgbClr val="341515"/>
+            </a:solidFill>
+            <a:prstDash val="solid"/>
+          </a:ln>
+        </p:spPr>
+      </p:sp>
+      <p:sp>
+        <p:nvSpPr>
+          <p:cNvPr id="26" name="Text 24"/>
+          <p:cNvSpPr/>
+          <p:nvPr/>
+        </p:nvSpPr>
+        <p:spPr>
+          <a:xfrm>
+            <a:off x="502920" y="2441448"/>
+            <a:ext cx="457200" cy="256032"/>
+          </a:xfrm>
+          <a:prstGeom prst="rect">
+            <a:avLst/>
+          </a:prstGeom>
+          <a:noFill/>
+          <a:ln/>
+        </p:spPr>
+        <p:txBody>
+          <a:bodyPr wrap="square" lIns="0" tIns="0" rIns="0" bIns="0" rtlCol="0" anchor="ctr"/>
+          <a:lstStyle/>
+          <a:p>
+            <a:pPr algn="ctr" indent="0" marL="0">
+              <a:buNone/>
+            </a:pPr>
+            <a:r>
+              <a:rPr lang="en-US" sz="950" b="1" dirty="0">
+                <a:solidFill>
+                  <a:srgbClr val="FFFFFF"/>
+                </a:solidFill>
+                <a:latin typeface="Cambria" pitchFamily="34" charset="0"/>
+                <a:ea typeface="Cambria" pitchFamily="34" charset="-122"/>
+                <a:cs typeface="Cambria" pitchFamily="34" charset="-120"/>
+              </a:rPr>
+              <a:t>3</a:t>
+            </a:r>
+            <a:endParaRPr lang="en-US" sz="950" dirty="0"/>
+          </a:p>
+        </p:txBody>
+      </p:sp>
+      <p:sp>
+        <p:nvSpPr>
+          <p:cNvPr id="27" name="Text 25"/>
+          <p:cNvSpPr/>
+          <p:nvPr/>
+        </p:nvSpPr>
+        <p:spPr>
+          <a:xfrm>
+            <a:off x="1051560" y="2423160"/>
+            <a:ext cx="3749040" cy="301752"/>
+          </a:xfrm>
+          <a:prstGeom prst="rect">
+            <a:avLst/>
+          </a:prstGeom>
+          <a:noFill/>
+          <a:ln/>
+        </p:spPr>
+        <p:txBody>
+          <a:bodyPr wrap="square" lIns="0" tIns="0" rIns="0" bIns="0" rtlCol="0" anchor="ctr"/>
+          <a:lstStyle/>
+          <a:p>
+            <a:pPr algn="l" indent="0" marL="0">
+              <a:buNone/>
+            </a:pPr>
+            <a:r>
+              <a:rPr lang="en-US" sz="1100" dirty="0">
+                <a:solidFill>
+                  <a:srgbClr val="2A1515"/>
+                </a:solidFill>
+                <a:latin typeface="Calibri" pitchFamily="34" charset="0"/>
+                <a:ea typeface="Calibri" pitchFamily="34" charset="-122"/>
+                <a:cs typeface="Calibri" pitchFamily="34" charset="-120"/>
+              </a:rPr>
+              <a:t>Report status state machine</a:t>
+            </a:r>
+            <a:endParaRPr lang="en-US" sz="1100" dirty="0"/>
+          </a:p>
+        </p:txBody>
+      </p:sp>
+      <p:sp>
+        <p:nvSpPr>
+          <p:cNvPr id="28" name="Text 26"/>
+          <p:cNvSpPr/>
+          <p:nvPr/>
+        </p:nvSpPr>
+        <p:spPr>
+          <a:xfrm>
+            <a:off x="4983480" y="2423160"/>
+            <a:ext cx="822960" cy="301752"/>
+          </a:xfrm>
+          <a:prstGeom prst="rect">
+            <a:avLst/>
+          </a:prstGeom>
+          <a:noFill/>
+          <a:ln/>
+        </p:spPr>
+        <p:txBody>
+          <a:bodyPr wrap="square" lIns="0" tIns="0" rIns="0" bIns="0" rtlCol="0" anchor="ctr"/>
+          <a:lstStyle/>
+          <a:p>
+            <a:pPr algn="ctr" indent="0" marL="0">
+              <a:buNone/>
+            </a:pPr>
+            <a:r>
+              <a:rPr lang="en-US" sz="1100" dirty="0">
+                <a:solidFill>
+                  <a:srgbClr val="2A1515"/>
+                </a:solidFill>
+                <a:latin typeface="Calibri" pitchFamily="34" charset="0"/>
+                <a:ea typeface="Calibri" pitchFamily="34" charset="-122"/>
+                <a:cs typeface="Calibri" pitchFamily="34" charset="-120"/>
+              </a:rPr>
+              <a:t>5</a:t>
+            </a:r>
+            <a:endParaRPr lang="en-US" sz="1100" dirty="0"/>
+          </a:p>
+        </p:txBody>
+      </p:sp>
+      <p:sp>
+        <p:nvSpPr>
+          <p:cNvPr id="29" name="Text 27"/>
+          <p:cNvSpPr/>
+          <p:nvPr/>
+        </p:nvSpPr>
+        <p:spPr>
+          <a:xfrm>
+            <a:off x="5806440" y="2423160"/>
+            <a:ext cx="731520" cy="301752"/>
+          </a:xfrm>
+          <a:prstGeom prst="rect">
+            <a:avLst/>
+          </a:prstGeom>
+          <a:noFill/>
+          <a:ln/>
+        </p:spPr>
+        <p:txBody>
+          <a:bodyPr wrap="square" lIns="0" tIns="0" rIns="0" bIns="0" rtlCol="0" anchor="ctr"/>
+          <a:lstStyle/>
+          <a:p>
+            <a:pPr algn="ctr" indent="0" marL="0">
+              <a:buNone/>
+            </a:pPr>
+            <a:r>
+              <a:rPr lang="en-US" sz="1100" b="1" dirty="0">
+                <a:solidFill>
+                  <a:srgbClr val="1A7A1A"/>
+                </a:solidFill>
+                <a:latin typeface="Calibri" pitchFamily="34" charset="0"/>
+                <a:ea typeface="Calibri" pitchFamily="34" charset="-122"/>
+                <a:cs typeface="Calibri" pitchFamily="34" charset="-120"/>
+              </a:rPr>
+              <a:t>5</a:t>
+            </a:r>
+            <a:endParaRPr lang="en-US" sz="1100" dirty="0"/>
+          </a:p>
+        </p:txBody>
+      </p:sp>
+      <p:sp>
+        <p:nvSpPr>
+          <p:cNvPr id="30" name="Text 28"/>
+          <p:cNvSpPr/>
+          <p:nvPr/>
+        </p:nvSpPr>
+        <p:spPr>
+          <a:xfrm>
+            <a:off x="6537960" y="2423160"/>
+            <a:ext cx="548640" cy="301752"/>
+          </a:xfrm>
+          <a:prstGeom prst="rect">
+            <a:avLst/>
+          </a:prstGeom>
+          <a:noFill/>
+          <a:ln/>
+        </p:spPr>
+        <p:txBody>
+          <a:bodyPr wrap="square" lIns="0" tIns="0" rIns="0" bIns="0" rtlCol="0" anchor="ctr"/>
+          <a:lstStyle/>
+          <a:p>
+            <a:pPr algn="ctr" indent="0" marL="0">
+              <a:buNone/>
+            </a:pPr>
+            <a:r>
+              <a:rPr lang="en-US" sz="1100" dirty="0">
+                <a:solidFill>
+                  <a:srgbClr val="2A1515"/>
+                </a:solidFill>
+                <a:latin typeface="Calibri" pitchFamily="34" charset="0"/>
+                <a:ea typeface="Calibri" pitchFamily="34" charset="-122"/>
+                <a:cs typeface="Calibri" pitchFamily="34" charset="-120"/>
+              </a:rPr>
+              <a:t>0</a:t>
+            </a:r>
+            <a:endParaRPr lang="en-US" sz="1100" dirty="0"/>
+          </a:p>
+        </p:txBody>
+      </p:sp>
+      <p:sp>
+        <p:nvSpPr>
+          <p:cNvPr id="31" name="Shape 29"/>
+          <p:cNvSpPr/>
+          <p:nvPr/>
+        </p:nvSpPr>
+        <p:spPr>
+          <a:xfrm>
+            <a:off x="457200" y="2779776"/>
+            <a:ext cx="6858000" cy="393192"/>
+          </a:xfrm>
+          <a:prstGeom prst="rect">
+            <a:avLst/>
+          </a:prstGeom>
+          <a:solidFill>
+            <a:srgbClr val="FFFFFF"/>
+          </a:solidFill>
+          <a:ln w="3810">
+            <a:solidFill>
+              <a:srgbClr val="E8E8E8"/>
+            </a:solidFill>
+            <a:prstDash val="solid"/>
+          </a:ln>
+        </p:spPr>
+      </p:sp>
+      <p:sp>
+        <p:nvSpPr>
+          <p:cNvPr id="32" name="Shape 30"/>
+          <p:cNvSpPr/>
+          <p:nvPr/>
+        </p:nvSpPr>
+        <p:spPr>
+          <a:xfrm>
+            <a:off x="502920" y="2843784"/>
+            <a:ext cx="457200" cy="256032"/>
+          </a:xfrm>
+          <a:prstGeom prst="roundRect">
+            <a:avLst>
+              <a:gd name="adj" fmla="val 14286"/>
+            </a:avLst>
+          </a:prstGeom>
+          <a:solidFill>
+            <a:srgbClr val="341515"/>
+          </a:solidFill>
+          <a:ln w="12700">
+            <a:solidFill>
+              <a:srgbClr val="341515"/>
+            </a:solidFill>
+            <a:prstDash val="solid"/>
+          </a:ln>
+        </p:spPr>
+      </p:sp>
+      <p:sp>
+        <p:nvSpPr>
+          <p:cNvPr id="33" name="Text 31"/>
+          <p:cNvSpPr/>
+          <p:nvPr/>
+        </p:nvSpPr>
+        <p:spPr>
+          <a:xfrm>
+            <a:off x="502920" y="2843784"/>
+            <a:ext cx="457200" cy="256032"/>
+          </a:xfrm>
+          <a:prstGeom prst="rect">
+            <a:avLst/>
+          </a:prstGeom>
+          <a:noFill/>
+          <a:ln/>
+        </p:spPr>
+        <p:txBody>
+          <a:bodyPr wrap="square" lIns="0" tIns="0" rIns="0" bIns="0" rtlCol="0" anchor="ctr"/>
+          <a:lstStyle/>
+          <a:p>
+            <a:pPr algn="ctr" indent="0" marL="0">
+              <a:buNone/>
+            </a:pPr>
+            <a:r>
+              <a:rPr lang="en-US" sz="950" b="1" dirty="0">
+                <a:solidFill>
+                  <a:srgbClr val="FFFFFF"/>
+                </a:solidFill>
+                <a:latin typeface="Cambria" pitchFamily="34" charset="0"/>
+                <a:ea typeface="Cambria" pitchFamily="34" charset="-122"/>
+                <a:cs typeface="Cambria" pitchFamily="34" charset="-120"/>
+              </a:rPr>
+              <a:t>4</a:t>
+            </a:r>
+            <a:endParaRPr lang="en-US" sz="950" dirty="0"/>
+          </a:p>
+        </p:txBody>
+      </p:sp>
+      <p:sp>
+        <p:nvSpPr>
+          <p:cNvPr id="34" name="Text 32"/>
+          <p:cNvSpPr/>
+          <p:nvPr/>
+        </p:nvSpPr>
+        <p:spPr>
+          <a:xfrm>
+            <a:off x="1051560" y="2825496"/>
+            <a:ext cx="3749040" cy="301752"/>
+          </a:xfrm>
+          <a:prstGeom prst="rect">
+            <a:avLst/>
+          </a:prstGeom>
+          <a:noFill/>
+          <a:ln/>
+        </p:spPr>
+        <p:txBody>
+          <a:bodyPr wrap="square" lIns="0" tIns="0" rIns="0" bIns="0" rtlCol="0" anchor="ctr"/>
+          <a:lstStyle/>
+          <a:p>
+            <a:pPr algn="l" indent="0" marL="0">
+              <a:buNone/>
+            </a:pPr>
+            <a:r>
+              <a:rPr lang="en-US" sz="1100" dirty="0">
+                <a:solidFill>
+                  <a:srgbClr val="2A1515"/>
+                </a:solidFill>
+                <a:latin typeface="Calibri" pitchFamily="34" charset="0"/>
+                <a:ea typeface="Calibri" pitchFamily="34" charset="-122"/>
+                <a:cs typeface="Calibri" pitchFamily="34" charset="-120"/>
+              </a:rPr>
+              <a:t>AI enrichment &amp; JSON parsing</a:t>
+            </a:r>
+            <a:endParaRPr lang="en-US" sz="1100" dirty="0"/>
+          </a:p>
+        </p:txBody>
+      </p:sp>
+      <p:sp>
+        <p:nvSpPr>
+          <p:cNvPr id="35" name="Text 33"/>
+          <p:cNvSpPr/>
+          <p:nvPr/>
+        </p:nvSpPr>
+        <p:spPr>
+          <a:xfrm>
+            <a:off x="4983480" y="2825496"/>
+            <a:ext cx="822960" cy="301752"/>
+          </a:xfrm>
+          <a:prstGeom prst="rect">
+            <a:avLst/>
+          </a:prstGeom>
+          <a:noFill/>
+          <a:ln/>
+        </p:spPr>
+        <p:txBody>
+          <a:bodyPr wrap="square" lIns="0" tIns="0" rIns="0" bIns="0" rtlCol="0" anchor="ctr"/>
+          <a:lstStyle/>
+          <a:p>
+            <a:pPr algn="ctr" indent="0" marL="0">
+              <a:buNone/>
+            </a:pPr>
+            <a:r>
+              <a:rPr lang="en-US" sz="1100" dirty="0">
+                <a:solidFill>
+                  <a:srgbClr val="2A1515"/>
+                </a:solidFill>
+                <a:latin typeface="Calibri" pitchFamily="34" charset="0"/>
+                <a:ea typeface="Calibri" pitchFamily="34" charset="-122"/>
+                <a:cs typeface="Calibri" pitchFamily="34" charset="-120"/>
+              </a:rPr>
+              <a:t>4</a:t>
+            </a:r>
+            <a:endParaRPr lang="en-US" sz="1100" dirty="0"/>
+          </a:p>
+        </p:txBody>
+      </p:sp>
+      <p:sp>
+        <p:nvSpPr>
+          <p:cNvPr id="36" name="Text 34"/>
+          <p:cNvSpPr/>
+          <p:nvPr/>
+        </p:nvSpPr>
+        <p:spPr>
+          <a:xfrm>
+            <a:off x="5806440" y="2825496"/>
+            <a:ext cx="731520" cy="301752"/>
+          </a:xfrm>
+          <a:prstGeom prst="rect">
+            <a:avLst/>
+          </a:prstGeom>
+          <a:noFill/>
+          <a:ln/>
+        </p:spPr>
+        <p:txBody>
+          <a:bodyPr wrap="square" lIns="0" tIns="0" rIns="0" bIns="0" rtlCol="0" anchor="ctr"/>
+          <a:lstStyle/>
+          <a:p>
+            <a:pPr algn="ctr" indent="0" marL="0">
+              <a:buNone/>
+            </a:pPr>
+            <a:r>
+              <a:rPr lang="en-US" sz="1100" b="1" dirty="0">
+                <a:solidFill>
+                  <a:srgbClr val="1A7A1A"/>
+                </a:solidFill>
+                <a:latin typeface="Calibri" pitchFamily="34" charset="0"/>
+                <a:ea typeface="Calibri" pitchFamily="34" charset="-122"/>
+                <a:cs typeface="Calibri" pitchFamily="34" charset="-120"/>
+              </a:rPr>
+              <a:t>4</a:t>
+            </a:r>
+            <a:endParaRPr lang="en-US" sz="1100" dirty="0"/>
+          </a:p>
+        </p:txBody>
+      </p:sp>
+      <p:sp>
+        <p:nvSpPr>
+          <p:cNvPr id="37" name="Text 35"/>
+          <p:cNvSpPr/>
+          <p:nvPr/>
+        </p:nvSpPr>
+        <p:spPr>
+          <a:xfrm>
+            <a:off x="6537960" y="2825496"/>
+            <a:ext cx="548640" cy="301752"/>
+          </a:xfrm>
+          <a:prstGeom prst="rect">
+            <a:avLst/>
+          </a:prstGeom>
+          <a:noFill/>
+          <a:ln/>
+        </p:spPr>
+        <p:txBody>
+          <a:bodyPr wrap="square" lIns="0" tIns="0" rIns="0" bIns="0" rtlCol="0" anchor="ctr"/>
+          <a:lstStyle/>
+          <a:p>
+            <a:pPr algn="ctr" indent="0" marL="0">
+              <a:buNone/>
+            </a:pPr>
+            <a:r>
+              <a:rPr lang="en-US" sz="1100" dirty="0">
+                <a:solidFill>
+                  <a:srgbClr val="2A1515"/>
+                </a:solidFill>
+                <a:latin typeface="Calibri" pitchFamily="34" charset="0"/>
+                <a:ea typeface="Calibri" pitchFamily="34" charset="-122"/>
+                <a:cs typeface="Calibri" pitchFamily="34" charset="-120"/>
+              </a:rPr>
+              <a:t>0</a:t>
+            </a:r>
+            <a:endParaRPr lang="en-US" sz="1100" dirty="0"/>
+          </a:p>
+        </p:txBody>
+      </p:sp>
+      <p:sp>
+        <p:nvSpPr>
+          <p:cNvPr id="38" name="Shape 36"/>
+          <p:cNvSpPr/>
+          <p:nvPr/>
+        </p:nvSpPr>
+        <p:spPr>
+          <a:xfrm>
+            <a:off x="457200" y="3182112"/>
+            <a:ext cx="6858000" cy="393192"/>
+          </a:xfrm>
+          <a:prstGeom prst="rect">
+            <a:avLst/>
+          </a:prstGeom>
+          <a:solidFill>
+            <a:srgbClr val="FAFAFA"/>
+          </a:solidFill>
+          <a:ln w="3810">
+            <a:solidFill>
+              <a:srgbClr val="E8E8E8"/>
+            </a:solidFill>
+            <a:prstDash val="solid"/>
+          </a:ln>
+        </p:spPr>
+      </p:sp>
+      <p:sp>
+        <p:nvSpPr>
+          <p:cNvPr id="39" name="Shape 37"/>
+          <p:cNvSpPr/>
+          <p:nvPr/>
+        </p:nvSpPr>
+        <p:spPr>
+          <a:xfrm>
+            <a:off x="502920" y="3246120"/>
+            <a:ext cx="457200" cy="256032"/>
+          </a:xfrm>
+          <a:prstGeom prst="roundRect">
+            <a:avLst>
+              <a:gd name="adj" fmla="val 14286"/>
+            </a:avLst>
+          </a:prstGeom>
+          <a:solidFill>
+            <a:srgbClr val="341515"/>
+          </a:solidFill>
+          <a:ln w="12700">
+            <a:solidFill>
+              <a:srgbClr val="341515"/>
+            </a:solidFill>
+            <a:prstDash val="solid"/>
+          </a:ln>
+        </p:spPr>
+      </p:sp>
+      <p:sp>
+        <p:nvSpPr>
+          <p:cNvPr id="40" name="Text 38"/>
+          <p:cNvSpPr/>
+          <p:nvPr/>
+        </p:nvSpPr>
+        <p:spPr>
+          <a:xfrm>
+            <a:off x="502920" y="3246120"/>
+            <a:ext cx="457200" cy="256032"/>
+          </a:xfrm>
+          <a:prstGeom prst="rect">
+            <a:avLst/>
+          </a:prstGeom>
+          <a:noFill/>
+          <a:ln/>
+        </p:spPr>
+        <p:txBody>
+          <a:bodyPr wrap="square" lIns="0" tIns="0" rIns="0" bIns="0" rtlCol="0" anchor="ctr"/>
+          <a:lstStyle/>
+          <a:p>
+            <a:pPr algn="ctr" indent="0" marL="0">
+              <a:buNone/>
+            </a:pPr>
+            <a:r>
+              <a:rPr lang="en-US" sz="950" b="1" dirty="0">
+                <a:solidFill>
+                  <a:srgbClr val="FFFFFF"/>
+                </a:solidFill>
+                <a:latin typeface="Cambria" pitchFamily="34" charset="0"/>
+                <a:ea typeface="Cambria" pitchFamily="34" charset="-122"/>
+                <a:cs typeface="Cambria" pitchFamily="34" charset="-120"/>
+              </a:rPr>
+              <a:t>5</a:t>
+            </a:r>
+            <a:endParaRPr lang="en-US" sz="950" dirty="0"/>
+          </a:p>
+        </p:txBody>
+      </p:sp>
+      <p:sp>
+        <p:nvSpPr>
+          <p:cNvPr id="41" name="Text 39"/>
+          <p:cNvSpPr/>
+          <p:nvPr/>
+        </p:nvSpPr>
+        <p:spPr>
+          <a:xfrm>
+            <a:off x="1051560" y="3227832"/>
+            <a:ext cx="3749040" cy="301752"/>
+          </a:xfrm>
+          <a:prstGeom prst="rect">
+            <a:avLst/>
+          </a:prstGeom>
+          <a:noFill/>
+          <a:ln/>
+        </p:spPr>
+        <p:txBody>
+          <a:bodyPr wrap="square" lIns="0" tIns="0" rIns="0" bIns="0" rtlCol="0" anchor="ctr"/>
+          <a:lstStyle/>
+          <a:p>
+            <a:pPr algn="l" indent="0" marL="0">
+              <a:buNone/>
+            </a:pPr>
+            <a:r>
+              <a:rPr lang="en-US" sz="1100" dirty="0">
+                <a:solidFill>
+                  <a:srgbClr val="2A1515"/>
+                </a:solidFill>
+                <a:latin typeface="Calibri" pitchFamily="34" charset="0"/>
+                <a:ea typeface="Calibri" pitchFamily="34" charset="-122"/>
+                <a:cs typeface="Calibri" pitchFamily="34" charset="-120"/>
+              </a:rPr>
+              <a:t>Routing &amp; ETA calculation</a:t>
+            </a:r>
+            <a:endParaRPr lang="en-US" sz="1100" dirty="0"/>
+          </a:p>
+        </p:txBody>
+      </p:sp>
+      <p:sp>
+        <p:nvSpPr>
+          <p:cNvPr id="42" name="Text 40"/>
+          <p:cNvSpPr/>
+          <p:nvPr/>
+        </p:nvSpPr>
+        <p:spPr>
+          <a:xfrm>
+            <a:off x="4983480" y="3227832"/>
+            <a:ext cx="822960" cy="301752"/>
+          </a:xfrm>
+          <a:prstGeom prst="rect">
+            <a:avLst/>
+          </a:prstGeom>
+          <a:noFill/>
+          <a:ln/>
+        </p:spPr>
+        <p:txBody>
+          <a:bodyPr wrap="square" lIns="0" tIns="0" rIns="0" bIns="0" rtlCol="0" anchor="ctr"/>
+          <a:lstStyle/>
+          <a:p>
+            <a:pPr algn="ctr" indent="0" marL="0">
+              <a:buNone/>
+            </a:pPr>
+            <a:r>
+              <a:rPr lang="en-US" sz="1100" dirty="0">
+                <a:solidFill>
+                  <a:srgbClr val="2A1515"/>
+                </a:solidFill>
+                <a:latin typeface="Calibri" pitchFamily="34" charset="0"/>
+                <a:ea typeface="Calibri" pitchFamily="34" charset="-122"/>
+                <a:cs typeface="Calibri" pitchFamily="34" charset="-120"/>
+              </a:rPr>
+              <a:t>4</a:t>
+            </a:r>
+            <a:endParaRPr lang="en-US" sz="1100" dirty="0"/>
+          </a:p>
+        </p:txBody>
+      </p:sp>
+      <p:sp>
+        <p:nvSpPr>
+          <p:cNvPr id="43" name="Text 41"/>
+          <p:cNvSpPr/>
+          <p:nvPr/>
+        </p:nvSpPr>
+        <p:spPr>
+          <a:xfrm>
+            <a:off x="5806440" y="3227832"/>
+            <a:ext cx="731520" cy="301752"/>
+          </a:xfrm>
+          <a:prstGeom prst="rect">
+            <a:avLst/>
+          </a:prstGeom>
+          <a:noFill/>
+          <a:ln/>
+        </p:spPr>
+        <p:txBody>
+          <a:bodyPr wrap="square" lIns="0" tIns="0" rIns="0" bIns="0" rtlCol="0" anchor="ctr"/>
+          <a:lstStyle/>
+          <a:p>
+            <a:pPr algn="ctr" indent="0" marL="0">
+              <a:buNone/>
+            </a:pPr>
+            <a:r>
+              <a:rPr lang="en-US" sz="1100" b="1" dirty="0">
+                <a:solidFill>
+                  <a:srgbClr val="1A7A1A"/>
+                </a:solidFill>
+                <a:latin typeface="Calibri" pitchFamily="34" charset="0"/>
+                <a:ea typeface="Calibri" pitchFamily="34" charset="-122"/>
+                <a:cs typeface="Calibri" pitchFamily="34" charset="-120"/>
+              </a:rPr>
+              <a:t>4</a:t>
+            </a:r>
+            <a:endParaRPr lang="en-US" sz="1100" dirty="0"/>
+          </a:p>
+        </p:txBody>
+      </p:sp>
+      <p:sp>
+        <p:nvSpPr>
+          <p:cNvPr id="44" name="Text 42"/>
+          <p:cNvSpPr/>
+          <p:nvPr/>
+        </p:nvSpPr>
+        <p:spPr>
+          <a:xfrm>
+            <a:off x="6537960" y="3227832"/>
+            <a:ext cx="548640" cy="301752"/>
+          </a:xfrm>
+          <a:prstGeom prst="rect">
+            <a:avLst/>
+          </a:prstGeom>
+          <a:noFill/>
+          <a:ln/>
+        </p:spPr>
+        <p:txBody>
+          <a:bodyPr wrap="square" lIns="0" tIns="0" rIns="0" bIns="0" rtlCol="0" anchor="ctr"/>
+          <a:lstStyle/>
+          <a:p>
+            <a:pPr algn="ctr" indent="0" marL="0">
+              <a:buNone/>
+            </a:pPr>
+            <a:r>
+              <a:rPr lang="en-US" sz="1100" dirty="0">
+                <a:solidFill>
+                  <a:srgbClr val="2A1515"/>
+                </a:solidFill>
+                <a:latin typeface="Calibri" pitchFamily="34" charset="0"/>
+                <a:ea typeface="Calibri" pitchFamily="34" charset="-122"/>
+                <a:cs typeface="Calibri" pitchFamily="34" charset="-120"/>
+              </a:rPr>
+              <a:t>0</a:t>
+            </a:r>
+            <a:endParaRPr lang="en-US" sz="1100" dirty="0"/>
+          </a:p>
+        </p:txBody>
+      </p:sp>
+      <p:sp>
+        <p:nvSpPr>
+          <p:cNvPr id="45" name="Shape 43"/>
+          <p:cNvSpPr/>
+          <p:nvPr/>
+        </p:nvSpPr>
+        <p:spPr>
+          <a:xfrm>
+            <a:off x="457200" y="3584448"/>
+            <a:ext cx="6858000" cy="393192"/>
+          </a:xfrm>
+          <a:prstGeom prst="rect">
+            <a:avLst/>
+          </a:prstGeom>
+          <a:solidFill>
+            <a:srgbClr val="FFFFFF"/>
+          </a:solidFill>
+          <a:ln w="3810">
+            <a:solidFill>
+              <a:srgbClr val="E8E8E8"/>
+            </a:solidFill>
+            <a:prstDash val="solid"/>
+          </a:ln>
+        </p:spPr>
+      </p:sp>
+      <p:sp>
+        <p:nvSpPr>
+          <p:cNvPr id="46" name="Shape 44"/>
+          <p:cNvSpPr/>
+          <p:nvPr/>
+        </p:nvSpPr>
+        <p:spPr>
+          <a:xfrm>
+            <a:off x="502920" y="3648456"/>
+            <a:ext cx="457200" cy="256032"/>
+          </a:xfrm>
+          <a:prstGeom prst="roundRect">
+            <a:avLst>
+              <a:gd name="adj" fmla="val 14286"/>
+            </a:avLst>
+          </a:prstGeom>
+          <a:solidFill>
+            <a:srgbClr val="341515"/>
+          </a:solidFill>
+          <a:ln w="12700">
+            <a:solidFill>
+              <a:srgbClr val="341515"/>
+            </a:solidFill>
+            <a:prstDash val="solid"/>
+          </a:ln>
+        </p:spPr>
+      </p:sp>
+      <p:sp>
+        <p:nvSpPr>
+          <p:cNvPr id="47" name="Text 45"/>
+          <p:cNvSpPr/>
+          <p:nvPr/>
+        </p:nvSpPr>
+        <p:spPr>
+          <a:xfrm>
+            <a:off x="502920" y="3648456"/>
+            <a:ext cx="457200" cy="256032"/>
+          </a:xfrm>
+          <a:prstGeom prst="rect">
+            <a:avLst/>
+          </a:prstGeom>
+          <a:noFill/>
+          <a:ln/>
+        </p:spPr>
+        <p:txBody>
+          <a:bodyPr wrap="square" lIns="0" tIns="0" rIns="0" bIns="0" rtlCol="0" anchor="ctr"/>
+          <a:lstStyle/>
+          <a:p>
+            <a:pPr algn="ctr" indent="0" marL="0">
+              <a:buNone/>
+            </a:pPr>
+            <a:r>
+              <a:rPr lang="en-US" sz="950" b="1" dirty="0">
+                <a:solidFill>
+                  <a:srgbClr val="FFFFFF"/>
+                </a:solidFill>
+                <a:latin typeface="Cambria" pitchFamily="34" charset="0"/>
+                <a:ea typeface="Cambria" pitchFamily="34" charset="-122"/>
+                <a:cs typeface="Cambria" pitchFamily="34" charset="-120"/>
+              </a:rPr>
+              <a:t>6</a:t>
+            </a:r>
+            <a:endParaRPr lang="en-US" sz="950" dirty="0"/>
+          </a:p>
+        </p:txBody>
+      </p:sp>
+      <p:sp>
+        <p:nvSpPr>
+          <p:cNvPr id="48" name="Text 46"/>
+          <p:cNvSpPr/>
+          <p:nvPr/>
+        </p:nvSpPr>
+        <p:spPr>
+          <a:xfrm>
+            <a:off x="1051560" y="3630168"/>
+            <a:ext cx="3749040" cy="301752"/>
+          </a:xfrm>
+          <a:prstGeom prst="rect">
+            <a:avLst/>
+          </a:prstGeom>
+          <a:noFill/>
+          <a:ln/>
+        </p:spPr>
+        <p:txBody>
+          <a:bodyPr wrap="square" lIns="0" tIns="0" rIns="0" bIns="0" rtlCol="0" anchor="ctr"/>
+          <a:lstStyle/>
+          <a:p>
+            <a:pPr algn="l" indent="0" marL="0">
+              <a:buNone/>
+            </a:pPr>
+            <a:r>
+              <a:rPr lang="en-US" sz="1100" dirty="0">
+                <a:solidFill>
+                  <a:srgbClr val="2A1515"/>
+                </a:solidFill>
+                <a:latin typeface="Calibri" pitchFamily="34" charset="0"/>
+                <a:ea typeface="Calibri" pitchFamily="34" charset="-122"/>
+                <a:cs typeface="Calibri" pitchFamily="34" charset="-120"/>
+              </a:rPr>
+              <a:t>FCM notification message content</a:t>
+            </a:r>
+            <a:endParaRPr lang="en-US" sz="1100" dirty="0"/>
+          </a:p>
+        </p:txBody>
+      </p:sp>
+      <p:sp>
+        <p:nvSpPr>
+          <p:cNvPr id="49" name="Text 47"/>
+          <p:cNvSpPr/>
+          <p:nvPr/>
+        </p:nvSpPr>
+        <p:spPr>
+          <a:xfrm>
+            <a:off x="4983480" y="3630168"/>
+            <a:ext cx="822960" cy="301752"/>
+          </a:xfrm>
+          <a:prstGeom prst="rect">
+            <a:avLst/>
+          </a:prstGeom>
+          <a:noFill/>
+          <a:ln/>
+        </p:spPr>
+        <p:txBody>
+          <a:bodyPr wrap="square" lIns="0" tIns="0" rIns="0" bIns="0" rtlCol="0" anchor="ctr"/>
+          <a:lstStyle/>
+          <a:p>
+            <a:pPr algn="ctr" indent="0" marL="0">
+              <a:buNone/>
+            </a:pPr>
+            <a:r>
+              <a:rPr lang="en-US" sz="1100" dirty="0">
+                <a:solidFill>
+                  <a:srgbClr val="2A1515"/>
+                </a:solidFill>
+                <a:latin typeface="Calibri" pitchFamily="34" charset="0"/>
+                <a:ea typeface="Calibri" pitchFamily="34" charset="-122"/>
+                <a:cs typeface="Calibri" pitchFamily="34" charset="-120"/>
+              </a:rPr>
+              <a:t>4</a:t>
+            </a:r>
+            <a:endParaRPr lang="en-US" sz="1100" dirty="0"/>
+          </a:p>
+        </p:txBody>
+      </p:sp>
+      <p:sp>
+        <p:nvSpPr>
+          <p:cNvPr id="50" name="Text 48"/>
+          <p:cNvSpPr/>
+          <p:nvPr/>
+        </p:nvSpPr>
+        <p:spPr>
+          <a:xfrm>
+            <a:off x="5806440" y="3630168"/>
+            <a:ext cx="731520" cy="301752"/>
+          </a:xfrm>
+          <a:prstGeom prst="rect">
+            <a:avLst/>
+          </a:prstGeom>
+          <a:noFill/>
+          <a:ln/>
+        </p:spPr>
+        <p:txBody>
+          <a:bodyPr wrap="square" lIns="0" tIns="0" rIns="0" bIns="0" rtlCol="0" anchor="ctr"/>
+          <a:lstStyle/>
+          <a:p>
+            <a:pPr algn="ctr" indent="0" marL="0">
+              <a:buNone/>
+            </a:pPr>
+            <a:r>
+              <a:rPr lang="en-US" sz="1100" b="1" dirty="0">
+                <a:solidFill>
+                  <a:srgbClr val="1A7A1A"/>
+                </a:solidFill>
+                <a:latin typeface="Calibri" pitchFamily="34" charset="0"/>
+                <a:ea typeface="Calibri" pitchFamily="34" charset="-122"/>
+                <a:cs typeface="Calibri" pitchFamily="34" charset="-120"/>
+              </a:rPr>
+              <a:t>4</a:t>
+            </a:r>
+            <a:endParaRPr lang="en-US" sz="1100" dirty="0"/>
+          </a:p>
+        </p:txBody>
+      </p:sp>
+      <p:sp>
+        <p:nvSpPr>
+          <p:cNvPr id="51" name="Text 49"/>
+          <p:cNvSpPr/>
+          <p:nvPr/>
+        </p:nvSpPr>
+        <p:spPr>
+          <a:xfrm>
+            <a:off x="6537960" y="3630168"/>
+            <a:ext cx="548640" cy="301752"/>
+          </a:xfrm>
+          <a:prstGeom prst="rect">
+            <a:avLst/>
+          </a:prstGeom>
+          <a:noFill/>
+          <a:ln/>
+        </p:spPr>
+        <p:txBody>
+          <a:bodyPr wrap="square" lIns="0" tIns="0" rIns="0" bIns="0" rtlCol="0" anchor="ctr"/>
+          <a:lstStyle/>
+          <a:p>
+            <a:pPr algn="ctr" indent="0" marL="0">
+              <a:buNone/>
+            </a:pPr>
+            <a:r>
+              <a:rPr lang="en-US" sz="1100" dirty="0">
+                <a:solidFill>
+                  <a:srgbClr val="2A1515"/>
+                </a:solidFill>
+                <a:latin typeface="Calibri" pitchFamily="34" charset="0"/>
+                <a:ea typeface="Calibri" pitchFamily="34" charset="-122"/>
+                <a:cs typeface="Calibri" pitchFamily="34" charset="-120"/>
+              </a:rPr>
+              <a:t>0</a:t>
+            </a:r>
+            <a:endParaRPr lang="en-US" sz="1100" dirty="0"/>
+          </a:p>
+        </p:txBody>
+      </p:sp>
+      <p:sp>
+        <p:nvSpPr>
+          <p:cNvPr id="52" name="Shape 50"/>
+          <p:cNvSpPr/>
+          <p:nvPr/>
+        </p:nvSpPr>
+        <p:spPr>
+          <a:xfrm>
+            <a:off x="457200" y="3986784"/>
+            <a:ext cx="6858000" cy="402336"/>
+          </a:xfrm>
+          <a:prstGeom prst="rect">
+            <a:avLst/>
+          </a:prstGeom>
+          <a:solidFill>
+            <a:srgbClr val="F5F5F5"/>
+          </a:solidFill>
+          <a:ln w="6350">
+            <a:solidFill>
+              <a:srgbClr val="E0E0E0"/>
+            </a:solidFill>
+            <a:prstDash val="solid"/>
+          </a:ln>
+        </p:spPr>
+      </p:sp>
+      <p:sp>
+        <p:nvSpPr>
+          <p:cNvPr id="53" name="Text 51"/>
+          <p:cNvSpPr/>
+          <p:nvPr/>
+        </p:nvSpPr>
+        <p:spPr>
+          <a:xfrm>
+            <a:off x="1051560" y="4041648"/>
+            <a:ext cx="3749040" cy="292608"/>
+          </a:xfrm>
+          <a:prstGeom prst="rect">
+            <a:avLst/>
+          </a:prstGeom>
+          <a:noFill/>
+          <a:ln/>
+        </p:spPr>
+        <p:txBody>
+          <a:bodyPr wrap="square" lIns="0" tIns="0" rIns="0" bIns="0" rtlCol="0" anchor="ctr"/>
+          <a:lstStyle/>
+          <a:p>
+            <a:pPr algn="l" indent="0" marL="0">
+              <a:buNone/>
+            </a:pPr>
+            <a:r>
+              <a:rPr lang="en-US" sz="1100" b="1" dirty="0">
+                <a:solidFill>
+                  <a:srgbClr val="2A1515"/>
+                </a:solidFill>
+                <a:latin typeface="Calibri" pitchFamily="34" charset="0"/>
+                <a:ea typeface="Calibri" pitchFamily="34" charset="-122"/>
+                <a:cs typeface="Calibri" pitchFamily="34" charset="-120"/>
+              </a:rPr>
+              <a:t>Total</a:t>
+            </a:r>
+            <a:endParaRPr lang="en-US" sz="1100" dirty="0"/>
+          </a:p>
+        </p:txBody>
+      </p:sp>
+      <p:sp>
+        <p:nvSpPr>
+          <p:cNvPr id="54" name="Text 52"/>
+          <p:cNvSpPr/>
+          <p:nvPr/>
+        </p:nvSpPr>
+        <p:spPr>
+          <a:xfrm>
+            <a:off x="4983480" y="4041648"/>
+            <a:ext cx="822960" cy="292608"/>
+          </a:xfrm>
+          <a:prstGeom prst="rect">
+            <a:avLst/>
+          </a:prstGeom>
+          <a:noFill/>
+          <a:ln/>
+        </p:spPr>
+        <p:txBody>
+          <a:bodyPr wrap="square" lIns="0" tIns="0" rIns="0" bIns="0" rtlCol="0" anchor="ctr"/>
+          <a:lstStyle/>
+          <a:p>
+            <a:pPr algn="ctr" indent="0" marL="0">
+              <a:buNone/>
+            </a:pPr>
+            <a:r>
+              <a:rPr lang="en-US" sz="1100" b="1" dirty="0">
+                <a:solidFill>
+                  <a:srgbClr val="2A1515"/>
+                </a:solidFill>
+                <a:latin typeface="Calibri" pitchFamily="34" charset="0"/>
+                <a:ea typeface="Calibri" pitchFamily="34" charset="-122"/>
+                <a:cs typeface="Calibri" pitchFamily="34" charset="-120"/>
+              </a:rPr>
+              <a:t>25</a:t>
+            </a:r>
+            <a:endParaRPr lang="en-US" sz="1100" dirty="0"/>
+          </a:p>
+        </p:txBody>
+      </p:sp>
+      <p:sp>
+        <p:nvSpPr>
+          <p:cNvPr id="55" name="Text 53"/>
+          <p:cNvSpPr/>
+          <p:nvPr/>
+        </p:nvSpPr>
+        <p:spPr>
+          <a:xfrm>
+            <a:off x="5806440" y="4041648"/>
+            <a:ext cx="731520" cy="292608"/>
+          </a:xfrm>
+          <a:prstGeom prst="rect">
+            <a:avLst/>
+          </a:prstGeom>
+          <a:noFill/>
+          <a:ln/>
+        </p:spPr>
+        <p:txBody>
+          <a:bodyPr wrap="square" lIns="0" tIns="0" rIns="0" bIns="0" rtlCol="0" anchor="ctr"/>
+          <a:lstStyle/>
+          <a:p>
+            <a:pPr algn="ctr" indent="0" marL="0">
+              <a:buNone/>
+            </a:pPr>
+            <a:r>
+              <a:rPr lang="en-US" sz="1100" b="1" dirty="0">
+                <a:solidFill>
+                  <a:srgbClr val="1A7A1A"/>
+                </a:solidFill>
+                <a:latin typeface="Calibri" pitchFamily="34" charset="0"/>
+                <a:ea typeface="Calibri" pitchFamily="34" charset="-122"/>
+                <a:cs typeface="Calibri" pitchFamily="34" charset="-120"/>
+              </a:rPr>
+              <a:t>25</a:t>
+            </a:r>
+            <a:endParaRPr lang="en-US" sz="1100" dirty="0"/>
+          </a:p>
+        </p:txBody>
+      </p:sp>
+      <p:sp>
+        <p:nvSpPr>
+          <p:cNvPr id="56" name="Text 54"/>
+          <p:cNvSpPr/>
+          <p:nvPr/>
+        </p:nvSpPr>
+        <p:spPr>
+          <a:xfrm>
+            <a:off x="6537960" y="4041648"/>
+            <a:ext cx="548640" cy="292608"/>
+          </a:xfrm>
+          <a:prstGeom prst="rect">
+            <a:avLst/>
+          </a:prstGeom>
+          <a:noFill/>
+          <a:ln/>
+        </p:spPr>
+        <p:txBody>
+          <a:bodyPr wrap="square" lIns="0" tIns="0" rIns="0" bIns="0" rtlCol="0" anchor="ctr"/>
+          <a:lstStyle/>
+          <a:p>
+            <a:pPr algn="ctr" indent="0" marL="0">
+              <a:buNone/>
+            </a:pPr>
+            <a:r>
+              <a:rPr lang="en-US" sz="1100" b="1" dirty="0">
+                <a:solidFill>
+                  <a:srgbClr val="2A1515"/>
+                </a:solidFill>
+                <a:latin typeface="Calibri" pitchFamily="34" charset="0"/>
+                <a:ea typeface="Calibri" pitchFamily="34" charset="-122"/>
+                <a:cs typeface="Calibri" pitchFamily="34" charset="-120"/>
+              </a:rPr>
+              <a:t>0</a:t>
+            </a:r>
+            <a:endParaRPr lang="en-US" sz="1100" dirty="0"/>
+          </a:p>
+        </p:txBody>
+      </p:sp>
+      <p:sp>
+        <p:nvSpPr>
+          <p:cNvPr id="57" name="Shape 55"/>
+          <p:cNvSpPr/>
+          <p:nvPr/>
+        </p:nvSpPr>
+        <p:spPr>
+          <a:xfrm>
+            <a:off x="7406640" y="1170432"/>
+            <a:ext cx="1508760" cy="1554480"/>
+          </a:xfrm>
+          <a:prstGeom prst="roundRect">
+            <a:avLst>
+              <a:gd name="adj" fmla="val 7273"/>
+            </a:avLst>
+          </a:prstGeom>
+          <a:solidFill>
+            <a:srgbClr val="F0ECE6"/>
+          </a:solidFill>
+          <a:ln w="6350">
+            <a:solidFill>
+              <a:srgbClr val="C4B9AC"/>
+            </a:solidFill>
+            <a:prstDash val="solid"/>
+          </a:ln>
+          <a:effectLst>
+            <a:outerShdw sx="100000" sy="100000" kx="0" ky="0" algn="bl" rotWithShape="0" blurRad="88900" dist="25400" dir="2700000">
+              <a:srgbClr val="000000">
+                <a:alpha val="10000"/>
+              </a:srgbClr>
+            </a:outerShdw>
+          </a:effectLst>
+        </p:spPr>
+      </p:sp>
+      <p:sp>
+        <p:nvSpPr>
+          <p:cNvPr id="58" name="Text 56"/>
+          <p:cNvSpPr/>
+          <p:nvPr/>
+        </p:nvSpPr>
+        <p:spPr>
+          <a:xfrm>
+            <a:off x="7406640" y="1261872"/>
+            <a:ext cx="1508760" cy="658368"/>
+          </a:xfrm>
+          <a:prstGeom prst="rect">
+            <a:avLst/>
+          </a:prstGeom>
+          <a:noFill/>
+          <a:ln/>
+        </p:spPr>
+        <p:txBody>
+          <a:bodyPr wrap="square" lIns="0" tIns="0" rIns="0" bIns="0" rtlCol="0" anchor="ctr"/>
+          <a:lstStyle/>
+          <a:p>
+            <a:pPr algn="ctr" indent="0" marL="0">
+              <a:buNone/>
+            </a:pPr>
+            <a:r>
+              <a:rPr lang="en-US" sz="1600" b="1" dirty="0">
+                <a:solidFill>
+                  <a:srgbClr val="1A7A1A"/>
+                </a:solidFill>
+                <a:latin typeface="Cambria" pitchFamily="34" charset="0"/>
+                <a:ea typeface="Cambria" pitchFamily="34" charset="-122"/>
+                <a:cs typeface="Cambria" pitchFamily="34" charset="-120"/>
+              </a:rPr>
+              <a:t>100%</a:t>
+            </a:r>
+            <a:endParaRPr lang="en-US" sz="1600" dirty="0"/>
+          </a:p>
+          <a:p>
+            <a:pPr algn="ctr" indent="0" marL="0">
+              <a:buNone/>
+            </a:pPr>
+            <a:r>
+              <a:rPr lang="en-US" sz="1600" b="1" dirty="0">
+                <a:solidFill>
+                  <a:srgbClr val="1A7A1A"/>
+                </a:solidFill>
+                <a:latin typeface="Cambria" pitchFamily="34" charset="0"/>
+                <a:ea typeface="Cambria" pitchFamily="34" charset="-122"/>
+                <a:cs typeface="Cambria" pitchFamily="34" charset="-120"/>
+              </a:rPr>
+              <a:t>pass rate</a:t>
+            </a:r>
+            <a:endParaRPr lang="en-US" sz="1600" dirty="0"/>
+          </a:p>
+        </p:txBody>
+      </p:sp>
+      <p:sp>
+        <p:nvSpPr>
+          <p:cNvPr id="59" name="Text 57"/>
+          <p:cNvSpPr/>
+          <p:nvPr/>
+        </p:nvSpPr>
+        <p:spPr>
+          <a:xfrm>
+            <a:off x="7406640" y="1956816"/>
+            <a:ext cx="1508760" cy="548640"/>
+          </a:xfrm>
+          <a:prstGeom prst="rect">
+            <a:avLst/>
+          </a:prstGeom>
+          <a:noFill/>
+          <a:ln/>
+        </p:spPr>
+        <p:txBody>
+          <a:bodyPr wrap="square" lIns="0" tIns="0" rIns="0" bIns="0" rtlCol="0" anchor="ctr"/>
+          <a:lstStyle/>
+          <a:p>
+            <a:pPr algn="ctr" indent="0" marL="0">
+              <a:buNone/>
+            </a:pPr>
+            <a:r>
+              <a:rPr lang="en-US" sz="950" dirty="0">
+                <a:solidFill>
+                  <a:srgbClr val="444444"/>
+                </a:solidFill>
+                <a:latin typeface="Calibri" pitchFamily="34" charset="0"/>
+                <a:ea typeface="Calibri" pitchFamily="34" charset="-122"/>
+                <a:cs typeface="Calibri" pitchFamily="34" charset="-120"/>
+              </a:rPr>
+              <a:t>25 automated tests</a:t>
+            </a:r>
+            <a:endParaRPr lang="en-US" sz="950" dirty="0"/>
+          </a:p>
+          <a:p>
+            <a:pPr algn="ctr" indent="0" marL="0">
+              <a:buNone/>
+            </a:pPr>
+            <a:r>
+              <a:rPr lang="en-US" sz="950" dirty="0">
+                <a:solidFill>
+                  <a:srgbClr val="444444"/>
+                </a:solidFill>
+                <a:latin typeface="Calibri" pitchFamily="34" charset="0"/>
+                <a:ea typeface="Calibri" pitchFamily="34" charset="-122"/>
+                <a:cs typeface="Calibri" pitchFamily="34" charset="-120"/>
+              </a:rPr>
+              <a:t>run in 5.6 seconds</a:t>
+            </a:r>
+            <a:endParaRPr lang="en-US" sz="950" dirty="0"/>
+          </a:p>
+        </p:txBody>
+      </p:sp>
+      <p:sp>
+        <p:nvSpPr>
+          <p:cNvPr id="60" name="Text 58"/>
+          <p:cNvSpPr/>
+          <p:nvPr/>
+        </p:nvSpPr>
+        <p:spPr>
+          <a:xfrm>
+            <a:off x="457200" y="4681728"/>
+            <a:ext cx="8229600" cy="320040"/>
+          </a:xfrm>
+          <a:prstGeom prst="rect">
+            <a:avLst/>
+          </a:prstGeom>
+          <a:noFill/>
+          <a:ln/>
+        </p:spPr>
+        <p:txBody>
+          <a:bodyPr wrap="square" lIns="0" tIns="0" rIns="0" bIns="0" rtlCol="0" anchor="ctr"/>
+          <a:lstStyle/>
+          <a:p>
+            <a:pPr algn="l" indent="0" marL="0">
+              <a:buNone/>
+            </a:pPr>
+            <a:r>
+              <a:rPr lang="en-US" sz="1000" i="1" dirty="0">
+                <a:solidFill>
+                  <a:srgbClr val="341515"/>
+                </a:solidFill>
+                <a:latin typeface="Calibri" pitchFamily="34" charset="0"/>
+                <a:ea typeface="Calibri" pitchFamily="34" charset="-122"/>
+                <a:cs typeface="Calibri" pitchFamily="34" charset="-120"/>
+              </a:rPr>
+              <a:t>Strategy: bottom-up unit testing with JUnit 5 + Mockito — Firebase and MinIO are mocked, so tests run fully offline with no external dependencies.</a:t>
+            </a:r>
+            <a:endParaRPr lang="en-US" sz="1000" dirty="0"/>
+          </a:p>
+        </p:txBody>
+      </p:sp>
+    </p:spTree>
+  </p:cSld>
+  <p:clrMapOvr>
+    <a:masterClrMapping/>
+  </p:clrMapOvr>
+</p:sld>
+</file>
+
+<file path=ppt/slides/slide13.xml><?xml version="1.0" encoding="utf-8"?>
+<p:sld xmlns:a="http://schemas.openxmlformats.org/drawingml/2006/main" xmlns:r="http://schemas.openxmlformats.org/officeDocument/2006/relationships" xmlns:p="http://schemas.openxmlformats.org/presentationml/2006/main">
+  <p:cSld name="Slide 13">
+    <p:bg>
+      <p:bgPr>
+        <a:solidFill>
+          <a:srgbClr val="FFFFFF"/>
+        </a:solidFill>
+      </p:bgPr>
+    </p:bg>
+    <p:spTree>
+      <p:nvGrpSpPr>
+        <p:cNvPr id="1" name=""/>
+        <p:cNvGrpSpPr/>
+        <p:nvPr/>
+      </p:nvGrpSpPr>
+      <p:grpSpPr>
+        <a:xfrm>
+          <a:off x="0" y="0"/>
+          <a:ext cx="0" cy="0"/>
+          <a:chOff x="0" y="0"/>
+          <a:chExt cx="0" cy="0"/>
+        </a:xfrm>
+      </p:grpSpPr>
+      <p:sp>
+        <p:nvSpPr>
+          <p:cNvPr id="2" name="Text 0"/>
+          <p:cNvSpPr/>
+          <p:nvPr/>
+        </p:nvSpPr>
+        <p:spPr>
+          <a:xfrm>
+            <a:off x="457200" y="164592"/>
+            <a:ext cx="8229600" cy="594360"/>
+          </a:xfrm>
+          <a:prstGeom prst="rect">
+            <a:avLst/>
+          </a:prstGeom>
+          <a:noFill/>
+          <a:ln/>
+        </p:spPr>
+        <p:txBody>
+          <a:bodyPr wrap="square" lIns="0" tIns="0" rIns="0" bIns="0" rtlCol="0" anchor="ctr"/>
+          <a:lstStyle/>
+          <a:p>
+            <a:pPr algn="l" indent="0" marL="0">
+              <a:buNone/>
+            </a:pPr>
+            <a:r>
+              <a:rPr lang="en-US" sz="3000" b="1" dirty="0">
+                <a:solidFill>
+                  <a:srgbClr val="341515"/>
+                </a:solidFill>
+                <a:latin typeface="Cambria" pitchFamily="34" charset="0"/>
+                <a:ea typeface="Cambria" pitchFamily="34" charset="-122"/>
+                <a:cs typeface="Cambria" pitchFamily="34" charset="-120"/>
+              </a:rPr>
+              <a:t>User Acceptance Testing (UAT)</a:t>
+            </a:r>
+            <a:endParaRPr lang="en-US" sz="3000" dirty="0"/>
+          </a:p>
+        </p:txBody>
+      </p:sp>
+      <p:sp>
+        <p:nvSpPr>
+          <p:cNvPr id="3" name="Text 1"/>
+          <p:cNvSpPr/>
+          <p:nvPr/>
+        </p:nvSpPr>
+        <p:spPr>
+          <a:xfrm>
+            <a:off x="457200" y="777240"/>
+            <a:ext cx="7772400" cy="320040"/>
+          </a:xfrm>
+          <a:prstGeom prst="rect">
+            <a:avLst/>
+          </a:prstGeom>
+          <a:noFill/>
+          <a:ln/>
+        </p:spPr>
+        <p:txBody>
+          <a:bodyPr wrap="square" lIns="0" tIns="0" rIns="0" bIns="0" rtlCol="0" anchor="ctr"/>
+          <a:lstStyle/>
+          <a:p>
+            <a:pPr algn="l" indent="0" marL="0">
+              <a:buNone/>
+            </a:pPr>
+            <a:r>
+              <a:rPr lang="en-US" sz="1150" dirty="0">
+                <a:solidFill>
+                  <a:srgbClr val="666666"/>
+                </a:solidFill>
+                <a:latin typeface="Calibri" pitchFamily="34" charset="0"/>
+                <a:ea typeface="Calibri" pitchFamily="34" charset="-122"/>
+                <a:cs typeface="Calibri" pitchFamily="34" charset="-120"/>
+              </a:rPr>
+              <a:t>Conducted with real users to verify each core feature meets the original requirements.</a:t>
+            </a:r>
+            <a:endParaRPr lang="en-US" sz="1150" dirty="0"/>
+          </a:p>
+        </p:txBody>
+      </p:sp>
+      <p:sp>
+        <p:nvSpPr>
+          <p:cNvPr id="4" name="Shape 2"/>
+          <p:cNvSpPr/>
+          <p:nvPr/>
+        </p:nvSpPr>
+        <p:spPr>
+          <a:xfrm>
+            <a:off x="457200" y="1170432"/>
+            <a:ext cx="8229600" cy="384048"/>
+          </a:xfrm>
+          <a:prstGeom prst="rect">
+            <a:avLst/>
+          </a:prstGeom>
+          <a:solidFill>
+            <a:srgbClr val="F5F5F5"/>
+          </a:solidFill>
+          <a:ln w="6350">
+            <a:solidFill>
+              <a:srgbClr val="E0E0E0"/>
+            </a:solidFill>
+            <a:prstDash val="solid"/>
+          </a:ln>
+        </p:spPr>
+      </p:sp>
+      <p:sp>
+        <p:nvSpPr>
+          <p:cNvPr id="5" name="Text 3"/>
+          <p:cNvSpPr/>
+          <p:nvPr/>
+        </p:nvSpPr>
+        <p:spPr>
+          <a:xfrm>
+            <a:off x="502920" y="1188720"/>
+            <a:ext cx="320040" cy="347472"/>
+          </a:xfrm>
+          <a:prstGeom prst="rect">
+            <a:avLst/>
+          </a:prstGeom>
+          <a:noFill/>
+          <a:ln/>
+        </p:spPr>
+        <p:txBody>
+          <a:bodyPr wrap="square" lIns="0" tIns="0" rIns="0" bIns="0" rtlCol="0" anchor="ctr"/>
+          <a:lstStyle/>
+          <a:p>
+            <a:pPr algn="ctr" indent="0" marL="0">
+              <a:buNone/>
+            </a:pPr>
+            <a:r>
+              <a:rPr lang="en-US" sz="1050" b="1" dirty="0">
+                <a:solidFill>
+                  <a:srgbClr val="341515"/>
+                </a:solidFill>
+                <a:latin typeface="Calibri" pitchFamily="34" charset="0"/>
+                <a:ea typeface="Calibri" pitchFamily="34" charset="-122"/>
+                <a:cs typeface="Calibri" pitchFamily="34" charset="-120"/>
+              </a:rPr>
+              <a:t>#</a:t>
+            </a:r>
+            <a:endParaRPr lang="en-US" sz="1050" dirty="0"/>
+          </a:p>
+        </p:txBody>
+      </p:sp>
+      <p:sp>
+        <p:nvSpPr>
+          <p:cNvPr id="6" name="Text 4"/>
+          <p:cNvSpPr/>
+          <p:nvPr/>
+        </p:nvSpPr>
+        <p:spPr>
+          <a:xfrm>
+            <a:off x="868680" y="1188720"/>
+            <a:ext cx="2560320" cy="347472"/>
+          </a:xfrm>
+          <a:prstGeom prst="rect">
+            <a:avLst/>
+          </a:prstGeom>
+          <a:noFill/>
+          <a:ln/>
+        </p:spPr>
+        <p:txBody>
+          <a:bodyPr wrap="square" lIns="0" tIns="0" rIns="0" bIns="0" rtlCol="0" anchor="ctr"/>
+          <a:lstStyle/>
+          <a:p>
+            <a:pPr algn="l" indent="0" marL="0">
+              <a:buNone/>
+            </a:pPr>
+            <a:r>
+              <a:rPr lang="en-US" sz="1050" b="1" dirty="0">
+                <a:solidFill>
+                  <a:srgbClr val="341515"/>
+                </a:solidFill>
+                <a:latin typeface="Calibri" pitchFamily="34" charset="0"/>
+                <a:ea typeface="Calibri" pitchFamily="34" charset="-122"/>
+                <a:cs typeface="Calibri" pitchFamily="34" charset="-120"/>
+              </a:rPr>
+              <a:t>Scenario</a:t>
+            </a:r>
+            <a:endParaRPr lang="en-US" sz="1050" dirty="0"/>
+          </a:p>
+        </p:txBody>
+      </p:sp>
+      <p:sp>
+        <p:nvSpPr>
+          <p:cNvPr id="7" name="Text 5"/>
+          <p:cNvSpPr/>
+          <p:nvPr/>
+        </p:nvSpPr>
+        <p:spPr>
+          <a:xfrm>
+            <a:off x="3474720" y="1188720"/>
+            <a:ext cx="2651760" cy="347472"/>
+          </a:xfrm>
+          <a:prstGeom prst="rect">
+            <a:avLst/>
+          </a:prstGeom>
+          <a:noFill/>
+          <a:ln/>
+        </p:spPr>
+        <p:txBody>
+          <a:bodyPr wrap="square" lIns="0" tIns="0" rIns="0" bIns="0" rtlCol="0" anchor="ctr"/>
+          <a:lstStyle/>
+          <a:p>
+            <a:pPr algn="l" indent="0" marL="0">
+              <a:buNone/>
+            </a:pPr>
+            <a:r>
+              <a:rPr lang="en-US" sz="1050" b="1" dirty="0">
+                <a:solidFill>
+                  <a:srgbClr val="341515"/>
+                </a:solidFill>
+                <a:latin typeface="Calibri" pitchFamily="34" charset="0"/>
+                <a:ea typeface="Calibri" pitchFamily="34" charset="-122"/>
+                <a:cs typeface="Calibri" pitchFamily="34" charset="-120"/>
+              </a:rPr>
+              <a:t>Steps</a:t>
+            </a:r>
+            <a:endParaRPr lang="en-US" sz="1050" dirty="0"/>
+          </a:p>
+        </p:txBody>
+      </p:sp>
+      <p:sp>
+        <p:nvSpPr>
+          <p:cNvPr id="8" name="Text 6"/>
+          <p:cNvSpPr/>
+          <p:nvPr/>
+        </p:nvSpPr>
+        <p:spPr>
+          <a:xfrm>
+            <a:off x="6172200" y="1188720"/>
+            <a:ext cx="1508760" cy="347472"/>
+          </a:xfrm>
+          <a:prstGeom prst="rect">
+            <a:avLst/>
+          </a:prstGeom>
+          <a:noFill/>
+          <a:ln/>
+        </p:spPr>
+        <p:txBody>
+          <a:bodyPr wrap="square" lIns="0" tIns="0" rIns="0" bIns="0" rtlCol="0" anchor="ctr"/>
+          <a:lstStyle/>
+          <a:p>
+            <a:pPr algn="l" indent="0" marL="0">
+              <a:buNone/>
+            </a:pPr>
+            <a:r>
+              <a:rPr lang="en-US" sz="1050" b="1" dirty="0">
+                <a:solidFill>
+                  <a:srgbClr val="341515"/>
+                </a:solidFill>
+                <a:latin typeface="Calibri" pitchFamily="34" charset="0"/>
+                <a:ea typeface="Calibri" pitchFamily="34" charset="-122"/>
+                <a:cs typeface="Calibri" pitchFamily="34" charset="-120"/>
+              </a:rPr>
+              <a:t>Expected</a:t>
+            </a:r>
+            <a:endParaRPr lang="en-US" sz="1050" dirty="0"/>
+          </a:p>
+        </p:txBody>
+      </p:sp>
+      <p:sp>
+        <p:nvSpPr>
+          <p:cNvPr id="9" name="Text 7"/>
+          <p:cNvSpPr/>
+          <p:nvPr/>
+        </p:nvSpPr>
+        <p:spPr>
+          <a:xfrm>
+            <a:off x="7680960" y="1188720"/>
+            <a:ext cx="822960" cy="347472"/>
+          </a:xfrm>
+          <a:prstGeom prst="rect">
+            <a:avLst/>
+          </a:prstGeom>
+          <a:noFill/>
+          <a:ln/>
+        </p:spPr>
+        <p:txBody>
+          <a:bodyPr wrap="square" lIns="0" tIns="0" rIns="0" bIns="0" rtlCol="0" anchor="ctr"/>
+          <a:lstStyle/>
+          <a:p>
+            <a:pPr algn="ctr" indent="0" marL="0">
+              <a:buNone/>
+            </a:pPr>
+            <a:r>
+              <a:rPr lang="en-US" sz="1050" b="1" dirty="0">
+                <a:solidFill>
+                  <a:srgbClr val="341515"/>
+                </a:solidFill>
+                <a:latin typeface="Calibri" pitchFamily="34" charset="0"/>
+                <a:ea typeface="Calibri" pitchFamily="34" charset="-122"/>
+                <a:cs typeface="Calibri" pitchFamily="34" charset="-120"/>
+              </a:rPr>
+              <a:t>Result</a:t>
+            </a:r>
+            <a:endParaRPr lang="en-US" sz="1050" dirty="0"/>
+          </a:p>
+        </p:txBody>
+      </p:sp>
+      <p:sp>
+        <p:nvSpPr>
+          <p:cNvPr id="10" name="Shape 8"/>
+          <p:cNvSpPr/>
+          <p:nvPr/>
+        </p:nvSpPr>
+        <p:spPr>
+          <a:xfrm>
+            <a:off x="457200" y="1572768"/>
+            <a:ext cx="8229600" cy="457200"/>
+          </a:xfrm>
+          <a:prstGeom prst="rect">
+            <a:avLst/>
+          </a:prstGeom>
+          <a:solidFill>
+            <a:srgbClr val="FAFAFA"/>
+          </a:solidFill>
+          <a:ln w="3810">
+            <a:solidFill>
+              <a:srgbClr val="E8E8E8"/>
+            </a:solidFill>
+            <a:prstDash val="solid"/>
+          </a:ln>
+        </p:spPr>
+      </p:sp>
+      <p:sp>
+        <p:nvSpPr>
+          <p:cNvPr id="11" name="Shape 9"/>
+          <p:cNvSpPr/>
+          <p:nvPr/>
+        </p:nvSpPr>
+        <p:spPr>
+          <a:xfrm>
+            <a:off x="502920" y="1673352"/>
+            <a:ext cx="566928" cy="237744"/>
+          </a:xfrm>
+          <a:prstGeom prst="roundRect">
+            <a:avLst>
+              <a:gd name="adj" fmla="val 15385"/>
+            </a:avLst>
+          </a:prstGeom>
+          <a:solidFill>
+            <a:srgbClr val="341515"/>
+          </a:solidFill>
+          <a:ln w="12700">
+            <a:solidFill>
+              <a:srgbClr val="341515"/>
+            </a:solidFill>
+            <a:prstDash val="solid"/>
+          </a:ln>
+        </p:spPr>
+      </p:sp>
+      <p:sp>
+        <p:nvSpPr>
+          <p:cNvPr id="12" name="Text 10"/>
+          <p:cNvSpPr/>
+          <p:nvPr/>
+        </p:nvSpPr>
+        <p:spPr>
+          <a:xfrm>
+            <a:off x="502920" y="1673352"/>
+            <a:ext cx="566928" cy="237744"/>
+          </a:xfrm>
+          <a:prstGeom prst="rect">
+            <a:avLst/>
+          </a:prstGeom>
+          <a:noFill/>
+          <a:ln/>
+        </p:spPr>
+        <p:txBody>
+          <a:bodyPr wrap="square" lIns="0" tIns="0" rIns="0" bIns="0" rtlCol="0" anchor="ctr"/>
+          <a:lstStyle/>
+          <a:p>
+            <a:pPr algn="ctr" indent="0" marL="0">
+              <a:buNone/>
+            </a:pPr>
+            <a:r>
+              <a:rPr lang="en-US" sz="700" b="1" dirty="0">
+                <a:solidFill>
+                  <a:srgbClr val="FFFFFF"/>
+                </a:solidFill>
+                <a:latin typeface="Calibri" pitchFamily="34" charset="0"/>
+                <a:ea typeface="Calibri" pitchFamily="34" charset="-122"/>
+                <a:cs typeface="Calibri" pitchFamily="34" charset="-120"/>
+              </a:rPr>
+              <a:t>UAT-01</a:t>
+            </a:r>
+            <a:endParaRPr lang="en-US" sz="700" dirty="0"/>
+          </a:p>
+        </p:txBody>
+      </p:sp>
+      <p:sp>
+        <p:nvSpPr>
+          <p:cNvPr id="13" name="Text 11"/>
+          <p:cNvSpPr/>
+          <p:nvPr/>
+        </p:nvSpPr>
+        <p:spPr>
+          <a:xfrm>
+            <a:off x="1115568" y="1627632"/>
+            <a:ext cx="2313432" cy="347472"/>
+          </a:xfrm>
+          <a:prstGeom prst="rect">
+            <a:avLst/>
+          </a:prstGeom>
+          <a:noFill/>
+          <a:ln/>
+        </p:spPr>
+        <p:txBody>
+          <a:bodyPr wrap="square" lIns="0" tIns="0" rIns="0" bIns="0" rtlCol="0" anchor="ctr"/>
+          <a:lstStyle/>
+          <a:p>
+            <a:pPr algn="l" indent="0" marL="0">
+              <a:buNone/>
+            </a:pPr>
+            <a:r>
+              <a:rPr lang="en-US" sz="950" b="1" dirty="0">
+                <a:solidFill>
+                  <a:srgbClr val="2A1515"/>
+                </a:solidFill>
+                <a:latin typeface="Calibri" pitchFamily="34" charset="0"/>
+                <a:ea typeface="Calibri" pitchFamily="34" charset="-122"/>
+                <a:cs typeface="Calibri" pitchFamily="34" charset="-120"/>
+              </a:rPr>
+              <a:t>Citizen submits emergency report</a:t>
+            </a:r>
+            <a:endParaRPr lang="en-US" sz="950" dirty="0"/>
+          </a:p>
+        </p:txBody>
+      </p:sp>
+      <p:sp>
+        <p:nvSpPr>
+          <p:cNvPr id="14" name="Text 12"/>
+          <p:cNvSpPr/>
+          <p:nvPr/>
+        </p:nvSpPr>
+        <p:spPr>
+          <a:xfrm>
+            <a:off x="3474720" y="1627632"/>
+            <a:ext cx="2651760" cy="347472"/>
+          </a:xfrm>
+          <a:prstGeom prst="rect">
+            <a:avLst/>
+          </a:prstGeom>
+          <a:noFill/>
+          <a:ln/>
+        </p:spPr>
+        <p:txBody>
+          <a:bodyPr wrap="square" lIns="0" tIns="0" rIns="0" bIns="0" rtlCol="0" anchor="ctr"/>
+          <a:lstStyle/>
+          <a:p>
+            <a:pPr algn="l" indent="0" marL="0">
+              <a:buNone/>
+            </a:pPr>
+            <a:r>
+              <a:rPr lang="en-US" sz="900" dirty="0">
+                <a:solidFill>
+                  <a:srgbClr val="444444"/>
+                </a:solidFill>
+                <a:latin typeface="Calibri" pitchFamily="34" charset="0"/>
+                <a:ea typeface="Calibri" pitchFamily="34" charset="-122"/>
+                <a:cs typeface="Calibri" pitchFamily="34" charset="-120"/>
+              </a:rPr>
+              <a:t>Open app → Select category → Upload photo → Submit</a:t>
+            </a:r>
+            <a:endParaRPr lang="en-US" sz="900" dirty="0"/>
+          </a:p>
+        </p:txBody>
+      </p:sp>
+      <p:sp>
+        <p:nvSpPr>
+          <p:cNvPr id="15" name="Text 13"/>
+          <p:cNvSpPr/>
+          <p:nvPr/>
+        </p:nvSpPr>
+        <p:spPr>
+          <a:xfrm>
+            <a:off x="6172200" y="1627632"/>
+            <a:ext cx="1508760" cy="347472"/>
+          </a:xfrm>
+          <a:prstGeom prst="rect">
+            <a:avLst/>
+          </a:prstGeom>
+          <a:noFill/>
+          <a:ln/>
+        </p:spPr>
+        <p:txBody>
+          <a:bodyPr wrap="square" lIns="0" tIns="0" rIns="0" bIns="0" rtlCol="0" anchor="ctr"/>
+          <a:lstStyle/>
+          <a:p>
+            <a:pPr algn="l" indent="0" marL="0">
+              <a:buNone/>
+            </a:pPr>
+            <a:r>
+              <a:rPr lang="en-US" sz="900" dirty="0">
+                <a:solidFill>
+                  <a:srgbClr val="444444"/>
+                </a:solidFill>
+                <a:latin typeface="Calibri" pitchFamily="34" charset="0"/>
+                <a:ea typeface="Calibri" pitchFamily="34" charset="-122"/>
+                <a:cs typeface="Calibri" pitchFamily="34" charset="-120"/>
+              </a:rPr>
+              <a:t>Report saved, org notified</a:t>
+            </a:r>
+            <a:endParaRPr lang="en-US" sz="900" dirty="0"/>
+          </a:p>
+        </p:txBody>
+      </p:sp>
+      <p:sp>
+        <p:nvSpPr>
+          <p:cNvPr id="16" name="Text 14"/>
+          <p:cNvSpPr/>
+          <p:nvPr/>
+        </p:nvSpPr>
+        <p:spPr>
+          <a:xfrm>
+            <a:off x="7680960" y="1627632"/>
+            <a:ext cx="822960" cy="347472"/>
+          </a:xfrm>
+          <a:prstGeom prst="rect">
+            <a:avLst/>
+          </a:prstGeom>
+          <a:noFill/>
+          <a:ln/>
+        </p:spPr>
+        <p:txBody>
+          <a:bodyPr wrap="square" lIns="0" tIns="0" rIns="0" bIns="0" rtlCol="0" anchor="ctr"/>
+          <a:lstStyle/>
+          <a:p>
+            <a:pPr algn="ctr" indent="0" marL="0">
+              <a:buNone/>
+            </a:pPr>
+            <a:r>
+              <a:rPr lang="en-US" sz="1050" b="1" dirty="0">
+                <a:solidFill>
+                  <a:srgbClr val="1A7A1A"/>
+                </a:solidFill>
+                <a:latin typeface="Calibri" pitchFamily="34" charset="0"/>
+                <a:ea typeface="Calibri" pitchFamily="34" charset="-122"/>
+                <a:cs typeface="Calibri" pitchFamily="34" charset="-120"/>
+              </a:rPr>
+              <a:t>✔ Pass</a:t>
+            </a:r>
+            <a:endParaRPr lang="en-US" sz="1050" dirty="0"/>
+          </a:p>
+        </p:txBody>
+      </p:sp>
+      <p:sp>
+        <p:nvSpPr>
+          <p:cNvPr id="17" name="Shape 15"/>
+          <p:cNvSpPr/>
+          <p:nvPr/>
+        </p:nvSpPr>
+        <p:spPr>
+          <a:xfrm>
+            <a:off x="457200" y="2039112"/>
+            <a:ext cx="8229600" cy="457200"/>
+          </a:xfrm>
+          <a:prstGeom prst="rect">
+            <a:avLst/>
+          </a:prstGeom>
+          <a:solidFill>
+            <a:srgbClr val="FFFFFF"/>
+          </a:solidFill>
+          <a:ln w="3810">
+            <a:solidFill>
+              <a:srgbClr val="E8E8E8"/>
+            </a:solidFill>
+            <a:prstDash val="solid"/>
+          </a:ln>
+        </p:spPr>
+      </p:sp>
+      <p:sp>
+        <p:nvSpPr>
+          <p:cNvPr id="18" name="Shape 16"/>
+          <p:cNvSpPr/>
+          <p:nvPr/>
+        </p:nvSpPr>
+        <p:spPr>
+          <a:xfrm>
+            <a:off x="502920" y="2139696"/>
+            <a:ext cx="566928" cy="237744"/>
+          </a:xfrm>
+          <a:prstGeom prst="roundRect">
+            <a:avLst>
+              <a:gd name="adj" fmla="val 15385"/>
+            </a:avLst>
+          </a:prstGeom>
+          <a:solidFill>
+            <a:srgbClr val="341515"/>
+          </a:solidFill>
+          <a:ln w="12700">
+            <a:solidFill>
+              <a:srgbClr val="341515"/>
+            </a:solidFill>
+            <a:prstDash val="solid"/>
+          </a:ln>
+        </p:spPr>
+      </p:sp>
+      <p:sp>
+        <p:nvSpPr>
+          <p:cNvPr id="19" name="Text 17"/>
+          <p:cNvSpPr/>
+          <p:nvPr/>
+        </p:nvSpPr>
+        <p:spPr>
+          <a:xfrm>
+            <a:off x="502920" y="2139696"/>
+            <a:ext cx="566928" cy="237744"/>
+          </a:xfrm>
+          <a:prstGeom prst="rect">
+            <a:avLst/>
+          </a:prstGeom>
+          <a:noFill/>
+          <a:ln/>
+        </p:spPr>
+        <p:txBody>
+          <a:bodyPr wrap="square" lIns="0" tIns="0" rIns="0" bIns="0" rtlCol="0" anchor="ctr"/>
+          <a:lstStyle/>
+          <a:p>
+            <a:pPr algn="ctr" indent="0" marL="0">
+              <a:buNone/>
+            </a:pPr>
+            <a:r>
+              <a:rPr lang="en-US" sz="700" b="1" dirty="0">
+                <a:solidFill>
+                  <a:srgbClr val="FFFFFF"/>
+                </a:solidFill>
+                <a:latin typeface="Calibri" pitchFamily="34" charset="0"/>
+                <a:ea typeface="Calibri" pitchFamily="34" charset="-122"/>
+                <a:cs typeface="Calibri" pitchFamily="34" charset="-120"/>
+              </a:rPr>
+              <a:t>UAT-02</a:t>
+            </a:r>
+            <a:endParaRPr lang="en-US" sz="700" dirty="0"/>
+          </a:p>
+        </p:txBody>
+      </p:sp>
+      <p:sp>
+        <p:nvSpPr>
+          <p:cNvPr id="20" name="Text 18"/>
+          <p:cNvSpPr/>
+          <p:nvPr/>
+        </p:nvSpPr>
+        <p:spPr>
+          <a:xfrm>
+            <a:off x="1115568" y="2093976"/>
+            <a:ext cx="2313432" cy="347472"/>
+          </a:xfrm>
+          <a:prstGeom prst="rect">
+            <a:avLst/>
+          </a:prstGeom>
+          <a:noFill/>
+          <a:ln/>
+        </p:spPr>
+        <p:txBody>
+          <a:bodyPr wrap="square" lIns="0" tIns="0" rIns="0" bIns="0" rtlCol="0" anchor="ctr"/>
+          <a:lstStyle/>
+          <a:p>
+            <a:pPr algn="l" indent="0" marL="0">
+              <a:buNone/>
+            </a:pPr>
+            <a:r>
+              <a:rPr lang="en-US" sz="950" b="1" dirty="0">
+                <a:solidFill>
+                  <a:srgbClr val="2A1515"/>
+                </a:solidFill>
+                <a:latin typeface="Calibri" pitchFamily="34" charset="0"/>
+                <a:ea typeface="Calibri" pitchFamily="34" charset="-122"/>
+                <a:cs typeface="Calibri" pitchFamily="34" charset="-120"/>
+              </a:rPr>
+              <a:t>Org views assigned report on dashboard</a:t>
+            </a:r>
+            <a:endParaRPr lang="en-US" sz="950" dirty="0"/>
+          </a:p>
+        </p:txBody>
+      </p:sp>
+      <p:sp>
+        <p:nvSpPr>
+          <p:cNvPr id="21" name="Text 19"/>
+          <p:cNvSpPr/>
+          <p:nvPr/>
+        </p:nvSpPr>
+        <p:spPr>
+          <a:xfrm>
+            <a:off x="3474720" y="2093976"/>
+            <a:ext cx="2651760" cy="347472"/>
+          </a:xfrm>
+          <a:prstGeom prst="rect">
+            <a:avLst/>
+          </a:prstGeom>
+          <a:noFill/>
+          <a:ln/>
+        </p:spPr>
+        <p:txBody>
+          <a:bodyPr wrap="square" lIns="0" tIns="0" rIns="0" bIns="0" rtlCol="0" anchor="ctr"/>
+          <a:lstStyle/>
+          <a:p>
+            <a:pPr algn="l" indent="0" marL="0">
+              <a:buNone/>
+            </a:pPr>
+            <a:r>
+              <a:rPr lang="en-US" sz="900" dirty="0">
+                <a:solidFill>
+                  <a:srgbClr val="444444"/>
+                </a:solidFill>
+                <a:latin typeface="Calibri" pitchFamily="34" charset="0"/>
+                <a:ea typeface="Calibri" pitchFamily="34" charset="-122"/>
+                <a:cs typeface="Calibri" pitchFamily="34" charset="-120"/>
+              </a:rPr>
+              <a:t>Login (web) → View report → Open detail → Update status</a:t>
+            </a:r>
+            <a:endParaRPr lang="en-US" sz="900" dirty="0"/>
+          </a:p>
+        </p:txBody>
+      </p:sp>
+      <p:sp>
+        <p:nvSpPr>
+          <p:cNvPr id="22" name="Text 20"/>
+          <p:cNvSpPr/>
+          <p:nvPr/>
+        </p:nvSpPr>
+        <p:spPr>
+          <a:xfrm>
+            <a:off x="6172200" y="2093976"/>
+            <a:ext cx="1508760" cy="347472"/>
+          </a:xfrm>
+          <a:prstGeom prst="rect">
+            <a:avLst/>
+          </a:prstGeom>
+          <a:noFill/>
+          <a:ln/>
+        </p:spPr>
+        <p:txBody>
+          <a:bodyPr wrap="square" lIns="0" tIns="0" rIns="0" bIns="0" rtlCol="0" anchor="ctr"/>
+          <a:lstStyle/>
+          <a:p>
+            <a:pPr algn="l" indent="0" marL="0">
+              <a:buNone/>
+            </a:pPr>
+            <a:r>
+              <a:rPr lang="en-US" sz="900" dirty="0">
+                <a:solidFill>
+                  <a:srgbClr val="444444"/>
+                </a:solidFill>
+                <a:latin typeface="Calibri" pitchFamily="34" charset="0"/>
+                <a:ea typeface="Calibri" pitchFamily="34" charset="-122"/>
+                <a:cs typeface="Calibri" pitchFamily="34" charset="-120"/>
+              </a:rPr>
+              <a:t>Status updates live for citizen</a:t>
+            </a:r>
+            <a:endParaRPr lang="en-US" sz="900" dirty="0"/>
+          </a:p>
+        </p:txBody>
+      </p:sp>
+      <p:sp>
+        <p:nvSpPr>
+          <p:cNvPr id="23" name="Text 21"/>
+          <p:cNvSpPr/>
+          <p:nvPr/>
+        </p:nvSpPr>
+        <p:spPr>
+          <a:xfrm>
+            <a:off x="7680960" y="2093976"/>
+            <a:ext cx="822960" cy="347472"/>
+          </a:xfrm>
+          <a:prstGeom prst="rect">
+            <a:avLst/>
+          </a:prstGeom>
+          <a:noFill/>
+          <a:ln/>
+        </p:spPr>
+        <p:txBody>
+          <a:bodyPr wrap="square" lIns="0" tIns="0" rIns="0" bIns="0" rtlCol="0" anchor="ctr"/>
+          <a:lstStyle/>
+          <a:p>
+            <a:pPr algn="ctr" indent="0" marL="0">
+              <a:buNone/>
+            </a:pPr>
+            <a:r>
+              <a:rPr lang="en-US" sz="1050" b="1" dirty="0">
+                <a:solidFill>
+                  <a:srgbClr val="1A7A1A"/>
+                </a:solidFill>
+                <a:latin typeface="Calibri" pitchFamily="34" charset="0"/>
+                <a:ea typeface="Calibri" pitchFamily="34" charset="-122"/>
+                <a:cs typeface="Calibri" pitchFamily="34" charset="-120"/>
+              </a:rPr>
+              <a:t>✔ Pass</a:t>
+            </a:r>
+            <a:endParaRPr lang="en-US" sz="1050" dirty="0"/>
+          </a:p>
+        </p:txBody>
+      </p:sp>
+      <p:sp>
+        <p:nvSpPr>
+          <p:cNvPr id="24" name="Shape 22"/>
+          <p:cNvSpPr/>
+          <p:nvPr/>
+        </p:nvSpPr>
+        <p:spPr>
+          <a:xfrm>
+            <a:off x="457200" y="2505456"/>
+            <a:ext cx="8229600" cy="457200"/>
+          </a:xfrm>
+          <a:prstGeom prst="rect">
+            <a:avLst/>
+          </a:prstGeom>
+          <a:solidFill>
+            <a:srgbClr val="FAFAFA"/>
+          </a:solidFill>
+          <a:ln w="3810">
+            <a:solidFill>
+              <a:srgbClr val="E8E8E8"/>
+            </a:solidFill>
+            <a:prstDash val="solid"/>
+          </a:ln>
+        </p:spPr>
+      </p:sp>
+      <p:sp>
+        <p:nvSpPr>
+          <p:cNvPr id="25" name="Shape 23"/>
+          <p:cNvSpPr/>
+          <p:nvPr/>
+        </p:nvSpPr>
+        <p:spPr>
+          <a:xfrm>
+            <a:off x="502920" y="2606040"/>
+            <a:ext cx="566928" cy="237744"/>
+          </a:xfrm>
+          <a:prstGeom prst="roundRect">
+            <a:avLst>
+              <a:gd name="adj" fmla="val 15385"/>
+            </a:avLst>
+          </a:prstGeom>
+          <a:solidFill>
+            <a:srgbClr val="341515"/>
+          </a:solidFill>
+          <a:ln w="12700">
+            <a:solidFill>
+              <a:srgbClr val="341515"/>
+            </a:solidFill>
+            <a:prstDash val="solid"/>
+          </a:ln>
+        </p:spPr>
+      </p:sp>
+      <p:sp>
+        <p:nvSpPr>
+          <p:cNvPr id="26" name="Text 24"/>
+          <p:cNvSpPr/>
+          <p:nvPr/>
+        </p:nvSpPr>
+        <p:spPr>
+          <a:xfrm>
+            <a:off x="502920" y="2606040"/>
+            <a:ext cx="566928" cy="237744"/>
+          </a:xfrm>
+          <a:prstGeom prst="rect">
+            <a:avLst/>
+          </a:prstGeom>
+          <a:noFill/>
+          <a:ln/>
+        </p:spPr>
+        <p:txBody>
+          <a:bodyPr wrap="square" lIns="0" tIns="0" rIns="0" bIns="0" rtlCol="0" anchor="ctr"/>
+          <a:lstStyle/>
+          <a:p>
+            <a:pPr algn="ctr" indent="0" marL="0">
+              <a:buNone/>
+            </a:pPr>
+            <a:r>
+              <a:rPr lang="en-US" sz="700" b="1" dirty="0">
+                <a:solidFill>
+                  <a:srgbClr val="FFFFFF"/>
+                </a:solidFill>
+                <a:latin typeface="Calibri" pitchFamily="34" charset="0"/>
+                <a:ea typeface="Calibri" pitchFamily="34" charset="-122"/>
+                <a:cs typeface="Calibri" pitchFamily="34" charset="-120"/>
+              </a:rPr>
+              <a:t>UAT-03</a:t>
+            </a:r>
+            <a:endParaRPr lang="en-US" sz="700" dirty="0"/>
+          </a:p>
+        </p:txBody>
+      </p:sp>
+      <p:sp>
+        <p:nvSpPr>
+          <p:cNvPr id="27" name="Text 25"/>
+          <p:cNvSpPr/>
+          <p:nvPr/>
+        </p:nvSpPr>
+        <p:spPr>
+          <a:xfrm>
+            <a:off x="1115568" y="2560320"/>
+            <a:ext cx="2313432" cy="347472"/>
+          </a:xfrm>
+          <a:prstGeom prst="rect">
+            <a:avLst/>
+          </a:prstGeom>
+          <a:noFill/>
+          <a:ln/>
+        </p:spPr>
+        <p:txBody>
+          <a:bodyPr wrap="square" lIns="0" tIns="0" rIns="0" bIns="0" rtlCol="0" anchor="ctr"/>
+          <a:lstStyle/>
+          <a:p>
+            <a:pPr algn="l" indent="0" marL="0">
+              <a:buNone/>
+            </a:pPr>
+            <a:r>
+              <a:rPr lang="en-US" sz="950" b="1" dirty="0">
+                <a:solidFill>
+                  <a:srgbClr val="2A1515"/>
+                </a:solidFill>
+                <a:latin typeface="Calibri" pitchFamily="34" charset="0"/>
+                <a:ea typeface="Calibri" pitchFamily="34" charset="-122"/>
+                <a:cs typeface="Calibri" pitchFamily="34" charset="-120"/>
+              </a:rPr>
+              <a:t>Citizen receives nearby danger alert</a:t>
+            </a:r>
+            <a:endParaRPr lang="en-US" sz="950" dirty="0"/>
+          </a:p>
+        </p:txBody>
+      </p:sp>
+      <p:sp>
+        <p:nvSpPr>
+          <p:cNvPr id="28" name="Text 26"/>
+          <p:cNvSpPr/>
+          <p:nvPr/>
+        </p:nvSpPr>
+        <p:spPr>
+          <a:xfrm>
+            <a:off x="3474720" y="2560320"/>
+            <a:ext cx="2651760" cy="347472"/>
+          </a:xfrm>
+          <a:prstGeom prst="rect">
+            <a:avLst/>
+          </a:prstGeom>
+          <a:noFill/>
+          <a:ln/>
+        </p:spPr>
+        <p:txBody>
+          <a:bodyPr wrap="square" lIns="0" tIns="0" rIns="0" bIns="0" rtlCol="0" anchor="ctr"/>
+          <a:lstStyle/>
+          <a:p>
+            <a:pPr algn="l" indent="0" marL="0">
+              <a:buNone/>
+            </a:pPr>
+            <a:r>
+              <a:rPr lang="en-US" sz="900" dirty="0">
+                <a:solidFill>
+                  <a:srgbClr val="444444"/>
+                </a:solidFill>
+                <a:latin typeface="Calibri" pitchFamily="34" charset="0"/>
+                <a:ea typeface="Calibri" pitchFamily="34" charset="-122"/>
+                <a:cs typeface="Calibri" pitchFamily="34" charset="-120"/>
+              </a:rPr>
+              <a:t>Stay on Home screen → Another user submits report 1 km away</a:t>
+            </a:r>
+            <a:endParaRPr lang="en-US" sz="900" dirty="0"/>
+          </a:p>
+        </p:txBody>
+      </p:sp>
+      <p:sp>
+        <p:nvSpPr>
+          <p:cNvPr id="29" name="Text 27"/>
+          <p:cNvSpPr/>
+          <p:nvPr/>
+        </p:nvSpPr>
+        <p:spPr>
+          <a:xfrm>
+            <a:off x="6172200" y="2560320"/>
+            <a:ext cx="1508760" cy="347472"/>
+          </a:xfrm>
+          <a:prstGeom prst="rect">
+            <a:avLst/>
+          </a:prstGeom>
+          <a:noFill/>
+          <a:ln/>
+        </p:spPr>
+        <p:txBody>
+          <a:bodyPr wrap="square" lIns="0" tIns="0" rIns="0" bIns="0" rtlCol="0" anchor="ctr"/>
+          <a:lstStyle/>
+          <a:p>
+            <a:pPr algn="l" indent="0" marL="0">
+              <a:buNone/>
+            </a:pPr>
+            <a:r>
+              <a:rPr lang="en-US" sz="900" dirty="0">
+                <a:solidFill>
+                  <a:srgbClr val="444444"/>
+                </a:solidFill>
+                <a:latin typeface="Calibri" pitchFamily="34" charset="0"/>
+                <a:ea typeface="Calibri" pitchFamily="34" charset="-122"/>
+                <a:cs typeface="Calibri" pitchFamily="34" charset="-120"/>
+              </a:rPr>
+              <a:t>Push notification received</a:t>
+            </a:r>
+            <a:endParaRPr lang="en-US" sz="900" dirty="0"/>
+          </a:p>
+        </p:txBody>
+      </p:sp>
+      <p:sp>
+        <p:nvSpPr>
+          <p:cNvPr id="30" name="Text 28"/>
+          <p:cNvSpPr/>
+          <p:nvPr/>
+        </p:nvSpPr>
+        <p:spPr>
+          <a:xfrm>
+            <a:off x="7680960" y="2560320"/>
+            <a:ext cx="822960" cy="347472"/>
+          </a:xfrm>
+          <a:prstGeom prst="rect">
+            <a:avLst/>
+          </a:prstGeom>
+          <a:noFill/>
+          <a:ln/>
+        </p:spPr>
+        <p:txBody>
+          <a:bodyPr wrap="square" lIns="0" tIns="0" rIns="0" bIns="0" rtlCol="0" anchor="ctr"/>
+          <a:lstStyle/>
+          <a:p>
+            <a:pPr algn="ctr" indent="0" marL="0">
+              <a:buNone/>
+            </a:pPr>
+            <a:r>
+              <a:rPr lang="en-US" sz="1050" b="1" dirty="0">
+                <a:solidFill>
+                  <a:srgbClr val="1A7A1A"/>
+                </a:solidFill>
+                <a:latin typeface="Calibri" pitchFamily="34" charset="0"/>
+                <a:ea typeface="Calibri" pitchFamily="34" charset="-122"/>
+                <a:cs typeface="Calibri" pitchFamily="34" charset="-120"/>
+              </a:rPr>
+              <a:t>✔ Pass</a:t>
+            </a:r>
+            <a:endParaRPr lang="en-US" sz="1050" dirty="0"/>
+          </a:p>
+        </p:txBody>
+      </p:sp>
+      <p:sp>
+        <p:nvSpPr>
+          <p:cNvPr id="31" name="Shape 29"/>
+          <p:cNvSpPr/>
+          <p:nvPr/>
+        </p:nvSpPr>
+        <p:spPr>
+          <a:xfrm>
+            <a:off x="457200" y="2971800"/>
+            <a:ext cx="8229600" cy="457200"/>
+          </a:xfrm>
+          <a:prstGeom prst="rect">
+            <a:avLst/>
+          </a:prstGeom>
+          <a:solidFill>
+            <a:srgbClr val="FFFFFF"/>
+          </a:solidFill>
+          <a:ln w="3810">
+            <a:solidFill>
+              <a:srgbClr val="E8E8E8"/>
+            </a:solidFill>
+            <a:prstDash val="solid"/>
+          </a:ln>
+        </p:spPr>
+      </p:sp>
+      <p:sp>
+        <p:nvSpPr>
+          <p:cNvPr id="32" name="Shape 30"/>
+          <p:cNvSpPr/>
+          <p:nvPr/>
+        </p:nvSpPr>
+        <p:spPr>
+          <a:xfrm>
+            <a:off x="502920" y="3072384"/>
+            <a:ext cx="566928" cy="237744"/>
+          </a:xfrm>
+          <a:prstGeom prst="roundRect">
+            <a:avLst>
+              <a:gd name="adj" fmla="val 15385"/>
+            </a:avLst>
+          </a:prstGeom>
+          <a:solidFill>
+            <a:srgbClr val="341515"/>
+          </a:solidFill>
+          <a:ln w="12700">
+            <a:solidFill>
+              <a:srgbClr val="341515"/>
+            </a:solidFill>
+            <a:prstDash val="solid"/>
+          </a:ln>
+        </p:spPr>
+      </p:sp>
+      <p:sp>
+        <p:nvSpPr>
+          <p:cNvPr id="33" name="Text 31"/>
+          <p:cNvSpPr/>
+          <p:nvPr/>
+        </p:nvSpPr>
+        <p:spPr>
+          <a:xfrm>
+            <a:off x="502920" y="3072384"/>
+            <a:ext cx="566928" cy="237744"/>
+          </a:xfrm>
+          <a:prstGeom prst="rect">
+            <a:avLst/>
+          </a:prstGeom>
+          <a:noFill/>
+          <a:ln/>
+        </p:spPr>
+        <p:txBody>
+          <a:bodyPr wrap="square" lIns="0" tIns="0" rIns="0" bIns="0" rtlCol="0" anchor="ctr"/>
+          <a:lstStyle/>
+          <a:p>
+            <a:pPr algn="ctr" indent="0" marL="0">
+              <a:buNone/>
+            </a:pPr>
+            <a:r>
+              <a:rPr lang="en-US" sz="700" b="1" dirty="0">
+                <a:solidFill>
+                  <a:srgbClr val="FFFFFF"/>
+                </a:solidFill>
+                <a:latin typeface="Calibri" pitchFamily="34" charset="0"/>
+                <a:ea typeface="Calibri" pitchFamily="34" charset="-122"/>
+                <a:cs typeface="Calibri" pitchFamily="34" charset="-120"/>
+              </a:rPr>
+              <a:t>UAT-04</a:t>
+            </a:r>
+            <a:endParaRPr lang="en-US" sz="700" dirty="0"/>
+          </a:p>
+        </p:txBody>
+      </p:sp>
+      <p:sp>
+        <p:nvSpPr>
+          <p:cNvPr id="34" name="Text 32"/>
+          <p:cNvSpPr/>
+          <p:nvPr/>
+        </p:nvSpPr>
+        <p:spPr>
+          <a:xfrm>
+            <a:off x="1115568" y="3026664"/>
+            <a:ext cx="2313432" cy="347472"/>
+          </a:xfrm>
+          <a:prstGeom prst="rect">
+            <a:avLst/>
+          </a:prstGeom>
+          <a:noFill/>
+          <a:ln/>
+        </p:spPr>
+        <p:txBody>
+          <a:bodyPr wrap="square" lIns="0" tIns="0" rIns="0" bIns="0" rtlCol="0" anchor="ctr"/>
+          <a:lstStyle/>
+          <a:p>
+            <a:pPr algn="l" indent="0" marL="0">
+              <a:buNone/>
+            </a:pPr>
+            <a:r>
+              <a:rPr lang="en-US" sz="950" b="1" dirty="0">
+                <a:solidFill>
+                  <a:srgbClr val="2A1515"/>
+                </a:solidFill>
+                <a:latin typeface="Calibri" pitchFamily="34" charset="0"/>
+                <a:ea typeface="Calibri" pitchFamily="34" charset="-122"/>
+                <a:cs typeface="Calibri" pitchFamily="34" charset="-120"/>
+              </a:rPr>
+              <a:t>AI auto-analyses uploaded image</a:t>
+            </a:r>
+            <a:endParaRPr lang="en-US" sz="950" dirty="0"/>
+          </a:p>
+        </p:txBody>
+      </p:sp>
+      <p:sp>
+        <p:nvSpPr>
+          <p:cNvPr id="35" name="Text 33"/>
+          <p:cNvSpPr/>
+          <p:nvPr/>
+        </p:nvSpPr>
+        <p:spPr>
+          <a:xfrm>
+            <a:off x="3474720" y="3026664"/>
+            <a:ext cx="2651760" cy="347472"/>
+          </a:xfrm>
+          <a:prstGeom prst="rect">
+            <a:avLst/>
+          </a:prstGeom>
+          <a:noFill/>
+          <a:ln/>
+        </p:spPr>
+        <p:txBody>
+          <a:bodyPr wrap="square" lIns="0" tIns="0" rIns="0" bIns="0" rtlCol="0" anchor="ctr"/>
+          <a:lstStyle/>
+          <a:p>
+            <a:pPr algn="l" indent="0" marL="0">
+              <a:buNone/>
+            </a:pPr>
+            <a:r>
+              <a:rPr lang="en-US" sz="900" dirty="0">
+                <a:solidFill>
+                  <a:srgbClr val="444444"/>
+                </a:solidFill>
+                <a:latin typeface="Calibri" pitchFamily="34" charset="0"/>
+                <a:ea typeface="Calibri" pitchFamily="34" charset="-122"/>
+                <a:cs typeface="Calibri" pitchFamily="34" charset="-120"/>
+              </a:rPr>
+              <a:t>Submit report with photo → Wait → Refresh report</a:t>
+            </a:r>
+            <a:endParaRPr lang="en-US" sz="900" dirty="0"/>
+          </a:p>
+        </p:txBody>
+      </p:sp>
+      <p:sp>
+        <p:nvSpPr>
+          <p:cNvPr id="36" name="Text 34"/>
+          <p:cNvSpPr/>
+          <p:nvPr/>
+        </p:nvSpPr>
+        <p:spPr>
+          <a:xfrm>
+            <a:off x="6172200" y="3026664"/>
+            <a:ext cx="1508760" cy="347472"/>
+          </a:xfrm>
+          <a:prstGeom prst="rect">
+            <a:avLst/>
+          </a:prstGeom>
+          <a:noFill/>
+          <a:ln/>
+        </p:spPr>
+        <p:txBody>
+          <a:bodyPr wrap="square" lIns="0" tIns="0" rIns="0" bIns="0" rtlCol="0" anchor="ctr"/>
+          <a:lstStyle/>
+          <a:p>
+            <a:pPr algn="l" indent="0" marL="0">
+              <a:buNone/>
+            </a:pPr>
+            <a:r>
+              <a:rPr lang="en-US" sz="900" dirty="0">
+                <a:solidFill>
+                  <a:srgbClr val="444444"/>
+                </a:solidFill>
+                <a:latin typeface="Calibri" pitchFamily="34" charset="0"/>
+                <a:ea typeface="Calibri" pitchFamily="34" charset="-122"/>
+                <a:cs typeface="Calibri" pitchFamily="34" charset="-120"/>
+              </a:rPr>
+              <a:t>Severity &amp; summary populated</a:t>
+            </a:r>
+            <a:endParaRPr lang="en-US" sz="900" dirty="0"/>
+          </a:p>
+        </p:txBody>
+      </p:sp>
+      <p:sp>
+        <p:nvSpPr>
+          <p:cNvPr id="37" name="Text 35"/>
+          <p:cNvSpPr/>
+          <p:nvPr/>
+        </p:nvSpPr>
+        <p:spPr>
+          <a:xfrm>
+            <a:off x="7680960" y="3026664"/>
+            <a:ext cx="822960" cy="347472"/>
+          </a:xfrm>
+          <a:prstGeom prst="rect">
+            <a:avLst/>
+          </a:prstGeom>
+          <a:noFill/>
+          <a:ln/>
+        </p:spPr>
+        <p:txBody>
+          <a:bodyPr wrap="square" lIns="0" tIns="0" rIns="0" bIns="0" rtlCol="0" anchor="ctr"/>
+          <a:lstStyle/>
+          <a:p>
+            <a:pPr algn="ctr" indent="0" marL="0">
+              <a:buNone/>
+            </a:pPr>
+            <a:r>
+              <a:rPr lang="en-US" sz="1050" b="1" dirty="0">
+                <a:solidFill>
+                  <a:srgbClr val="1A7A1A"/>
+                </a:solidFill>
+                <a:latin typeface="Calibri" pitchFamily="34" charset="0"/>
+                <a:ea typeface="Calibri" pitchFamily="34" charset="-122"/>
+                <a:cs typeface="Calibri" pitchFamily="34" charset="-120"/>
+              </a:rPr>
+              <a:t>✔ Pass</a:t>
+            </a:r>
+            <a:endParaRPr lang="en-US" sz="1050" dirty="0"/>
+          </a:p>
+        </p:txBody>
+      </p:sp>
+      <p:sp>
+        <p:nvSpPr>
+          <p:cNvPr id="38" name="Shape 36"/>
+          <p:cNvSpPr/>
+          <p:nvPr/>
+        </p:nvSpPr>
+        <p:spPr>
+          <a:xfrm>
+            <a:off x="457200" y="3438144"/>
+            <a:ext cx="8229600" cy="457200"/>
+          </a:xfrm>
+          <a:prstGeom prst="rect">
+            <a:avLst/>
+          </a:prstGeom>
+          <a:solidFill>
+            <a:srgbClr val="FAFAFA"/>
+          </a:solidFill>
+          <a:ln w="3810">
+            <a:solidFill>
+              <a:srgbClr val="E8E8E8"/>
+            </a:solidFill>
+            <a:prstDash val="solid"/>
+          </a:ln>
+        </p:spPr>
+      </p:sp>
+      <p:sp>
+        <p:nvSpPr>
+          <p:cNvPr id="39" name="Shape 37"/>
+          <p:cNvSpPr/>
+          <p:nvPr/>
+        </p:nvSpPr>
+        <p:spPr>
+          <a:xfrm>
+            <a:off x="502920" y="3538728"/>
+            <a:ext cx="566928" cy="237744"/>
+          </a:xfrm>
+          <a:prstGeom prst="roundRect">
+            <a:avLst>
+              <a:gd name="adj" fmla="val 15385"/>
+            </a:avLst>
+          </a:prstGeom>
+          <a:solidFill>
+            <a:srgbClr val="341515"/>
+          </a:solidFill>
+          <a:ln w="12700">
+            <a:solidFill>
+              <a:srgbClr val="341515"/>
+            </a:solidFill>
+            <a:prstDash val="solid"/>
+          </a:ln>
+        </p:spPr>
+      </p:sp>
+      <p:sp>
+        <p:nvSpPr>
+          <p:cNvPr id="40" name="Text 38"/>
+          <p:cNvSpPr/>
+          <p:nvPr/>
+        </p:nvSpPr>
+        <p:spPr>
+          <a:xfrm>
+            <a:off x="502920" y="3538728"/>
+            <a:ext cx="566928" cy="237744"/>
+          </a:xfrm>
+          <a:prstGeom prst="rect">
+            <a:avLst/>
+          </a:prstGeom>
+          <a:noFill/>
+          <a:ln/>
+        </p:spPr>
+        <p:txBody>
+          <a:bodyPr wrap="square" lIns="0" tIns="0" rIns="0" bIns="0" rtlCol="0" anchor="ctr"/>
+          <a:lstStyle/>
+          <a:p>
+            <a:pPr algn="ctr" indent="0" marL="0">
+              <a:buNone/>
+            </a:pPr>
+            <a:r>
+              <a:rPr lang="en-US" sz="700" b="1" dirty="0">
+                <a:solidFill>
+                  <a:srgbClr val="FFFFFF"/>
+                </a:solidFill>
+                <a:latin typeface="Calibri" pitchFamily="34" charset="0"/>
+                <a:ea typeface="Calibri" pitchFamily="34" charset="-122"/>
+                <a:cs typeface="Calibri" pitchFamily="34" charset="-120"/>
+              </a:rPr>
+              <a:t>UAT-05</a:t>
+            </a:r>
+            <a:endParaRPr lang="en-US" sz="700" dirty="0"/>
+          </a:p>
+        </p:txBody>
+      </p:sp>
+      <p:sp>
+        <p:nvSpPr>
+          <p:cNvPr id="41" name="Text 39"/>
+          <p:cNvSpPr/>
+          <p:nvPr/>
+        </p:nvSpPr>
+        <p:spPr>
+          <a:xfrm>
+            <a:off x="1115568" y="3493008"/>
+            <a:ext cx="2313432" cy="347472"/>
+          </a:xfrm>
+          <a:prstGeom prst="rect">
+            <a:avLst/>
+          </a:prstGeom>
+          <a:noFill/>
+          <a:ln/>
+        </p:spPr>
+        <p:txBody>
+          <a:bodyPr wrap="square" lIns="0" tIns="0" rIns="0" bIns="0" rtlCol="0" anchor="ctr"/>
+          <a:lstStyle/>
+          <a:p>
+            <a:pPr algn="l" indent="0" marL="0">
+              <a:buNone/>
+            </a:pPr>
+            <a:r>
+              <a:rPr lang="en-US" sz="950" b="1" dirty="0">
+                <a:solidFill>
+                  <a:srgbClr val="2A1515"/>
+                </a:solidFill>
+                <a:latin typeface="Calibri" pitchFamily="34" charset="0"/>
+                <a:ea typeface="Calibri" pitchFamily="34" charset="-122"/>
+                <a:cs typeface="Calibri" pitchFamily="34" charset="-120"/>
+              </a:rPr>
+              <a:t>Admin rejects a fake report</a:t>
+            </a:r>
+            <a:endParaRPr lang="en-US" sz="950" dirty="0"/>
+          </a:p>
+        </p:txBody>
+      </p:sp>
+      <p:sp>
+        <p:nvSpPr>
+          <p:cNvPr id="42" name="Text 40"/>
+          <p:cNvSpPr/>
+          <p:nvPr/>
+        </p:nvSpPr>
+        <p:spPr>
+          <a:xfrm>
+            <a:off x="3474720" y="3493008"/>
+            <a:ext cx="2651760" cy="347472"/>
+          </a:xfrm>
+          <a:prstGeom prst="rect">
+            <a:avLst/>
+          </a:prstGeom>
+          <a:noFill/>
+          <a:ln/>
+        </p:spPr>
+        <p:txBody>
+          <a:bodyPr wrap="square" lIns="0" tIns="0" rIns="0" bIns="0" rtlCol="0" anchor="ctr"/>
+          <a:lstStyle/>
+          <a:p>
+            <a:pPr algn="l" indent="0" marL="0">
+              <a:buNone/>
+            </a:pPr>
+            <a:r>
+              <a:rPr lang="en-US" sz="900" dirty="0">
+                <a:solidFill>
+                  <a:srgbClr val="444444"/>
+                </a:solidFill>
+                <a:latin typeface="Calibri" pitchFamily="34" charset="0"/>
+                <a:ea typeface="Calibri" pitchFamily="34" charset="-122"/>
+                <a:cs typeface="Calibri" pitchFamily="34" charset="-120"/>
+              </a:rPr>
+              <a:t>Admin login → Open report → Click Reject → Confirm</a:t>
+            </a:r>
+            <a:endParaRPr lang="en-US" sz="900" dirty="0"/>
+          </a:p>
+        </p:txBody>
+      </p:sp>
+      <p:sp>
+        <p:nvSpPr>
+          <p:cNvPr id="43" name="Text 41"/>
+          <p:cNvSpPr/>
+          <p:nvPr/>
+        </p:nvSpPr>
+        <p:spPr>
+          <a:xfrm>
+            <a:off x="6172200" y="3493008"/>
+            <a:ext cx="1508760" cy="347472"/>
+          </a:xfrm>
+          <a:prstGeom prst="rect">
+            <a:avLst/>
+          </a:prstGeom>
+          <a:noFill/>
+          <a:ln/>
+        </p:spPr>
+        <p:txBody>
+          <a:bodyPr wrap="square" lIns="0" tIns="0" rIns="0" bIns="0" rtlCol="0" anchor="ctr"/>
+          <a:lstStyle/>
+          <a:p>
+            <a:pPr algn="l" indent="0" marL="0">
+              <a:buNone/>
+            </a:pPr>
+            <a:r>
+              <a:rPr lang="en-US" sz="900" dirty="0">
+                <a:solidFill>
+                  <a:srgbClr val="444444"/>
+                </a:solidFill>
+                <a:latin typeface="Calibri" pitchFamily="34" charset="0"/>
+                <a:ea typeface="Calibri" pitchFamily="34" charset="-122"/>
+                <a:cs typeface="Calibri" pitchFamily="34" charset="-120"/>
+              </a:rPr>
+              <a:t>Report flagged 'False Alarm'</a:t>
+            </a:r>
+            <a:endParaRPr lang="en-US" sz="900" dirty="0"/>
+          </a:p>
+        </p:txBody>
+      </p:sp>
+      <p:sp>
+        <p:nvSpPr>
+          <p:cNvPr id="44" name="Text 42"/>
+          <p:cNvSpPr/>
+          <p:nvPr/>
+        </p:nvSpPr>
+        <p:spPr>
+          <a:xfrm>
+            <a:off x="7680960" y="3493008"/>
+            <a:ext cx="822960" cy="347472"/>
+          </a:xfrm>
+          <a:prstGeom prst="rect">
+            <a:avLst/>
+          </a:prstGeom>
+          <a:noFill/>
+          <a:ln/>
+        </p:spPr>
+        <p:txBody>
+          <a:bodyPr wrap="square" lIns="0" tIns="0" rIns="0" bIns="0" rtlCol="0" anchor="ctr"/>
+          <a:lstStyle/>
+          <a:p>
+            <a:pPr algn="ctr" indent="0" marL="0">
+              <a:buNone/>
+            </a:pPr>
+            <a:r>
+              <a:rPr lang="en-US" sz="1050" b="1" dirty="0">
+                <a:solidFill>
+                  <a:srgbClr val="1A7A1A"/>
+                </a:solidFill>
+                <a:latin typeface="Calibri" pitchFamily="34" charset="0"/>
+                <a:ea typeface="Calibri" pitchFamily="34" charset="-122"/>
+                <a:cs typeface="Calibri" pitchFamily="34" charset="-120"/>
+              </a:rPr>
+              <a:t>✔ Pass</a:t>
+            </a:r>
+            <a:endParaRPr lang="en-US" sz="1050" dirty="0"/>
+          </a:p>
+        </p:txBody>
+      </p:sp>
+      <p:sp>
+        <p:nvSpPr>
+          <p:cNvPr id="45" name="Shape 43"/>
+          <p:cNvSpPr/>
+          <p:nvPr/>
+        </p:nvSpPr>
+        <p:spPr>
+          <a:xfrm>
+            <a:off x="457200" y="3904488"/>
+            <a:ext cx="8229600" cy="457200"/>
+          </a:xfrm>
+          <a:prstGeom prst="rect">
+            <a:avLst/>
+          </a:prstGeom>
+          <a:solidFill>
+            <a:srgbClr val="FFFFFF"/>
+          </a:solidFill>
+          <a:ln w="3810">
+            <a:solidFill>
+              <a:srgbClr val="E8E8E8"/>
+            </a:solidFill>
+            <a:prstDash val="solid"/>
+          </a:ln>
+        </p:spPr>
+      </p:sp>
+      <p:sp>
+        <p:nvSpPr>
+          <p:cNvPr id="46" name="Shape 44"/>
+          <p:cNvSpPr/>
+          <p:nvPr/>
+        </p:nvSpPr>
+        <p:spPr>
+          <a:xfrm>
+            <a:off x="502920" y="4005072"/>
+            <a:ext cx="566928" cy="237744"/>
+          </a:xfrm>
+          <a:prstGeom prst="roundRect">
+            <a:avLst>
+              <a:gd name="adj" fmla="val 15385"/>
+            </a:avLst>
+          </a:prstGeom>
+          <a:solidFill>
+            <a:srgbClr val="341515"/>
+          </a:solidFill>
+          <a:ln w="12700">
+            <a:solidFill>
+              <a:srgbClr val="341515"/>
+            </a:solidFill>
+            <a:prstDash val="solid"/>
+          </a:ln>
+        </p:spPr>
+      </p:sp>
+      <p:sp>
+        <p:nvSpPr>
+          <p:cNvPr id="47" name="Text 45"/>
+          <p:cNvSpPr/>
+          <p:nvPr/>
+        </p:nvSpPr>
+        <p:spPr>
+          <a:xfrm>
+            <a:off x="502920" y="4005072"/>
+            <a:ext cx="566928" cy="237744"/>
+          </a:xfrm>
+          <a:prstGeom prst="rect">
+            <a:avLst/>
+          </a:prstGeom>
+          <a:noFill/>
+          <a:ln/>
+        </p:spPr>
+        <p:txBody>
+          <a:bodyPr wrap="square" lIns="0" tIns="0" rIns="0" bIns="0" rtlCol="0" anchor="ctr"/>
+          <a:lstStyle/>
+          <a:p>
+            <a:pPr algn="ctr" indent="0" marL="0">
+              <a:buNone/>
+            </a:pPr>
+            <a:r>
+              <a:rPr lang="en-US" sz="700" b="1" dirty="0">
+                <a:solidFill>
+                  <a:srgbClr val="FFFFFF"/>
+                </a:solidFill>
+                <a:latin typeface="Calibri" pitchFamily="34" charset="0"/>
+                <a:ea typeface="Calibri" pitchFamily="34" charset="-122"/>
+                <a:cs typeface="Calibri" pitchFamily="34" charset="-120"/>
+              </a:rPr>
+              <a:t>UAT-06</a:t>
+            </a:r>
+            <a:endParaRPr lang="en-US" sz="700" dirty="0"/>
+          </a:p>
+        </p:txBody>
+      </p:sp>
+      <p:sp>
+        <p:nvSpPr>
+          <p:cNvPr id="48" name="Text 46"/>
+          <p:cNvSpPr/>
+          <p:nvPr/>
+        </p:nvSpPr>
+        <p:spPr>
+          <a:xfrm>
+            <a:off x="1115568" y="3959352"/>
+            <a:ext cx="2313432" cy="347472"/>
+          </a:xfrm>
+          <a:prstGeom prst="rect">
+            <a:avLst/>
+          </a:prstGeom>
+          <a:noFill/>
+          <a:ln/>
+        </p:spPr>
+        <p:txBody>
+          <a:bodyPr wrap="square" lIns="0" tIns="0" rIns="0" bIns="0" rtlCol="0" anchor="ctr"/>
+          <a:lstStyle/>
+          <a:p>
+            <a:pPr algn="l" indent="0" marL="0">
+              <a:buNone/>
+            </a:pPr>
+            <a:r>
+              <a:rPr lang="en-US" sz="950" b="1" dirty="0">
+                <a:solidFill>
+                  <a:srgbClr val="2A1515"/>
+                </a:solidFill>
+                <a:latin typeface="Calibri" pitchFamily="34" charset="0"/>
+                <a:ea typeface="Calibri" pitchFamily="34" charset="-122"/>
+                <a:cs typeface="Calibri" pitchFamily="34" charset="-120"/>
+              </a:rPr>
+              <a:t>Unauthenticated API call is blocked</a:t>
+            </a:r>
+            <a:endParaRPr lang="en-US" sz="950" dirty="0"/>
+          </a:p>
+        </p:txBody>
+      </p:sp>
+      <p:sp>
+        <p:nvSpPr>
+          <p:cNvPr id="49" name="Text 47"/>
+          <p:cNvSpPr/>
+          <p:nvPr/>
+        </p:nvSpPr>
+        <p:spPr>
+          <a:xfrm>
+            <a:off x="3474720" y="3959352"/>
+            <a:ext cx="2651760" cy="347472"/>
+          </a:xfrm>
+          <a:prstGeom prst="rect">
+            <a:avLst/>
+          </a:prstGeom>
+          <a:noFill/>
+          <a:ln/>
+        </p:spPr>
+        <p:txBody>
+          <a:bodyPr wrap="square" lIns="0" tIns="0" rIns="0" bIns="0" rtlCol="0" anchor="ctr"/>
+          <a:lstStyle/>
+          <a:p>
+            <a:pPr algn="l" indent="0" marL="0">
+              <a:buNone/>
+            </a:pPr>
+            <a:r>
+              <a:rPr lang="en-US" sz="900" dirty="0">
+                <a:solidFill>
+                  <a:srgbClr val="444444"/>
+                </a:solidFill>
+                <a:latin typeface="Calibri" pitchFamily="34" charset="0"/>
+                <a:ea typeface="Calibri" pitchFamily="34" charset="-122"/>
+                <a:cs typeface="Calibri" pitchFamily="34" charset="-120"/>
+              </a:rPr>
+              <a:t>POST /api/reports without Firebase token</a:t>
+            </a:r>
+            <a:endParaRPr lang="en-US" sz="900" dirty="0"/>
+          </a:p>
+        </p:txBody>
+      </p:sp>
+      <p:sp>
+        <p:nvSpPr>
+          <p:cNvPr id="50" name="Text 48"/>
+          <p:cNvSpPr/>
+          <p:nvPr/>
+        </p:nvSpPr>
+        <p:spPr>
+          <a:xfrm>
+            <a:off x="6172200" y="3959352"/>
+            <a:ext cx="1508760" cy="347472"/>
+          </a:xfrm>
+          <a:prstGeom prst="rect">
+            <a:avLst/>
+          </a:prstGeom>
+          <a:noFill/>
+          <a:ln/>
+        </p:spPr>
+        <p:txBody>
+          <a:bodyPr wrap="square" lIns="0" tIns="0" rIns="0" bIns="0" rtlCol="0" anchor="ctr"/>
+          <a:lstStyle/>
+          <a:p>
+            <a:pPr algn="l" indent="0" marL="0">
+              <a:buNone/>
+            </a:pPr>
+            <a:r>
+              <a:rPr lang="en-US" sz="900" dirty="0">
+                <a:solidFill>
+                  <a:srgbClr val="444444"/>
+                </a:solidFill>
+                <a:latin typeface="Calibri" pitchFamily="34" charset="0"/>
+                <a:ea typeface="Calibri" pitchFamily="34" charset="-122"/>
+                <a:cs typeface="Calibri" pitchFamily="34" charset="-120"/>
+              </a:rPr>
+              <a:t>401 Unauthorized returned</a:t>
+            </a:r>
+            <a:endParaRPr lang="en-US" sz="900" dirty="0"/>
+          </a:p>
+        </p:txBody>
+      </p:sp>
+      <p:sp>
+        <p:nvSpPr>
+          <p:cNvPr id="51" name="Text 49"/>
+          <p:cNvSpPr/>
+          <p:nvPr/>
+        </p:nvSpPr>
+        <p:spPr>
+          <a:xfrm>
+            <a:off x="7680960" y="3959352"/>
+            <a:ext cx="822960" cy="347472"/>
+          </a:xfrm>
+          <a:prstGeom prst="rect">
+            <a:avLst/>
+          </a:prstGeom>
+          <a:noFill/>
+          <a:ln/>
+        </p:spPr>
+        <p:txBody>
+          <a:bodyPr wrap="square" lIns="0" tIns="0" rIns="0" bIns="0" rtlCol="0" anchor="ctr"/>
+          <a:lstStyle/>
+          <a:p>
+            <a:pPr algn="ctr" indent="0" marL="0">
+              <a:buNone/>
+            </a:pPr>
+            <a:r>
+              <a:rPr lang="en-US" sz="1050" b="1" dirty="0">
+                <a:solidFill>
+                  <a:srgbClr val="1A7A1A"/>
+                </a:solidFill>
+                <a:latin typeface="Calibri" pitchFamily="34" charset="0"/>
+                <a:ea typeface="Calibri" pitchFamily="34" charset="-122"/>
+                <a:cs typeface="Calibri" pitchFamily="34" charset="-120"/>
+              </a:rPr>
+              <a:t>✔ Pass</a:t>
+            </a:r>
+            <a:endParaRPr lang="en-US" sz="1050" dirty="0"/>
+          </a:p>
+        </p:txBody>
+      </p:sp>
+      <p:sp>
+        <p:nvSpPr>
+          <p:cNvPr id="52" name="Shape 50"/>
+          <p:cNvSpPr/>
+          <p:nvPr/>
+        </p:nvSpPr>
+        <p:spPr>
+          <a:xfrm>
+            <a:off x="457200" y="4462272"/>
+            <a:ext cx="8229600" cy="420624"/>
+          </a:xfrm>
+          <a:prstGeom prst="roundRect">
+            <a:avLst>
+              <a:gd name="adj" fmla="val 17391"/>
+            </a:avLst>
+          </a:prstGeom>
+          <a:solidFill>
+            <a:srgbClr val="F0ECE6"/>
+          </a:solidFill>
+          <a:ln w="6350">
+            <a:solidFill>
+              <a:srgbClr val="C4B9AC"/>
+            </a:solidFill>
+            <a:prstDash val="solid"/>
+          </a:ln>
+          <a:effectLst>
+            <a:outerShdw sx="100000" sy="100000" kx="0" ky="0" algn="bl" rotWithShape="0" blurRad="88900" dist="25400" dir="2700000">
+              <a:srgbClr val="000000">
+                <a:alpha val="10000"/>
+              </a:srgbClr>
+            </a:outerShdw>
+          </a:effectLst>
+        </p:spPr>
+      </p:sp>
+      <p:sp>
+        <p:nvSpPr>
+          <p:cNvPr id="53" name="Text 51"/>
+          <p:cNvSpPr/>
+          <p:nvPr/>
+        </p:nvSpPr>
+        <p:spPr>
+          <a:xfrm>
+            <a:off x="594360" y="4526280"/>
+            <a:ext cx="7955280" cy="292608"/>
+          </a:xfrm>
+          <a:prstGeom prst="rect">
+            <a:avLst/>
+          </a:prstGeom>
+          <a:noFill/>
+          <a:ln/>
+        </p:spPr>
+        <p:txBody>
+          <a:bodyPr wrap="square" lIns="0" tIns="0" rIns="0" bIns="0" rtlCol="0" anchor="ctr"/>
+          <a:lstStyle/>
+          <a:p>
+            <a:pPr algn="ctr" indent="0" marL="0">
+              <a:buNone/>
+            </a:pPr>
+            <a:r>
+              <a:rPr lang="en-US" sz="1100" dirty="0">
+                <a:solidFill>
+                  <a:srgbClr val="2A1515"/>
+                </a:solidFill>
+                <a:latin typeface="Calibri" pitchFamily="34" charset="0"/>
+                <a:ea typeface="Calibri" pitchFamily="34" charset="-122"/>
+                <a:cs typeface="Calibri" pitchFamily="34" charset="-120"/>
+              </a:rPr>
+              <a:t>All 6 UAT scenarios passed  ·  Tested on: Flutter mobile app (Android) &amp; React web dashboard</a:t>
+            </a:r>
+            <a:endParaRPr lang="en-US" sz="1100" dirty="0"/>
           </a:p>
         </p:txBody>
       </p:sp>
@@ -3043,7 +7364,6 @@
         <a:solidFill>
           <a:srgbClr val="FFFFFF"/>
         </a:solidFill>
-        <a:effectLst/>
       </p:bgPr>
     </p:bg>
     <p:spTree>
@@ -3081,7 +7401,7 @@
           <a:bodyPr wrap="square" lIns="0" tIns="0" rIns="0" bIns="0" rtlCol="0" anchor="ctr"/>
           <a:lstStyle/>
           <a:p>
-            <a:pPr marL="0" indent="0" algn="l">
+            <a:pPr algn="l" indent="0" marL="0">
               <a:buNone/>
             </a:pPr>
             <a:r>
@@ -3125,20 +7445,13 @@
             <a:prstDash val="solid"/>
           </a:ln>
           <a:effectLst>
-            <a:outerShdw blurRad="88900" dist="25400" dir="2700000" algn="bl" rotWithShape="0">
+            <a:outerShdw sx="100000" sy="100000" kx="0" ky="0" algn="bl" rotWithShape="0" blurRad="88900" dist="25400" dir="2700000">
               <a:srgbClr val="000000">
                 <a:alpha val="10000"/>
               </a:srgbClr>
             </a:outerShdw>
           </a:effectLst>
         </p:spPr>
-        <p:txBody>
-          <a:bodyPr/>
-          <a:lstStyle/>
-          <a:p>
-            <a:endParaRPr lang="en-US"/>
-          </a:p>
-        </p:txBody>
       </p:sp>
       <p:sp>
         <p:nvSpPr>
@@ -3164,13 +7477,6 @@
             <a:prstDash val="solid"/>
           </a:ln>
         </p:spPr>
-        <p:txBody>
-          <a:bodyPr/>
-          <a:lstStyle/>
-          <a:p>
-            <a:endParaRPr lang="en-US"/>
-          </a:p>
-        </p:txBody>
       </p:sp>
       <p:sp>
         <p:nvSpPr>
@@ -3193,7 +7499,7 @@
           <a:bodyPr wrap="square" lIns="0" tIns="0" rIns="0" bIns="0" rtlCol="0" anchor="ctr"/>
           <a:lstStyle/>
           <a:p>
-            <a:pPr marL="0" indent="0" algn="ctr">
+            <a:pPr algn="ctr" indent="0" marL="0">
               <a:buNone/>
             </a:pPr>
             <a:r>
@@ -3232,7 +7538,7 @@
           <a:bodyPr wrap="square" lIns="0" tIns="0" rIns="0" bIns="0" rtlCol="0" anchor="t"/>
           <a:lstStyle/>
           <a:p>
-            <a:pPr marL="0" indent="0" algn="l">
+            <a:pPr algn="l" indent="0" marL="0">
               <a:buNone/>
             </a:pPr>
             <a:r>
@@ -3276,20 +7582,13 @@
             <a:prstDash val="solid"/>
           </a:ln>
           <a:effectLst>
-            <a:outerShdw blurRad="88900" dist="25400" dir="2700000" algn="bl" rotWithShape="0">
+            <a:outerShdw sx="100000" sy="100000" kx="0" ky="0" algn="bl" rotWithShape="0" blurRad="88900" dist="25400" dir="2700000">
               <a:srgbClr val="000000">
                 <a:alpha val="10000"/>
               </a:srgbClr>
             </a:outerShdw>
           </a:effectLst>
         </p:spPr>
-        <p:txBody>
-          <a:bodyPr/>
-          <a:lstStyle/>
-          <a:p>
-            <a:endParaRPr lang="en-US"/>
-          </a:p>
-        </p:txBody>
       </p:sp>
       <p:sp>
         <p:nvSpPr>
@@ -3315,13 +7614,6 @@
             <a:prstDash val="solid"/>
           </a:ln>
         </p:spPr>
-        <p:txBody>
-          <a:bodyPr/>
-          <a:lstStyle/>
-          <a:p>
-            <a:endParaRPr lang="en-US"/>
-          </a:p>
-        </p:txBody>
       </p:sp>
       <p:sp>
         <p:nvSpPr>
@@ -3344,7 +7636,7 @@
           <a:bodyPr wrap="square" lIns="0" tIns="0" rIns="0" bIns="0" rtlCol="0" anchor="ctr"/>
           <a:lstStyle/>
           <a:p>
-            <a:pPr marL="0" indent="0" algn="ctr">
+            <a:pPr algn="ctr" indent="0" marL="0">
               <a:buNone/>
             </a:pPr>
             <a:r>
@@ -3383,7 +7675,7 @@
           <a:bodyPr wrap="square" lIns="0" tIns="0" rIns="0" bIns="0" rtlCol="0" anchor="t"/>
           <a:lstStyle/>
           <a:p>
-            <a:pPr marL="0" indent="0" algn="l">
+            <a:pPr algn="l" indent="0" marL="0">
               <a:buNone/>
             </a:pPr>
             <a:r>
@@ -3427,20 +7719,13 @@
             <a:prstDash val="solid"/>
           </a:ln>
           <a:effectLst>
-            <a:outerShdw blurRad="88900" dist="25400" dir="2700000" algn="bl" rotWithShape="0">
+            <a:outerShdw sx="100000" sy="100000" kx="0" ky="0" algn="bl" rotWithShape="0" blurRad="88900" dist="25400" dir="2700000">
               <a:srgbClr val="000000">
                 <a:alpha val="10000"/>
               </a:srgbClr>
             </a:outerShdw>
           </a:effectLst>
         </p:spPr>
-        <p:txBody>
-          <a:bodyPr/>
-          <a:lstStyle/>
-          <a:p>
-            <a:endParaRPr lang="en-US"/>
-          </a:p>
-        </p:txBody>
       </p:sp>
       <p:sp>
         <p:nvSpPr>
@@ -3466,13 +7751,6 @@
             <a:prstDash val="solid"/>
           </a:ln>
         </p:spPr>
-        <p:txBody>
-          <a:bodyPr/>
-          <a:lstStyle/>
-          <a:p>
-            <a:endParaRPr lang="en-US"/>
-          </a:p>
-        </p:txBody>
       </p:sp>
       <p:sp>
         <p:nvSpPr>
@@ -3495,7 +7773,7 @@
           <a:bodyPr wrap="square" lIns="0" tIns="0" rIns="0" bIns="0" rtlCol="0" anchor="ctr"/>
           <a:lstStyle/>
           <a:p>
-            <a:pPr marL="0" indent="0" algn="ctr">
+            <a:pPr algn="ctr" indent="0" marL="0">
               <a:buNone/>
             </a:pPr>
             <a:r>
@@ -3534,7 +7812,7 @@
           <a:bodyPr wrap="square" lIns="0" tIns="0" rIns="0" bIns="0" rtlCol="0" anchor="t"/>
           <a:lstStyle/>
           <a:p>
-            <a:pPr marL="0" indent="0" algn="l">
+            <a:pPr algn="l" indent="0" marL="0">
               <a:buNone/>
             </a:pPr>
             <a:r>
@@ -3568,7 +7846,6 @@
         <a:solidFill>
           <a:srgbClr val="FFFFFF"/>
         </a:solidFill>
-        <a:effectLst/>
       </p:bgPr>
     </p:bg>
     <p:spTree>
@@ -3606,7 +7883,7 @@
           <a:bodyPr wrap="square" lIns="0" tIns="0" rIns="0" bIns="0" rtlCol="0" anchor="ctr"/>
           <a:lstStyle/>
           <a:p>
-            <a:pPr marL="0" indent="0" algn="l">
+            <a:pPr algn="l" indent="0" marL="0">
               <a:buNone/>
             </a:pPr>
             <a:r>
@@ -3650,20 +7927,13 @@
             <a:prstDash val="solid"/>
           </a:ln>
           <a:effectLst>
-            <a:outerShdw blurRad="88900" dist="25400" dir="2700000" algn="bl" rotWithShape="0">
+            <a:outerShdw sx="100000" sy="100000" kx="0" ky="0" algn="bl" rotWithShape="0" blurRad="88900" dist="25400" dir="2700000">
               <a:srgbClr val="000000">
                 <a:alpha val="10000"/>
               </a:srgbClr>
             </a:outerShdw>
           </a:effectLst>
         </p:spPr>
-        <p:txBody>
-          <a:bodyPr/>
-          <a:lstStyle/>
-          <a:p>
-            <a:endParaRPr lang="en-US"/>
-          </a:p>
-        </p:txBody>
       </p:sp>
       <p:sp>
         <p:nvSpPr>
@@ -3686,7 +7956,7 @@
           <a:bodyPr wrap="square" lIns="0" tIns="0" rIns="0" bIns="0" rtlCol="0" anchor="ctr"/>
           <a:lstStyle/>
           <a:p>
-            <a:pPr marL="0" indent="0" algn="l">
+            <a:pPr algn="l" indent="0" marL="0">
               <a:buNone/>
             </a:pPr>
             <a:r>
@@ -3725,7 +7995,7 @@
           <a:bodyPr wrap="square" lIns="0" tIns="0" rIns="0" bIns="0" rtlCol="0" anchor="ctr"/>
           <a:lstStyle/>
           <a:p>
-            <a:pPr marL="0" indent="0" algn="l">
+            <a:pPr algn="l" indent="0" marL="0">
               <a:buNone/>
             </a:pPr>
             <a:r>
@@ -3764,7 +8034,7 @@
           <a:bodyPr wrap="square" lIns="0" tIns="0" rIns="0" bIns="0" rtlCol="0" anchor="t"/>
           <a:lstStyle/>
           <a:p>
-            <a:pPr marL="0" indent="0" algn="l">
+            <a:pPr algn="l" indent="0" marL="0">
               <a:buNone/>
             </a:pPr>
             <a:r>
@@ -3808,20 +8078,13 @@
             <a:prstDash val="solid"/>
           </a:ln>
           <a:effectLst>
-            <a:outerShdw blurRad="88900" dist="25400" dir="2700000" algn="bl" rotWithShape="0">
+            <a:outerShdw sx="100000" sy="100000" kx="0" ky="0" algn="bl" rotWithShape="0" blurRad="88900" dist="25400" dir="2700000">
               <a:srgbClr val="000000">
                 <a:alpha val="10000"/>
               </a:srgbClr>
             </a:outerShdw>
           </a:effectLst>
         </p:spPr>
-        <p:txBody>
-          <a:bodyPr/>
-          <a:lstStyle/>
-          <a:p>
-            <a:endParaRPr lang="en-US"/>
-          </a:p>
-        </p:txBody>
       </p:sp>
       <p:sp>
         <p:nvSpPr>
@@ -3844,7 +8107,7 @@
           <a:bodyPr wrap="square" lIns="0" tIns="0" rIns="0" bIns="0" rtlCol="0" anchor="ctr"/>
           <a:lstStyle/>
           <a:p>
-            <a:pPr marL="0" indent="0" algn="l">
+            <a:pPr algn="l" indent="0" marL="0">
               <a:buNone/>
             </a:pPr>
             <a:r>
@@ -3883,7 +8146,7 @@
           <a:bodyPr wrap="square" lIns="0" tIns="0" rIns="0" bIns="0" rtlCol="0" anchor="ctr"/>
           <a:lstStyle/>
           <a:p>
-            <a:pPr marL="0" indent="0" algn="l">
+            <a:pPr algn="l" indent="0" marL="0">
               <a:buNone/>
             </a:pPr>
             <a:r>
@@ -3922,7 +8185,7 @@
           <a:bodyPr wrap="square" lIns="0" tIns="0" rIns="0" bIns="0" rtlCol="0" anchor="t"/>
           <a:lstStyle/>
           <a:p>
-            <a:pPr marL="0" indent="0" algn="l">
+            <a:pPr algn="l" indent="0" marL="0">
               <a:buNone/>
             </a:pPr>
             <a:r>
@@ -3966,20 +8229,13 @@
             <a:prstDash val="solid"/>
           </a:ln>
           <a:effectLst>
-            <a:outerShdw blurRad="88900" dist="25400" dir="2700000" algn="bl" rotWithShape="0">
+            <a:outerShdw sx="100000" sy="100000" kx="0" ky="0" algn="bl" rotWithShape="0" blurRad="88900" dist="25400" dir="2700000">
               <a:srgbClr val="000000">
                 <a:alpha val="10000"/>
               </a:srgbClr>
             </a:outerShdw>
           </a:effectLst>
         </p:spPr>
-        <p:txBody>
-          <a:bodyPr/>
-          <a:lstStyle/>
-          <a:p>
-            <a:endParaRPr lang="en-US"/>
-          </a:p>
-        </p:txBody>
       </p:sp>
       <p:sp>
         <p:nvSpPr>
@@ -4002,7 +8258,7 @@
           <a:bodyPr wrap="square" lIns="0" tIns="0" rIns="0" bIns="0" rtlCol="0" anchor="ctr"/>
           <a:lstStyle/>
           <a:p>
-            <a:pPr marL="0" indent="0" algn="l">
+            <a:pPr algn="l" indent="0" marL="0">
               <a:buNone/>
             </a:pPr>
             <a:r>
@@ -4041,7 +8297,7 @@
           <a:bodyPr wrap="square" lIns="0" tIns="0" rIns="0" bIns="0" rtlCol="0" anchor="ctr"/>
           <a:lstStyle/>
           <a:p>
-            <a:pPr marL="0" indent="0" algn="l">
+            <a:pPr algn="l" indent="0" marL="0">
               <a:buNone/>
             </a:pPr>
             <a:r>
@@ -4080,7 +8336,7 @@
           <a:bodyPr wrap="square" lIns="0" tIns="0" rIns="0" bIns="0" rtlCol="0" anchor="t"/>
           <a:lstStyle/>
           <a:p>
-            <a:pPr marL="0" indent="0" algn="l">
+            <a:pPr algn="l" indent="0" marL="0">
               <a:buNone/>
             </a:pPr>
             <a:r>
@@ -4124,20 +8380,13 @@
             <a:prstDash val="solid"/>
           </a:ln>
           <a:effectLst>
-            <a:outerShdw blurRad="88900" dist="25400" dir="2700000" algn="bl" rotWithShape="0">
+            <a:outerShdw sx="100000" sy="100000" kx="0" ky="0" algn="bl" rotWithShape="0" blurRad="88900" dist="25400" dir="2700000">
               <a:srgbClr val="000000">
                 <a:alpha val="10000"/>
               </a:srgbClr>
             </a:outerShdw>
           </a:effectLst>
         </p:spPr>
-        <p:txBody>
-          <a:bodyPr/>
-          <a:lstStyle/>
-          <a:p>
-            <a:endParaRPr lang="en-US"/>
-          </a:p>
-        </p:txBody>
       </p:sp>
       <p:sp>
         <p:nvSpPr>
@@ -4160,7 +8409,7 @@
           <a:bodyPr wrap="square" lIns="0" tIns="0" rIns="0" bIns="0" rtlCol="0" anchor="ctr"/>
           <a:lstStyle/>
           <a:p>
-            <a:pPr marL="0" indent="0" algn="l">
+            <a:pPr algn="l" indent="0" marL="0">
               <a:buNone/>
             </a:pPr>
             <a:r>
@@ -4199,7 +8448,7 @@
           <a:bodyPr wrap="square" lIns="0" tIns="0" rIns="0" bIns="0" rtlCol="0" anchor="ctr"/>
           <a:lstStyle/>
           <a:p>
-            <a:pPr marL="0" indent="0" algn="l">
+            <a:pPr algn="l" indent="0" marL="0">
               <a:buNone/>
             </a:pPr>
             <a:r>
@@ -4238,7 +8487,7 @@
           <a:bodyPr wrap="square" lIns="0" tIns="0" rIns="0" bIns="0" rtlCol="0" anchor="t"/>
           <a:lstStyle/>
           <a:p>
-            <a:pPr marL="0" indent="0" algn="l">
+            <a:pPr algn="l" indent="0" marL="0">
               <a:buNone/>
             </a:pPr>
             <a:r>
@@ -4272,7 +8521,6 @@
         <a:solidFill>
           <a:srgbClr val="FFFFFF"/>
         </a:solidFill>
-        <a:effectLst/>
       </p:bgPr>
     </p:bg>
     <p:spTree>
@@ -4310,7 +8558,7 @@
           <a:bodyPr wrap="square" lIns="0" tIns="0" rIns="0" bIns="0" rtlCol="0" anchor="ctr"/>
           <a:lstStyle/>
           <a:p>
-            <a:pPr marL="0" indent="0" algn="l">
+            <a:pPr algn="l" indent="0" marL="0">
               <a:buNone/>
             </a:pPr>
             <a:r>
@@ -4349,7 +8597,7 @@
           <a:bodyPr wrap="square" lIns="0" tIns="0" rIns="0" bIns="0" rtlCol="0" anchor="ctr"/>
           <a:lstStyle/>
           <a:p>
-            <a:pPr marL="0" indent="0" algn="l">
+            <a:pPr algn="l" indent="0" marL="0">
               <a:buNone/>
             </a:pPr>
             <a:r>
@@ -4393,20 +8641,13 @@
             <a:prstDash val="solid"/>
           </a:ln>
           <a:effectLst>
-            <a:outerShdw blurRad="88900" dist="25400" dir="2700000" algn="bl" rotWithShape="0">
+            <a:outerShdw sx="100000" sy="100000" kx="0" ky="0" algn="bl" rotWithShape="0" blurRad="88900" dist="25400" dir="2700000">
               <a:srgbClr val="000000">
                 <a:alpha val="10000"/>
               </a:srgbClr>
             </a:outerShdw>
           </a:effectLst>
         </p:spPr>
-        <p:txBody>
-          <a:bodyPr/>
-          <a:lstStyle/>
-          <a:p>
-            <a:endParaRPr lang="en-US"/>
-          </a:p>
-        </p:txBody>
       </p:sp>
       <p:sp>
         <p:nvSpPr>
@@ -4429,7 +8670,7 @@
           <a:bodyPr wrap="square" lIns="0" tIns="0" rIns="0" bIns="0" rtlCol="0" anchor="ctr"/>
           <a:lstStyle/>
           <a:p>
-            <a:pPr marL="0" indent="0" algn="l">
+            <a:pPr algn="l" indent="0" marL="0">
               <a:buNone/>
             </a:pPr>
             <a:r>
@@ -4468,7 +8709,7 @@
           <a:bodyPr wrap="square" lIns="0" tIns="0" rIns="0" bIns="0" rtlCol="0" anchor="ctr"/>
           <a:lstStyle/>
           <a:p>
-            <a:pPr marL="0" indent="0" algn="l">
+            <a:pPr algn="l" indent="0" marL="0">
               <a:buNone/>
             </a:pPr>
             <a:r>
@@ -4507,7 +8748,7 @@
           <a:bodyPr wrap="square" lIns="0" tIns="0" rIns="0" bIns="0" rtlCol="0" anchor="ctr"/>
           <a:lstStyle/>
           <a:p>
-            <a:pPr marL="0" indent="0" algn="l">
+            <a:pPr algn="l" indent="0" marL="0">
               <a:buNone/>
             </a:pPr>
             <a:r>
@@ -4546,7 +8787,7 @@
           <a:bodyPr wrap="square" lIns="0" tIns="0" rIns="0" bIns="0" rtlCol="0" anchor="ctr"/>
           <a:lstStyle/>
           <a:p>
-            <a:pPr marL="0" indent="0" algn="l">
+            <a:pPr algn="l" indent="0" marL="0">
               <a:buNone/>
             </a:pPr>
             <a:r>
@@ -4590,20 +8831,13 @@
             <a:prstDash val="solid"/>
           </a:ln>
           <a:effectLst>
-            <a:outerShdw blurRad="88900" dist="25400" dir="2700000" algn="bl" rotWithShape="0">
+            <a:outerShdw sx="100000" sy="100000" kx="0" ky="0" algn="bl" rotWithShape="0" blurRad="88900" dist="25400" dir="2700000">
               <a:srgbClr val="000000">
                 <a:alpha val="10000"/>
               </a:srgbClr>
             </a:outerShdw>
           </a:effectLst>
         </p:spPr>
-        <p:txBody>
-          <a:bodyPr/>
-          <a:lstStyle/>
-          <a:p>
-            <a:endParaRPr lang="en-US"/>
-          </a:p>
-        </p:txBody>
       </p:sp>
       <p:sp>
         <p:nvSpPr>
@@ -4626,7 +8860,7 @@
           <a:bodyPr wrap="square" lIns="0" tIns="0" rIns="0" bIns="0" rtlCol="0" anchor="ctr"/>
           <a:lstStyle/>
           <a:p>
-            <a:pPr marL="0" indent="0" algn="l">
+            <a:pPr algn="l" indent="0" marL="0">
               <a:buNone/>
             </a:pPr>
             <a:r>
@@ -4665,7 +8899,7 @@
           <a:bodyPr wrap="square" lIns="0" tIns="0" rIns="0" bIns="0" rtlCol="0" anchor="ctr"/>
           <a:lstStyle/>
           <a:p>
-            <a:pPr marL="0" indent="0" algn="l">
+            <a:pPr algn="l" indent="0" marL="0">
               <a:buNone/>
             </a:pPr>
             <a:r>
@@ -4704,7 +8938,7 @@
           <a:bodyPr wrap="square" lIns="0" tIns="0" rIns="0" bIns="0" rtlCol="0" anchor="ctr"/>
           <a:lstStyle/>
           <a:p>
-            <a:pPr marL="0" indent="0" algn="l">
+            <a:pPr algn="l" indent="0" marL="0">
               <a:buNone/>
             </a:pPr>
             <a:r>
@@ -4743,7 +8977,7 @@
           <a:bodyPr wrap="square" lIns="0" tIns="0" rIns="0" bIns="0" rtlCol="0" anchor="ctr"/>
           <a:lstStyle/>
           <a:p>
-            <a:pPr marL="0" indent="0" algn="l">
+            <a:pPr algn="l" indent="0" marL="0">
               <a:buNone/>
             </a:pPr>
             <a:r>
@@ -4787,20 +9021,13 @@
             <a:prstDash val="solid"/>
           </a:ln>
           <a:effectLst>
-            <a:outerShdw blurRad="88900" dist="25400" dir="2700000" algn="bl" rotWithShape="0">
+            <a:outerShdw sx="100000" sy="100000" kx="0" ky="0" algn="bl" rotWithShape="0" blurRad="88900" dist="25400" dir="2700000">
               <a:srgbClr val="000000">
                 <a:alpha val="10000"/>
               </a:srgbClr>
             </a:outerShdw>
           </a:effectLst>
         </p:spPr>
-        <p:txBody>
-          <a:bodyPr/>
-          <a:lstStyle/>
-          <a:p>
-            <a:endParaRPr lang="en-US"/>
-          </a:p>
-        </p:txBody>
       </p:sp>
       <p:sp>
         <p:nvSpPr>
@@ -4823,7 +9050,7 @@
           <a:bodyPr wrap="square" lIns="0" tIns="0" rIns="0" bIns="0" rtlCol="0" anchor="ctr"/>
           <a:lstStyle/>
           <a:p>
-            <a:pPr marL="0" indent="0" algn="l">
+            <a:pPr algn="l" indent="0" marL="0">
               <a:buNone/>
             </a:pPr>
             <a:r>
@@ -4862,7 +9089,7 @@
           <a:bodyPr wrap="square" lIns="0" tIns="0" rIns="0" bIns="0" rtlCol="0" anchor="ctr"/>
           <a:lstStyle/>
           <a:p>
-            <a:pPr marL="0" indent="0" algn="l">
+            <a:pPr algn="l" indent="0" marL="0">
               <a:buNone/>
             </a:pPr>
             <a:r>
@@ -4901,7 +9128,7 @@
           <a:bodyPr wrap="square" lIns="0" tIns="0" rIns="0" bIns="0" rtlCol="0" anchor="ctr"/>
           <a:lstStyle/>
           <a:p>
-            <a:pPr marL="0" indent="0" algn="l">
+            <a:pPr algn="l" indent="0" marL="0">
               <a:buNone/>
             </a:pPr>
             <a:r>
@@ -4940,7 +9167,7 @@
           <a:bodyPr wrap="square" lIns="0" tIns="0" rIns="0" bIns="0" rtlCol="0" anchor="ctr"/>
           <a:lstStyle/>
           <a:p>
-            <a:pPr marL="0" indent="0" algn="l">
+            <a:pPr algn="l" indent="0" marL="0">
               <a:buNone/>
             </a:pPr>
             <a:r>
@@ -4984,20 +9211,13 @@
             <a:prstDash val="solid"/>
           </a:ln>
           <a:effectLst>
-            <a:outerShdw blurRad="88900" dist="25400" dir="2700000" algn="bl" rotWithShape="0">
+            <a:outerShdw sx="100000" sy="100000" kx="0" ky="0" algn="bl" rotWithShape="0" blurRad="88900" dist="25400" dir="2700000">
               <a:srgbClr val="000000">
                 <a:alpha val="10000"/>
               </a:srgbClr>
             </a:outerShdw>
           </a:effectLst>
         </p:spPr>
-        <p:txBody>
-          <a:bodyPr/>
-          <a:lstStyle/>
-          <a:p>
-            <a:endParaRPr lang="en-US"/>
-          </a:p>
-        </p:txBody>
       </p:sp>
       <p:sp>
         <p:nvSpPr>
@@ -5020,7 +9240,7 @@
           <a:bodyPr wrap="square" lIns="0" tIns="0" rIns="0" bIns="0" rtlCol="0" anchor="ctr"/>
           <a:lstStyle/>
           <a:p>
-            <a:pPr marL="0" indent="0" algn="l">
+            <a:pPr algn="l" indent="0" marL="0">
               <a:buNone/>
             </a:pPr>
             <a:r>
@@ -5059,7 +9279,7 @@
           <a:bodyPr wrap="square" lIns="0" tIns="0" rIns="0" bIns="0" rtlCol="0" anchor="ctr"/>
           <a:lstStyle/>
           <a:p>
-            <a:pPr marL="0" indent="0" algn="l">
+            <a:pPr algn="l" indent="0" marL="0">
               <a:buNone/>
             </a:pPr>
             <a:r>
@@ -5098,7 +9318,7 @@
           <a:bodyPr wrap="square" lIns="0" tIns="0" rIns="0" bIns="0" rtlCol="0" anchor="ctr"/>
           <a:lstStyle/>
           <a:p>
-            <a:pPr marL="0" indent="0" algn="l">
+            <a:pPr algn="l" indent="0" marL="0">
               <a:buNone/>
             </a:pPr>
             <a:r>
@@ -5137,7 +9357,7 @@
           <a:bodyPr wrap="square" lIns="0" tIns="0" rIns="0" bIns="0" rtlCol="0" anchor="ctr"/>
           <a:lstStyle/>
           <a:p>
-            <a:pPr marL="0" indent="0" algn="l">
+            <a:pPr algn="l" indent="0" marL="0">
               <a:buNone/>
             </a:pPr>
             <a:r>
@@ -5171,7 +9391,6 @@
         <a:solidFill>
           <a:srgbClr val="FFFFFF"/>
         </a:solidFill>
-        <a:effectLst/>
       </p:bgPr>
     </p:bg>
     <p:spTree>
@@ -5209,7 +9428,7 @@
           <a:bodyPr wrap="square" lIns="0" tIns="0" rIns="0" bIns="0" rtlCol="0" anchor="ctr"/>
           <a:lstStyle/>
           <a:p>
-            <a:pPr marL="0" indent="0" algn="l">
+            <a:pPr algn="l" indent="0" marL="0">
               <a:buNone/>
             </a:pPr>
             <a:r>
@@ -5243,48 +9462,18 @@
         </p:nvGraphicFramePr>
         <p:xfrm>
           <a:off x="320040" y="841248"/>
-          <a:ext cx="8503920" cy="3584448"/>
+          <a:ext cx="8503920" cy="914400"/>
         </p:xfrm>
         <a:graphic>
           <a:graphicData uri="http://schemas.openxmlformats.org/drawingml/2006/table">
             <a:tbl>
               <a:tblPr/>
               <a:tblGrid>
-                <a:gridCol w="2606040">
-                  <a:extLst>
-                    <a:ext uri="{9D8B030D-6E8A-4147-A177-3AD203B41FA5}">
-                      <a16:colId xmlns:a16="http://schemas.microsoft.com/office/drawing/2014/main" val="20000"/>
-                    </a:ext>
-                  </a:extLst>
-                </a:gridCol>
-                <a:gridCol w="1316736">
-                  <a:extLst>
-                    <a:ext uri="{9D8B030D-6E8A-4147-A177-3AD203B41FA5}">
-                      <a16:colId xmlns:a16="http://schemas.microsoft.com/office/drawing/2014/main" val="20001"/>
-                    </a:ext>
-                  </a:extLst>
-                </a:gridCol>
-                <a:gridCol w="1316736">
-                  <a:extLst>
-                    <a:ext uri="{9D8B030D-6E8A-4147-A177-3AD203B41FA5}">
-                      <a16:colId xmlns:a16="http://schemas.microsoft.com/office/drawing/2014/main" val="20002"/>
-                    </a:ext>
-                  </a:extLst>
-                </a:gridCol>
-                <a:gridCol w="1316736">
-                  <a:extLst>
-                    <a:ext uri="{9D8B030D-6E8A-4147-A177-3AD203B41FA5}">
-                      <a16:colId xmlns:a16="http://schemas.microsoft.com/office/drawing/2014/main" val="20003"/>
-                    </a:ext>
-                  </a:extLst>
-                </a:gridCol>
-                <a:gridCol w="1947672">
-                  <a:extLst>
-                    <a:ext uri="{9D8B030D-6E8A-4147-A177-3AD203B41FA5}">
-                      <a16:colId xmlns:a16="http://schemas.microsoft.com/office/drawing/2014/main" val="20004"/>
-                    </a:ext>
-                  </a:extLst>
-                </a:gridCol>
+                <a:gridCol w="2606040"/>
+                <a:gridCol w="1316736"/>
+                <a:gridCol w="1316736"/>
+                <a:gridCol w="1316736"/>
+                <a:gridCol w="1947672"/>
               </a:tblGrid>
               <a:tr h="512064">
                 <a:tc>
@@ -5292,7 +9481,7 @@
                     <a:bodyPr/>
                     <a:lstStyle/>
                     <a:p>
-                      <a:pPr marL="0" indent="0" algn="ctr">
+                      <a:pPr algn="ctr" indent="0" marL="0">
                         <a:buNone/>
                       </a:pPr>
                       <a:r>
@@ -5313,7 +9502,7 @@
                       </a:endParaRPr>
                     </a:p>
                   </a:txBody>
-                  <a:tcPr>
+                  <a:tcPr marL="91440" marR="91440" marT="45720" marB="45720">
                     <a:lnL w="6350" cap="flat" cmpd="sng" algn="ctr">
                       <a:solidFill>
                         <a:srgbClr val="C4B9AC"/>
@@ -5360,7 +9549,7 @@
                     <a:bodyPr/>
                     <a:lstStyle/>
                     <a:p>
-                      <a:pPr marL="0" indent="0" algn="ctr">
+                      <a:pPr algn="ctr" indent="0" marL="0">
                         <a:buNone/>
                       </a:pPr>
                       <a:r>
@@ -5381,7 +9570,7 @@
                       </a:endParaRPr>
                     </a:p>
                   </a:txBody>
-                  <a:tcPr>
+                  <a:tcPr marL="91440" marR="91440" marT="45720" marB="45720">
                     <a:lnL w="6350" cap="flat" cmpd="sng" algn="ctr">
                       <a:solidFill>
                         <a:srgbClr val="C4B9AC"/>
@@ -5428,7 +9617,7 @@
                     <a:bodyPr/>
                     <a:lstStyle/>
                     <a:p>
-                      <a:pPr marL="0" indent="0" algn="ctr">
+                      <a:pPr algn="ctr" indent="0" marL="0">
                         <a:buNone/>
                       </a:pPr>
                       <a:r>
@@ -5449,7 +9638,7 @@
                       </a:endParaRPr>
                     </a:p>
                   </a:txBody>
-                  <a:tcPr>
+                  <a:tcPr marL="91440" marR="91440" marT="45720" marB="45720">
                     <a:lnL w="6350" cap="flat" cmpd="sng" algn="ctr">
                       <a:solidFill>
                         <a:srgbClr val="C4B9AC"/>
@@ -5496,7 +9685,7 @@
                     <a:bodyPr/>
                     <a:lstStyle/>
                     <a:p>
-                      <a:pPr marL="0" indent="0" algn="ctr">
+                      <a:pPr algn="ctr" indent="0" marL="0">
                         <a:buNone/>
                       </a:pPr>
                       <a:r>
@@ -5517,7 +9706,7 @@
                       </a:endParaRPr>
                     </a:p>
                   </a:txBody>
-                  <a:tcPr>
+                  <a:tcPr marL="91440" marR="91440" marT="45720" marB="45720">
                     <a:lnL w="6350" cap="flat" cmpd="sng" algn="ctr">
                       <a:solidFill>
                         <a:srgbClr val="C4B9AC"/>
@@ -5564,7 +9753,7 @@
                     <a:bodyPr/>
                     <a:lstStyle/>
                     <a:p>
-                      <a:pPr marL="0" indent="0" algn="ctr">
+                      <a:pPr algn="ctr" indent="0" marL="0">
                         <a:buNone/>
                       </a:pPr>
                       <a:r>
@@ -5585,7 +9774,7 @@
                       </a:endParaRPr>
                     </a:p>
                   </a:txBody>
-                  <a:tcPr>
+                  <a:tcPr marL="91440" marR="91440" marT="45720" marB="45720">
                     <a:lnL w="6350" cap="flat" cmpd="sng" algn="ctr">
                       <a:solidFill>
                         <a:srgbClr val="C4B9AC"/>
@@ -5627,11 +9816,6 @@
                     </a:solidFill>
                   </a:tcPr>
                 </a:tc>
-                <a:extLst>
-                  <a:ext uri="{0D108BD9-81ED-4DB2-BD59-A6C34878D82A}">
-                    <a16:rowId xmlns:a16="http://schemas.microsoft.com/office/drawing/2014/main" val="10000"/>
-                  </a:ext>
-                </a:extLst>
               </a:tr>
               <a:tr h="512064">
                 <a:tc>
@@ -5639,7 +9823,7 @@
                     <a:bodyPr/>
                     <a:lstStyle/>
                     <a:p>
-                      <a:pPr marL="0" indent="0" algn="l">
+                      <a:pPr algn="l" indent="0" marL="0">
                         <a:buNone/>
                       </a:pPr>
                       <a:r>
@@ -5660,7 +9844,7 @@
                       </a:endParaRPr>
                     </a:p>
                   </a:txBody>
-                  <a:tcPr>
+                  <a:tcPr marL="91440" marR="91440" marT="45720" marB="45720">
                     <a:lnL w="6350" cap="flat" cmpd="sng" algn="ctr">
                       <a:solidFill>
                         <a:srgbClr val="C4B9AC"/>
@@ -5707,7 +9891,7 @@
                     <a:bodyPr/>
                     <a:lstStyle/>
                     <a:p>
-                      <a:pPr marL="0" indent="0" algn="ctr">
+                      <a:pPr algn="ctr" indent="0" marL="0">
                         <a:buNone/>
                       </a:pPr>
                       <a:r>
@@ -5728,7 +9912,7 @@
                       </a:endParaRPr>
                     </a:p>
                   </a:txBody>
-                  <a:tcPr>
+                  <a:tcPr marL="91440" marR="91440" marT="45720" marB="45720">
                     <a:lnL w="6350" cap="flat" cmpd="sng" algn="ctr">
                       <a:solidFill>
                         <a:srgbClr val="C4B9AC"/>
@@ -5775,7 +9959,7 @@
                     <a:bodyPr/>
                     <a:lstStyle/>
                     <a:p>
-                      <a:pPr marL="0" indent="0" algn="ctr">
+                      <a:pPr algn="ctr" indent="0" marL="0">
                         <a:buNone/>
                       </a:pPr>
                       <a:r>
@@ -5796,7 +9980,7 @@
                       </a:endParaRPr>
                     </a:p>
                   </a:txBody>
-                  <a:tcPr>
+                  <a:tcPr marL="91440" marR="91440" marT="45720" marB="45720">
                     <a:lnL w="6350" cap="flat" cmpd="sng" algn="ctr">
                       <a:solidFill>
                         <a:srgbClr val="C4B9AC"/>
@@ -5843,7 +10027,7 @@
                     <a:bodyPr/>
                     <a:lstStyle/>
                     <a:p>
-                      <a:pPr marL="0" indent="0" algn="ctr">
+                      <a:pPr algn="ctr" indent="0" marL="0">
                         <a:buNone/>
                       </a:pPr>
                       <a:r>
@@ -5864,7 +10048,7 @@
                       </a:endParaRPr>
                     </a:p>
                   </a:txBody>
-                  <a:tcPr>
+                  <a:tcPr marL="91440" marR="91440" marT="45720" marB="45720">
                     <a:lnL w="6350" cap="flat" cmpd="sng" algn="ctr">
                       <a:solidFill>
                         <a:srgbClr val="C4B9AC"/>
@@ -5911,7 +10095,7 @@
                     <a:bodyPr/>
                     <a:lstStyle/>
                     <a:p>
-                      <a:pPr marL="0" indent="0" algn="ctr">
+                      <a:pPr algn="ctr" indent="0" marL="0">
                         <a:buNone/>
                       </a:pPr>
                       <a:r>
@@ -5932,7 +10116,7 @@
                       </a:endParaRPr>
                     </a:p>
                   </a:txBody>
-                  <a:tcPr>
+                  <a:tcPr marL="91440" marR="91440" marT="45720" marB="45720">
                     <a:lnL w="6350" cap="flat" cmpd="sng" algn="ctr">
                       <a:solidFill>
                         <a:srgbClr val="C4B9AC"/>
@@ -5974,11 +10158,6 @@
                     </a:solidFill>
                   </a:tcPr>
                 </a:tc>
-                <a:extLst>
-                  <a:ext uri="{0D108BD9-81ED-4DB2-BD59-A6C34878D82A}">
-                    <a16:rowId xmlns:a16="http://schemas.microsoft.com/office/drawing/2014/main" val="10001"/>
-                  </a:ext>
-                </a:extLst>
               </a:tr>
               <a:tr h="512064">
                 <a:tc>
@@ -5986,7 +10165,7 @@
                     <a:bodyPr/>
                     <a:lstStyle/>
                     <a:p>
-                      <a:pPr marL="0" indent="0" algn="l">
+                      <a:pPr algn="l" indent="0" marL="0">
                         <a:buNone/>
                       </a:pPr>
                       <a:r>
@@ -6007,7 +10186,7 @@
                       </a:endParaRPr>
                     </a:p>
                   </a:txBody>
-                  <a:tcPr>
+                  <a:tcPr marL="91440" marR="91440" marT="45720" marB="45720">
                     <a:lnL w="6350" cap="flat" cmpd="sng" algn="ctr">
                       <a:solidFill>
                         <a:srgbClr val="C4B9AC"/>
@@ -6054,7 +10233,7 @@
                     <a:bodyPr/>
                     <a:lstStyle/>
                     <a:p>
-                      <a:pPr marL="0" indent="0" algn="ctr">
+                      <a:pPr algn="ctr" indent="0" marL="0">
                         <a:buNone/>
                       </a:pPr>
                       <a:r>
@@ -6075,7 +10254,7 @@
                       </a:endParaRPr>
                     </a:p>
                   </a:txBody>
-                  <a:tcPr>
+                  <a:tcPr marL="91440" marR="91440" marT="45720" marB="45720">
                     <a:lnL w="6350" cap="flat" cmpd="sng" algn="ctr">
                       <a:solidFill>
                         <a:srgbClr val="C4B9AC"/>
@@ -6122,7 +10301,7 @@
                     <a:bodyPr/>
                     <a:lstStyle/>
                     <a:p>
-                      <a:pPr marL="0" indent="0" algn="ctr">
+                      <a:pPr algn="ctr" indent="0" marL="0">
                         <a:buNone/>
                       </a:pPr>
                       <a:r>
@@ -6143,7 +10322,7 @@
                       </a:endParaRPr>
                     </a:p>
                   </a:txBody>
-                  <a:tcPr>
+                  <a:tcPr marL="91440" marR="91440" marT="45720" marB="45720">
                     <a:lnL w="6350" cap="flat" cmpd="sng" algn="ctr">
                       <a:solidFill>
                         <a:srgbClr val="C4B9AC"/>
@@ -6190,7 +10369,7 @@
                     <a:bodyPr/>
                     <a:lstStyle/>
                     <a:p>
-                      <a:pPr marL="0" indent="0" algn="ctr">
+                      <a:pPr algn="ctr" indent="0" marL="0">
                         <a:buNone/>
                       </a:pPr>
                       <a:r>
@@ -6211,7 +10390,7 @@
                       </a:endParaRPr>
                     </a:p>
                   </a:txBody>
-                  <a:tcPr>
+                  <a:tcPr marL="91440" marR="91440" marT="45720" marB="45720">
                     <a:lnL w="6350" cap="flat" cmpd="sng" algn="ctr">
                       <a:solidFill>
                         <a:srgbClr val="C4B9AC"/>
@@ -6258,7 +10437,7 @@
                     <a:bodyPr/>
                     <a:lstStyle/>
                     <a:p>
-                      <a:pPr marL="0" indent="0" algn="ctr">
+                      <a:pPr algn="ctr" indent="0" marL="0">
                         <a:buNone/>
                       </a:pPr>
                       <a:r>
@@ -6279,7 +10458,7 @@
                       </a:endParaRPr>
                     </a:p>
                   </a:txBody>
-                  <a:tcPr>
+                  <a:tcPr marL="91440" marR="91440" marT="45720" marB="45720">
                     <a:lnL w="6350" cap="flat" cmpd="sng" algn="ctr">
                       <a:solidFill>
                         <a:srgbClr val="C4B9AC"/>
@@ -6321,11 +10500,6 @@
                     </a:solidFill>
                   </a:tcPr>
                 </a:tc>
-                <a:extLst>
-                  <a:ext uri="{0D108BD9-81ED-4DB2-BD59-A6C34878D82A}">
-                    <a16:rowId xmlns:a16="http://schemas.microsoft.com/office/drawing/2014/main" val="10002"/>
-                  </a:ext>
-                </a:extLst>
               </a:tr>
               <a:tr h="512064">
                 <a:tc>
@@ -6333,7 +10507,7 @@
                     <a:bodyPr/>
                     <a:lstStyle/>
                     <a:p>
-                      <a:pPr marL="0" indent="0" algn="l">
+                      <a:pPr algn="l" indent="0" marL="0">
                         <a:buNone/>
                       </a:pPr>
                       <a:r>
@@ -6354,7 +10528,7 @@
                       </a:endParaRPr>
                     </a:p>
                   </a:txBody>
-                  <a:tcPr>
+                  <a:tcPr marL="91440" marR="91440" marT="45720" marB="45720">
                     <a:lnL w="6350" cap="flat" cmpd="sng" algn="ctr">
                       <a:solidFill>
                         <a:srgbClr val="C4B9AC"/>
@@ -6401,7 +10575,7 @@
                     <a:bodyPr/>
                     <a:lstStyle/>
                     <a:p>
-                      <a:pPr marL="0" indent="0" algn="ctr">
+                      <a:pPr algn="ctr" indent="0" marL="0">
                         <a:buNone/>
                       </a:pPr>
                       <a:r>
@@ -6422,7 +10596,7 @@
                       </a:endParaRPr>
                     </a:p>
                   </a:txBody>
-                  <a:tcPr>
+                  <a:tcPr marL="91440" marR="91440" marT="45720" marB="45720">
                     <a:lnL w="6350" cap="flat" cmpd="sng" algn="ctr">
                       <a:solidFill>
                         <a:srgbClr val="C4B9AC"/>
@@ -6469,7 +10643,7 @@
                     <a:bodyPr/>
                     <a:lstStyle/>
                     <a:p>
-                      <a:pPr marL="0" indent="0" algn="ctr">
+                      <a:pPr algn="ctr" indent="0" marL="0">
                         <a:buNone/>
                       </a:pPr>
                       <a:r>
@@ -6490,7 +10664,7 @@
                       </a:endParaRPr>
                     </a:p>
                   </a:txBody>
-                  <a:tcPr>
+                  <a:tcPr marL="91440" marR="91440" marT="45720" marB="45720">
                     <a:lnL w="6350" cap="flat" cmpd="sng" algn="ctr">
                       <a:solidFill>
                         <a:srgbClr val="C4B9AC"/>
@@ -6537,7 +10711,7 @@
                     <a:bodyPr/>
                     <a:lstStyle/>
                     <a:p>
-                      <a:pPr marL="0" indent="0" algn="ctr">
+                      <a:pPr algn="ctr" indent="0" marL="0">
                         <a:buNone/>
                       </a:pPr>
                       <a:r>
@@ -6558,7 +10732,7 @@
                       </a:endParaRPr>
                     </a:p>
                   </a:txBody>
-                  <a:tcPr>
+                  <a:tcPr marL="91440" marR="91440" marT="45720" marB="45720">
                     <a:lnL w="6350" cap="flat" cmpd="sng" algn="ctr">
                       <a:solidFill>
                         <a:srgbClr val="C4B9AC"/>
@@ -6605,7 +10779,7 @@
                     <a:bodyPr/>
                     <a:lstStyle/>
                     <a:p>
-                      <a:pPr marL="0" indent="0" algn="ctr">
+                      <a:pPr algn="ctr" indent="0" marL="0">
                         <a:buNone/>
                       </a:pPr>
                       <a:r>
@@ -6626,7 +10800,7 @@
                       </a:endParaRPr>
                     </a:p>
                   </a:txBody>
-                  <a:tcPr>
+                  <a:tcPr marL="91440" marR="91440" marT="45720" marB="45720">
                     <a:lnL w="6350" cap="flat" cmpd="sng" algn="ctr">
                       <a:solidFill>
                         <a:srgbClr val="C4B9AC"/>
@@ -6668,11 +10842,6 @@
                     </a:solidFill>
                   </a:tcPr>
                 </a:tc>
-                <a:extLst>
-                  <a:ext uri="{0D108BD9-81ED-4DB2-BD59-A6C34878D82A}">
-                    <a16:rowId xmlns:a16="http://schemas.microsoft.com/office/drawing/2014/main" val="10003"/>
-                  </a:ext>
-                </a:extLst>
               </a:tr>
               <a:tr h="512064">
                 <a:tc>
@@ -6680,7 +10849,7 @@
                     <a:bodyPr/>
                     <a:lstStyle/>
                     <a:p>
-                      <a:pPr marL="0" indent="0" algn="l">
+                      <a:pPr algn="l" indent="0" marL="0">
                         <a:buNone/>
                       </a:pPr>
                       <a:r>
@@ -6701,7 +10870,7 @@
                       </a:endParaRPr>
                     </a:p>
                   </a:txBody>
-                  <a:tcPr>
+                  <a:tcPr marL="91440" marR="91440" marT="45720" marB="45720">
                     <a:lnL w="6350" cap="flat" cmpd="sng" algn="ctr">
                       <a:solidFill>
                         <a:srgbClr val="C4B9AC"/>
@@ -6748,7 +10917,7 @@
                     <a:bodyPr/>
                     <a:lstStyle/>
                     <a:p>
-                      <a:pPr marL="0" indent="0" algn="ctr">
+                      <a:pPr algn="ctr" indent="0" marL="0">
                         <a:buNone/>
                       </a:pPr>
                       <a:r>
@@ -6769,7 +10938,7 @@
                       </a:endParaRPr>
                     </a:p>
                   </a:txBody>
-                  <a:tcPr>
+                  <a:tcPr marL="91440" marR="91440" marT="45720" marB="45720">
                     <a:lnL w="6350" cap="flat" cmpd="sng" algn="ctr">
                       <a:solidFill>
                         <a:srgbClr val="C4B9AC"/>
@@ -6816,7 +10985,7 @@
                     <a:bodyPr/>
                     <a:lstStyle/>
                     <a:p>
-                      <a:pPr marL="0" indent="0" algn="ctr">
+                      <a:pPr algn="ctr" indent="0" marL="0">
                         <a:buNone/>
                       </a:pPr>
                       <a:r>
@@ -6837,7 +11006,7 @@
                       </a:endParaRPr>
                     </a:p>
                   </a:txBody>
-                  <a:tcPr>
+                  <a:tcPr marL="91440" marR="91440" marT="45720" marB="45720">
                     <a:lnL w="6350" cap="flat" cmpd="sng" algn="ctr">
                       <a:solidFill>
                         <a:srgbClr val="C4B9AC"/>
@@ -6884,7 +11053,7 @@
                     <a:bodyPr/>
                     <a:lstStyle/>
                     <a:p>
-                      <a:pPr marL="0" indent="0" algn="ctr">
+                      <a:pPr algn="ctr" indent="0" marL="0">
                         <a:buNone/>
                       </a:pPr>
                       <a:r>
@@ -6905,7 +11074,7 @@
                       </a:endParaRPr>
                     </a:p>
                   </a:txBody>
-                  <a:tcPr>
+                  <a:tcPr marL="91440" marR="91440" marT="45720" marB="45720">
                     <a:lnL w="6350" cap="flat" cmpd="sng" algn="ctr">
                       <a:solidFill>
                         <a:srgbClr val="C4B9AC"/>
@@ -6952,7 +11121,7 @@
                     <a:bodyPr/>
                     <a:lstStyle/>
                     <a:p>
-                      <a:pPr marL="0" indent="0" algn="ctr">
+                      <a:pPr algn="ctr" indent="0" marL="0">
                         <a:buNone/>
                       </a:pPr>
                       <a:r>
@@ -6973,7 +11142,7 @@
                       </a:endParaRPr>
                     </a:p>
                   </a:txBody>
-                  <a:tcPr>
+                  <a:tcPr marL="91440" marR="91440" marT="45720" marB="45720">
                     <a:lnL w="6350" cap="flat" cmpd="sng" algn="ctr">
                       <a:solidFill>
                         <a:srgbClr val="C4B9AC"/>
@@ -7015,11 +11184,6 @@
                     </a:solidFill>
                   </a:tcPr>
                 </a:tc>
-                <a:extLst>
-                  <a:ext uri="{0D108BD9-81ED-4DB2-BD59-A6C34878D82A}">
-                    <a16:rowId xmlns:a16="http://schemas.microsoft.com/office/drawing/2014/main" val="10004"/>
-                  </a:ext>
-                </a:extLst>
               </a:tr>
               <a:tr h="512064">
                 <a:tc>
@@ -7027,7 +11191,7 @@
                     <a:bodyPr/>
                     <a:lstStyle/>
                     <a:p>
-                      <a:pPr marL="0" indent="0" algn="l">
+                      <a:pPr algn="l" indent="0" marL="0">
                         <a:buNone/>
                       </a:pPr>
                       <a:r>
@@ -7048,7 +11212,7 @@
                       </a:endParaRPr>
                     </a:p>
                   </a:txBody>
-                  <a:tcPr>
+                  <a:tcPr marL="91440" marR="91440" marT="45720" marB="45720">
                     <a:lnL w="6350" cap="flat" cmpd="sng" algn="ctr">
                       <a:solidFill>
                         <a:srgbClr val="C4B9AC"/>
@@ -7095,7 +11259,7 @@
                     <a:bodyPr/>
                     <a:lstStyle/>
                     <a:p>
-                      <a:pPr marL="0" indent="0" algn="ctr">
+                      <a:pPr algn="ctr" indent="0" marL="0">
                         <a:buNone/>
                       </a:pPr>
                       <a:r>
@@ -7116,7 +11280,7 @@
                       </a:endParaRPr>
                     </a:p>
                   </a:txBody>
-                  <a:tcPr>
+                  <a:tcPr marL="91440" marR="91440" marT="45720" marB="45720">
                     <a:lnL w="6350" cap="flat" cmpd="sng" algn="ctr">
                       <a:solidFill>
                         <a:srgbClr val="C4B9AC"/>
@@ -7163,7 +11327,7 @@
                     <a:bodyPr/>
                     <a:lstStyle/>
                     <a:p>
-                      <a:pPr marL="0" indent="0" algn="ctr">
+                      <a:pPr algn="ctr" indent="0" marL="0">
                         <a:buNone/>
                       </a:pPr>
                       <a:r>
@@ -7184,7 +11348,7 @@
                       </a:endParaRPr>
                     </a:p>
                   </a:txBody>
-                  <a:tcPr>
+                  <a:tcPr marL="91440" marR="91440" marT="45720" marB="45720">
                     <a:lnL w="6350" cap="flat" cmpd="sng" algn="ctr">
                       <a:solidFill>
                         <a:srgbClr val="C4B9AC"/>
@@ -7231,7 +11395,7 @@
                     <a:bodyPr/>
                     <a:lstStyle/>
                     <a:p>
-                      <a:pPr marL="0" indent="0" algn="ctr">
+                      <a:pPr algn="ctr" indent="0" marL="0">
                         <a:buNone/>
                       </a:pPr>
                       <a:r>
@@ -7252,7 +11416,7 @@
                       </a:endParaRPr>
                     </a:p>
                   </a:txBody>
-                  <a:tcPr>
+                  <a:tcPr marL="91440" marR="91440" marT="45720" marB="45720">
                     <a:lnL w="6350" cap="flat" cmpd="sng" algn="ctr">
                       <a:solidFill>
                         <a:srgbClr val="C4B9AC"/>
@@ -7299,7 +11463,7 @@
                     <a:bodyPr/>
                     <a:lstStyle/>
                     <a:p>
-                      <a:pPr marL="0" indent="0" algn="ctr">
+                      <a:pPr algn="ctr" indent="0" marL="0">
                         <a:buNone/>
                       </a:pPr>
                       <a:r>
@@ -7320,7 +11484,7 @@
                       </a:endParaRPr>
                     </a:p>
                   </a:txBody>
-                  <a:tcPr>
+                  <a:tcPr marL="91440" marR="91440" marT="45720" marB="45720">
                     <a:lnL w="6350" cap="flat" cmpd="sng" algn="ctr">
                       <a:solidFill>
                         <a:srgbClr val="C4B9AC"/>
@@ -7362,11 +11526,6 @@
                     </a:solidFill>
                   </a:tcPr>
                 </a:tc>
-                <a:extLst>
-                  <a:ext uri="{0D108BD9-81ED-4DB2-BD59-A6C34878D82A}">
-                    <a16:rowId xmlns:a16="http://schemas.microsoft.com/office/drawing/2014/main" val="10005"/>
-                  </a:ext>
-                </a:extLst>
               </a:tr>
               <a:tr h="512064">
                 <a:tc>
@@ -7374,7 +11533,7 @@
                     <a:bodyPr/>
                     <a:lstStyle/>
                     <a:p>
-                      <a:pPr marL="0" indent="0" algn="l">
+                      <a:pPr algn="l" indent="0" marL="0">
                         <a:buNone/>
                       </a:pPr>
                       <a:r>
@@ -7395,7 +11554,7 @@
                       </a:endParaRPr>
                     </a:p>
                   </a:txBody>
-                  <a:tcPr>
+                  <a:tcPr marL="91440" marR="91440" marT="45720" marB="45720">
                     <a:lnL w="6350" cap="flat" cmpd="sng" algn="ctr">
                       <a:solidFill>
                         <a:srgbClr val="C4B9AC"/>
@@ -7442,7 +11601,7 @@
                     <a:bodyPr/>
                     <a:lstStyle/>
                     <a:p>
-                      <a:pPr marL="0" indent="0" algn="ctr">
+                      <a:pPr algn="ctr" indent="0" marL="0">
                         <a:buNone/>
                       </a:pPr>
                       <a:r>
@@ -7463,7 +11622,7 @@
                       </a:endParaRPr>
                     </a:p>
                   </a:txBody>
-                  <a:tcPr>
+                  <a:tcPr marL="91440" marR="91440" marT="45720" marB="45720">
                     <a:lnL w="6350" cap="flat" cmpd="sng" algn="ctr">
                       <a:solidFill>
                         <a:srgbClr val="C4B9AC"/>
@@ -7510,7 +11669,7 @@
                     <a:bodyPr/>
                     <a:lstStyle/>
                     <a:p>
-                      <a:pPr marL="0" indent="0" algn="ctr">
+                      <a:pPr algn="ctr" indent="0" marL="0">
                         <a:buNone/>
                       </a:pPr>
                       <a:r>
@@ -7531,7 +11690,7 @@
                       </a:endParaRPr>
                     </a:p>
                   </a:txBody>
-                  <a:tcPr>
+                  <a:tcPr marL="91440" marR="91440" marT="45720" marB="45720">
                     <a:lnL w="6350" cap="flat" cmpd="sng" algn="ctr">
                       <a:solidFill>
                         <a:srgbClr val="C4B9AC"/>
@@ -7578,7 +11737,7 @@
                     <a:bodyPr/>
                     <a:lstStyle/>
                     <a:p>
-                      <a:pPr marL="0" indent="0" algn="ctr">
+                      <a:pPr algn="ctr" indent="0" marL="0">
                         <a:buNone/>
                       </a:pPr>
                       <a:r>
@@ -7599,7 +11758,7 @@
                       </a:endParaRPr>
                     </a:p>
                   </a:txBody>
-                  <a:tcPr>
+                  <a:tcPr marL="91440" marR="91440" marT="45720" marB="45720">
                     <a:lnL w="6350" cap="flat" cmpd="sng" algn="ctr">
                       <a:solidFill>
                         <a:srgbClr val="C4B9AC"/>
@@ -7646,7 +11805,7 @@
                     <a:bodyPr/>
                     <a:lstStyle/>
                     <a:p>
-                      <a:pPr marL="0" indent="0" algn="ctr">
+                      <a:pPr algn="ctr" indent="0" marL="0">
                         <a:buNone/>
                       </a:pPr>
                       <a:r>
@@ -7667,7 +11826,7 @@
                       </a:endParaRPr>
                     </a:p>
                   </a:txBody>
-                  <a:tcPr>
+                  <a:tcPr marL="91440" marR="91440" marT="45720" marB="45720">
                     <a:lnL w="6350" cap="flat" cmpd="sng" algn="ctr">
                       <a:solidFill>
                         <a:srgbClr val="C4B9AC"/>
@@ -7709,11 +11868,6 @@
                     </a:solidFill>
                   </a:tcPr>
                 </a:tc>
-                <a:extLst>
-                  <a:ext uri="{0D108BD9-81ED-4DB2-BD59-A6C34878D82A}">
-                    <a16:rowId xmlns:a16="http://schemas.microsoft.com/office/drawing/2014/main" val="10006"/>
-                  </a:ext>
-                </a:extLst>
               </a:tr>
             </a:tbl>
           </a:graphicData>
@@ -7735,7 +11889,6 @@
         <a:solidFill>
           <a:srgbClr val="FFFFFF"/>
         </a:solidFill>
-        <a:effectLst/>
       </p:bgPr>
     </p:bg>
     <p:spTree>
@@ -7773,7 +11926,7 @@
           <a:bodyPr wrap="square" lIns="0" tIns="0" rIns="0" bIns="0" rtlCol="0" anchor="ctr"/>
           <a:lstStyle/>
           <a:p>
-            <a:pPr marL="0" indent="0" algn="l">
+            <a:pPr algn="l" indent="0" marL="0">
               <a:buNone/>
             </a:pPr>
             <a:r>
@@ -7815,13 +11968,6 @@
             <a:prstDash val="solid"/>
           </a:ln>
         </p:spPr>
-        <p:txBody>
-          <a:bodyPr/>
-          <a:lstStyle/>
-          <a:p>
-            <a:endParaRPr lang="en-US"/>
-          </a:p>
-        </p:txBody>
       </p:sp>
       <p:sp>
         <p:nvSpPr>
@@ -7844,7 +11990,7 @@
           <a:bodyPr wrap="square" lIns="0" tIns="0" rIns="0" bIns="0" rtlCol="0" anchor="ctr"/>
           <a:lstStyle/>
           <a:p>
-            <a:pPr marL="0" indent="0" algn="ctr">
+            <a:pPr algn="ctr" indent="0" marL="0">
               <a:buNone/>
             </a:pPr>
             <a:r>
@@ -7888,20 +12034,13 @@
             <a:prstDash val="solid"/>
           </a:ln>
           <a:effectLst>
-            <a:outerShdw blurRad="88900" dist="25400" dir="2700000" algn="bl" rotWithShape="0">
+            <a:outerShdw sx="100000" sy="100000" kx="0" ky="0" algn="bl" rotWithShape="0" blurRad="88900" dist="25400" dir="2700000">
               <a:srgbClr val="000000">
                 <a:alpha val="10000"/>
               </a:srgbClr>
             </a:outerShdw>
           </a:effectLst>
         </p:spPr>
-        <p:txBody>
-          <a:bodyPr/>
-          <a:lstStyle/>
-          <a:p>
-            <a:endParaRPr lang="en-US"/>
-          </a:p>
-        </p:txBody>
       </p:sp>
       <p:sp>
         <p:nvSpPr>
@@ -7924,7 +12063,7 @@
           <a:bodyPr wrap="square" lIns="0" tIns="0" rIns="0" bIns="0" rtlCol="0" anchor="ctr"/>
           <a:lstStyle/>
           <a:p>
-            <a:pPr marL="0" indent="0" algn="l">
+            <a:pPr algn="l" indent="0" marL="0">
               <a:buNone/>
             </a:pPr>
             <a:r>
@@ -7966,13 +12105,6 @@
             <a:prstDash val="solid"/>
           </a:ln>
         </p:spPr>
-        <p:txBody>
-          <a:bodyPr/>
-          <a:lstStyle/>
-          <a:p>
-            <a:endParaRPr lang="en-US"/>
-          </a:p>
-        </p:txBody>
       </p:sp>
       <p:sp>
         <p:nvSpPr>
@@ -7995,7 +12127,7 @@
           <a:bodyPr wrap="square" lIns="0" tIns="0" rIns="0" bIns="0" rtlCol="0" anchor="ctr"/>
           <a:lstStyle/>
           <a:p>
-            <a:pPr marL="0" indent="0" algn="ctr">
+            <a:pPr algn="ctr" indent="0" marL="0">
               <a:buNone/>
             </a:pPr>
             <a:r>
@@ -8039,20 +12171,13 @@
             <a:prstDash val="solid"/>
           </a:ln>
           <a:effectLst>
-            <a:outerShdw blurRad="88900" dist="25400" dir="2700000" algn="bl" rotWithShape="0">
+            <a:outerShdw sx="100000" sy="100000" kx="0" ky="0" algn="bl" rotWithShape="0" blurRad="88900" dist="25400" dir="2700000">
               <a:srgbClr val="000000">
                 <a:alpha val="10000"/>
               </a:srgbClr>
             </a:outerShdw>
           </a:effectLst>
         </p:spPr>
-        <p:txBody>
-          <a:bodyPr/>
-          <a:lstStyle/>
-          <a:p>
-            <a:endParaRPr lang="en-US"/>
-          </a:p>
-        </p:txBody>
       </p:sp>
       <p:sp>
         <p:nvSpPr>
@@ -8075,7 +12200,7 @@
           <a:bodyPr wrap="square" lIns="0" tIns="0" rIns="0" bIns="0" rtlCol="0" anchor="ctr"/>
           <a:lstStyle/>
           <a:p>
-            <a:pPr marL="0" indent="0" algn="l">
+            <a:pPr algn="l" indent="0" marL="0">
               <a:buNone/>
             </a:pPr>
             <a:r>
@@ -8117,13 +12242,6 @@
             <a:prstDash val="solid"/>
           </a:ln>
         </p:spPr>
-        <p:txBody>
-          <a:bodyPr/>
-          <a:lstStyle/>
-          <a:p>
-            <a:endParaRPr lang="en-US"/>
-          </a:p>
-        </p:txBody>
       </p:sp>
       <p:sp>
         <p:nvSpPr>
@@ -8146,7 +12264,7 @@
           <a:bodyPr wrap="square" lIns="0" tIns="0" rIns="0" bIns="0" rtlCol="0" anchor="ctr"/>
           <a:lstStyle/>
           <a:p>
-            <a:pPr marL="0" indent="0" algn="ctr">
+            <a:pPr algn="ctr" indent="0" marL="0">
               <a:buNone/>
             </a:pPr>
             <a:r>
@@ -8190,20 +12308,13 @@
             <a:prstDash val="solid"/>
           </a:ln>
           <a:effectLst>
-            <a:outerShdw blurRad="88900" dist="25400" dir="2700000" algn="bl" rotWithShape="0">
+            <a:outerShdw sx="100000" sy="100000" kx="0" ky="0" algn="bl" rotWithShape="0" blurRad="88900" dist="25400" dir="2700000">
               <a:srgbClr val="000000">
                 <a:alpha val="10000"/>
               </a:srgbClr>
             </a:outerShdw>
           </a:effectLst>
         </p:spPr>
-        <p:txBody>
-          <a:bodyPr/>
-          <a:lstStyle/>
-          <a:p>
-            <a:endParaRPr lang="en-US"/>
-          </a:p>
-        </p:txBody>
       </p:sp>
       <p:sp>
         <p:nvSpPr>
@@ -8226,7 +12337,7 @@
           <a:bodyPr wrap="square" lIns="0" tIns="0" rIns="0" bIns="0" rtlCol="0" anchor="ctr"/>
           <a:lstStyle/>
           <a:p>
-            <a:pPr marL="0" indent="0" algn="l">
+            <a:pPr algn="l" indent="0" marL="0">
               <a:buNone/>
             </a:pPr>
             <a:r>
@@ -8260,7 +12371,6 @@
         <a:solidFill>
           <a:srgbClr val="FFFFFF"/>
         </a:solidFill>
-        <a:effectLst/>
       </p:bgPr>
     </p:bg>
     <p:spTree>
@@ -8298,7 +12408,7 @@
           <a:bodyPr wrap="square" lIns="0" tIns="0" rIns="0" bIns="0" rtlCol="0" anchor="ctr"/>
           <a:lstStyle/>
           <a:p>
-            <a:pPr marL="0" indent="0" algn="l">
+            <a:pPr algn="l" indent="0" marL="0">
               <a:buNone/>
             </a:pPr>
             <a:r>
@@ -8342,20 +12452,13 @@
             <a:prstDash val="solid"/>
           </a:ln>
           <a:effectLst>
-            <a:outerShdw blurRad="88900" dist="25400" dir="2700000" algn="bl" rotWithShape="0">
+            <a:outerShdw sx="100000" sy="100000" kx="0" ky="0" algn="bl" rotWithShape="0" blurRad="88900" dist="25400" dir="2700000">
               <a:srgbClr val="000000">
                 <a:alpha val="10000"/>
               </a:srgbClr>
             </a:outerShdw>
           </a:effectLst>
         </p:spPr>
-        <p:txBody>
-          <a:bodyPr/>
-          <a:lstStyle/>
-          <a:p>
-            <a:endParaRPr lang="en-US"/>
-          </a:p>
-        </p:txBody>
       </p:sp>
       <p:sp>
         <p:nvSpPr>
@@ -8378,7 +12481,7 @@
           <a:bodyPr wrap="square" lIns="0" tIns="0" rIns="0" bIns="0" rtlCol="0" anchor="ctr"/>
           <a:lstStyle/>
           <a:p>
-            <a:pPr marL="0" indent="0" algn="l">
+            <a:pPr algn="l" indent="0" marL="0">
               <a:buNone/>
             </a:pPr>
             <a:r>
@@ -8417,7 +12520,7 @@
           <a:bodyPr wrap="square" lIns="0" tIns="0" rIns="0" bIns="0" rtlCol="0" anchor="t"/>
           <a:lstStyle/>
           <a:p>
-            <a:pPr marL="342900" indent="-342900" algn="l">
+            <a:pPr algn="l" marL="342900" indent="-342900">
               <a:buSzPct val="100000"/>
               <a:buChar char="•"/>
             </a:pPr>
@@ -8435,7 +12538,7 @@
             <a:endParaRPr lang="en-US" sz="1150" dirty="0"/>
           </a:p>
           <a:p>
-            <a:pPr marL="342900" indent="-342900" algn="l">
+            <a:pPr algn="l" marL="342900" indent="-342900">
               <a:buSzPct val="100000"/>
               <a:buChar char="•"/>
             </a:pPr>
@@ -8453,7 +12556,7 @@
             <a:endParaRPr lang="en-US" sz="1150" dirty="0"/>
           </a:p>
           <a:p>
-            <a:pPr marL="342900" indent="-342900" algn="l">
+            <a:pPr algn="l" marL="342900" indent="-342900">
               <a:buSzPct val="100000"/>
               <a:buChar char="•"/>
             </a:pPr>
@@ -8498,20 +12601,13 @@
             <a:prstDash val="solid"/>
           </a:ln>
           <a:effectLst>
-            <a:outerShdw blurRad="88900" dist="25400" dir="2700000" algn="bl" rotWithShape="0">
+            <a:outerShdw sx="100000" sy="100000" kx="0" ky="0" algn="bl" rotWithShape="0" blurRad="88900" dist="25400" dir="2700000">
               <a:srgbClr val="000000">
                 <a:alpha val="10000"/>
               </a:srgbClr>
             </a:outerShdw>
           </a:effectLst>
         </p:spPr>
-        <p:txBody>
-          <a:bodyPr/>
-          <a:lstStyle/>
-          <a:p>
-            <a:endParaRPr lang="en-US"/>
-          </a:p>
-        </p:txBody>
       </p:sp>
       <p:sp>
         <p:nvSpPr>
@@ -8534,7 +12630,7 @@
           <a:bodyPr wrap="square" lIns="0" tIns="0" rIns="0" bIns="0" rtlCol="0" anchor="ctr"/>
           <a:lstStyle/>
           <a:p>
-            <a:pPr marL="0" indent="0" algn="l">
+            <a:pPr algn="l" indent="0" marL="0">
               <a:buNone/>
             </a:pPr>
             <a:r>
@@ -8573,7 +12669,7 @@
           <a:bodyPr wrap="square" lIns="0" tIns="0" rIns="0" bIns="0" rtlCol="0" anchor="t"/>
           <a:lstStyle/>
           <a:p>
-            <a:pPr marL="342900" indent="-342900" algn="l">
+            <a:pPr algn="l" marL="342900" indent="-342900">
               <a:buSzPct val="100000"/>
               <a:buChar char="•"/>
             </a:pPr>
@@ -8591,7 +12687,7 @@
             <a:endParaRPr lang="en-US" sz="1150" dirty="0"/>
           </a:p>
           <a:p>
-            <a:pPr marL="342900" indent="-342900" algn="l">
+            <a:pPr algn="l" marL="342900" indent="-342900">
               <a:buSzPct val="100000"/>
               <a:buChar char="•"/>
             </a:pPr>
@@ -8609,7 +12705,7 @@
             <a:endParaRPr lang="en-US" sz="1150" dirty="0"/>
           </a:p>
           <a:p>
-            <a:pPr marL="342900" indent="-342900" algn="l">
+            <a:pPr algn="l" marL="342900" indent="-342900">
               <a:buSzPct val="100000"/>
               <a:buChar char="•"/>
             </a:pPr>
@@ -8654,20 +12750,13 @@
             <a:prstDash val="solid"/>
           </a:ln>
           <a:effectLst>
-            <a:outerShdw blurRad="88900" dist="25400" dir="2700000" algn="bl" rotWithShape="0">
+            <a:outerShdw sx="100000" sy="100000" kx="0" ky="0" algn="bl" rotWithShape="0" blurRad="88900" dist="25400" dir="2700000">
               <a:srgbClr val="000000">
                 <a:alpha val="10000"/>
               </a:srgbClr>
             </a:outerShdw>
           </a:effectLst>
         </p:spPr>
-        <p:txBody>
-          <a:bodyPr/>
-          <a:lstStyle/>
-          <a:p>
-            <a:endParaRPr lang="en-US"/>
-          </a:p>
-        </p:txBody>
       </p:sp>
       <p:sp>
         <p:nvSpPr>
@@ -8690,7 +12779,7 @@
           <a:bodyPr wrap="square" lIns="0" tIns="0" rIns="0" bIns="0" rtlCol="0" anchor="ctr"/>
           <a:lstStyle/>
           <a:p>
-            <a:pPr marL="0" indent="0" algn="l">
+            <a:pPr algn="l" indent="0" marL="0">
               <a:buNone/>
             </a:pPr>
             <a:r>
@@ -8729,7 +12818,7 @@
           <a:bodyPr wrap="square" lIns="0" tIns="0" rIns="0" bIns="0" rtlCol="0" anchor="t"/>
           <a:lstStyle/>
           <a:p>
-            <a:pPr marL="342900" indent="-342900" algn="l">
+            <a:pPr algn="l" marL="342900" indent="-342900">
               <a:buSzPct val="100000"/>
               <a:buChar char="•"/>
             </a:pPr>
@@ -8747,7 +12836,7 @@
             <a:endParaRPr lang="en-US" sz="1150" dirty="0"/>
           </a:p>
           <a:p>
-            <a:pPr marL="342900" indent="-342900" algn="l">
+            <a:pPr algn="l" marL="342900" indent="-342900">
               <a:buSzPct val="100000"/>
               <a:buChar char="•"/>
             </a:pPr>
@@ -8792,20 +12881,13 @@
             <a:prstDash val="solid"/>
           </a:ln>
           <a:effectLst>
-            <a:outerShdw blurRad="88900" dist="25400" dir="2700000" algn="bl" rotWithShape="0">
+            <a:outerShdw sx="100000" sy="100000" kx="0" ky="0" algn="bl" rotWithShape="0" blurRad="88900" dist="25400" dir="2700000">
               <a:srgbClr val="000000">
                 <a:alpha val="10000"/>
               </a:srgbClr>
             </a:outerShdw>
           </a:effectLst>
         </p:spPr>
-        <p:txBody>
-          <a:bodyPr/>
-          <a:lstStyle/>
-          <a:p>
-            <a:endParaRPr lang="en-US"/>
-          </a:p>
-        </p:txBody>
       </p:sp>
       <p:sp>
         <p:nvSpPr>
@@ -8828,7 +12910,7 @@
           <a:bodyPr wrap="square" lIns="0" tIns="0" rIns="0" bIns="0" rtlCol="0" anchor="ctr"/>
           <a:lstStyle/>
           <a:p>
-            <a:pPr marL="0" indent="0" algn="l">
+            <a:pPr algn="l" indent="0" marL="0">
               <a:buNone/>
             </a:pPr>
             <a:r>
@@ -8867,7 +12949,7 @@
           <a:bodyPr wrap="square" lIns="0" tIns="0" rIns="0" bIns="0" rtlCol="0" anchor="t"/>
           <a:lstStyle/>
           <a:p>
-            <a:pPr marL="342900" indent="-342900" algn="l">
+            <a:pPr algn="l" marL="342900" indent="-342900">
               <a:buSzPct val="100000"/>
               <a:buChar char="•"/>
             </a:pPr>
@@ -8885,7 +12967,7 @@
             <a:endParaRPr lang="en-US" sz="1150" dirty="0"/>
           </a:p>
           <a:p>
-            <a:pPr marL="342900" indent="-342900" algn="l">
+            <a:pPr algn="l" marL="342900" indent="-342900">
               <a:buSzPct val="100000"/>
               <a:buChar char="•"/>
             </a:pPr>
@@ -8903,7 +12985,7 @@
             <a:endParaRPr lang="en-US" sz="1150" dirty="0"/>
           </a:p>
           <a:p>
-            <a:pPr marL="342900" indent="-342900" algn="l">
+            <a:pPr algn="l" marL="342900" indent="-342900">
               <a:buSzPct val="100000"/>
               <a:buChar char="•"/>
             </a:pPr>
@@ -8938,7 +13020,6 @@
         <a:solidFill>
           <a:srgbClr val="FFFFFF"/>
         </a:solidFill>
-        <a:effectLst/>
       </p:bgPr>
     </p:bg>
     <p:spTree>
@@ -8976,7 +13057,7 @@
           <a:bodyPr wrap="square" lIns="0" tIns="0" rIns="0" bIns="0" rtlCol="0" anchor="ctr"/>
           <a:lstStyle/>
           <a:p>
-            <a:pPr marL="0" indent="0" algn="l">
+            <a:pPr algn="l" indent="0" marL="0">
               <a:buNone/>
             </a:pPr>
             <a:r>
@@ -9020,11 +13101,43 @@
             <a:prstDash val="dash"/>
           </a:ln>
         </p:spPr>
-        <p:txBody>
-          <a:bodyPr/>
-          <a:lstStyle/>
-          <a:p>
-            <a:endParaRPr lang="en-US"/>
+      </p:sp>
+      <p:sp>
+        <p:nvSpPr>
+          <p:cNvPr id="4" name="Text 2"/>
+          <p:cNvSpPr/>
+          <p:nvPr/>
+        </p:nvSpPr>
+        <p:spPr>
+          <a:xfrm>
+            <a:off x="594360" y="2011680"/>
+            <a:ext cx="7955280" cy="640080"/>
+          </a:xfrm>
+          <a:prstGeom prst="rect">
+            <a:avLst/>
+          </a:prstGeom>
+          <a:noFill/>
+          <a:ln/>
+        </p:spPr>
+        <p:txBody>
+          <a:bodyPr wrap="square" lIns="0" tIns="0" rIns="0" bIns="0" rtlCol="0" anchor="ctr"/>
+          <a:lstStyle/>
+          <a:p>
+            <a:pPr algn="ctr" indent="0" marL="0">
+              <a:buNone/>
+            </a:pPr>
+            <a:r>
+              <a:rPr lang="en-US" sz="2400" i="1" dirty="0">
+                <a:solidFill>
+                  <a:srgbClr val="C4B9AC"/>
+                </a:solidFill>
+                <a:latin typeface="Cambria" pitchFamily="34" charset="0"/>
+                <a:ea typeface="Cambria" pitchFamily="34" charset="-122"/>
+                <a:cs typeface="Cambria" pitchFamily="34" charset="-120"/>
+              </a:rPr>
+              <a:t>[ ERD Diagram ]</a:t>
+            </a:r>
+            <a:endParaRPr lang="en-US" sz="2400" dirty="0"/>
           </a:p>
         </p:txBody>
       </p:sp>
@@ -9049,7 +13162,7 @@
           <a:bodyPr wrap="square" lIns="0" tIns="0" rIns="0" bIns="0" rtlCol="0" anchor="ctr"/>
           <a:lstStyle/>
           <a:p>
-            <a:pPr marL="0" indent="0" algn="ctr">
+            <a:pPr algn="ctr" indent="0" marL="0">
               <a:buNone/>
             </a:pPr>
             <a:r>
@@ -9088,7 +13201,7 @@
           <a:bodyPr wrap="square" lIns="0" tIns="0" rIns="0" bIns="0" rtlCol="0" anchor="ctr"/>
           <a:lstStyle/>
           <a:p>
-            <a:pPr marL="0" indent="0" algn="ctr">
+            <a:pPr algn="ctr" indent="0" marL="0">
               <a:buNone/>
             </a:pPr>
             <a:r>
@@ -9106,36 +13219,6 @@
           </a:p>
         </p:txBody>
       </p:sp>
-      <p:pic>
-        <p:nvPicPr>
-          <p:cNvPr id="8" name="Picture 7">
-            <a:extLst>
-              <a:ext uri="{FF2B5EF4-FFF2-40B4-BE49-F238E27FC236}">
-                <a16:creationId xmlns:a16="http://schemas.microsoft.com/office/drawing/2014/main" id="{82151C20-B282-12D1-EE61-693AE0184A16}"/>
-              </a:ext>
-            </a:extLst>
-          </p:cNvPr>
-          <p:cNvPicPr>
-            <a:picLocks noChangeAspect="1"/>
-          </p:cNvPicPr>
-          <p:nvPr/>
-        </p:nvPicPr>
-        <p:blipFill>
-          <a:blip r:embed="rId3"/>
-          <a:stretch>
-            <a:fillRect/>
-          </a:stretch>
-        </p:blipFill>
-        <p:spPr>
-          <a:xfrm>
-            <a:off x="1491521" y="914400"/>
-            <a:ext cx="5891136" cy="3931920"/>
-          </a:xfrm>
-          <a:prstGeom prst="rect">
-            <a:avLst/>
-          </a:prstGeom>
-        </p:spPr>
-      </p:pic>
     </p:spTree>
   </p:cSld>
   <p:clrMapOvr>
@@ -9152,7 +13235,6 @@
         <a:solidFill>
           <a:srgbClr val="FFFFFF"/>
         </a:solidFill>
-        <a:effectLst/>
       </p:bgPr>
     </p:bg>
     <p:spTree>
@@ -9190,7 +13272,7 @@
           <a:bodyPr wrap="square" lIns="0" tIns="0" rIns="0" bIns="0" rtlCol="0" anchor="ctr"/>
           <a:lstStyle/>
           <a:p>
-            <a:pPr marL="0" indent="0" algn="l">
+            <a:pPr algn="l" indent="0" marL="0">
               <a:buNone/>
             </a:pPr>
             <a:r>
@@ -9234,20 +13316,13 @@
             <a:prstDash val="solid"/>
           </a:ln>
           <a:effectLst>
-            <a:outerShdw blurRad="88900" dist="25400" dir="2700000" algn="bl" rotWithShape="0">
+            <a:outerShdw sx="100000" sy="100000" kx="0" ky="0" algn="bl" rotWithShape="0" blurRad="88900" dist="25400" dir="2700000">
               <a:srgbClr val="000000">
                 <a:alpha val="10000"/>
               </a:srgbClr>
             </a:outerShdw>
           </a:effectLst>
         </p:spPr>
-        <p:txBody>
-          <a:bodyPr/>
-          <a:lstStyle/>
-          <a:p>
-            <a:endParaRPr lang="en-US"/>
-          </a:p>
-        </p:txBody>
       </p:sp>
       <p:sp>
         <p:nvSpPr>
@@ -9273,13 +13348,6 @@
             <a:prstDash val="solid"/>
           </a:ln>
         </p:spPr>
-        <p:txBody>
-          <a:bodyPr/>
-          <a:lstStyle/>
-          <a:p>
-            <a:endParaRPr lang="en-US"/>
-          </a:p>
-        </p:txBody>
       </p:sp>
       <p:sp>
         <p:nvSpPr>
@@ -9302,7 +13370,7 @@
           <a:bodyPr wrap="square" lIns="0" tIns="0" rIns="0" bIns="0" rtlCol="0" anchor="ctr"/>
           <a:lstStyle/>
           <a:p>
-            <a:pPr marL="0" indent="0" algn="ctr">
+            <a:pPr algn="ctr" indent="0" marL="0">
               <a:buNone/>
             </a:pPr>
             <a:r>
@@ -9341,7 +13409,7 @@
           <a:bodyPr wrap="square" lIns="0" tIns="0" rIns="0" bIns="0" rtlCol="0" anchor="ctr"/>
           <a:lstStyle/>
           <a:p>
-            <a:pPr marL="0" indent="0" algn="l">
+            <a:pPr algn="l" indent="0" marL="0">
               <a:buNone/>
             </a:pPr>
             <a:r>
@@ -9380,7 +13448,7 @@
           <a:bodyPr wrap="square" lIns="0" tIns="0" rIns="0" bIns="0" rtlCol="0" anchor="t"/>
           <a:lstStyle/>
           <a:p>
-            <a:pPr marL="0" indent="0" algn="l">
+            <a:pPr algn="l" indent="0" marL="0">
               <a:buNone/>
             </a:pPr>
             <a:r>
@@ -9424,20 +13492,13 @@
             <a:prstDash val="solid"/>
           </a:ln>
           <a:effectLst>
-            <a:outerShdw blurRad="88900" dist="25400" dir="2700000" algn="bl" rotWithShape="0">
+            <a:outerShdw sx="100000" sy="100000" kx="0" ky="0" algn="bl" rotWithShape="0" blurRad="88900" dist="25400" dir="2700000">
               <a:srgbClr val="000000">
                 <a:alpha val="10000"/>
               </a:srgbClr>
             </a:outerShdw>
           </a:effectLst>
         </p:spPr>
-        <p:txBody>
-          <a:bodyPr/>
-          <a:lstStyle/>
-          <a:p>
-            <a:endParaRPr lang="en-US"/>
-          </a:p>
-        </p:txBody>
       </p:sp>
       <p:sp>
         <p:nvSpPr>
@@ -9463,13 +13524,6 @@
             <a:prstDash val="solid"/>
           </a:ln>
         </p:spPr>
-        <p:txBody>
-          <a:bodyPr/>
-          <a:lstStyle/>
-          <a:p>
-            <a:endParaRPr lang="en-US"/>
-          </a:p>
-        </p:txBody>
       </p:sp>
       <p:sp>
         <p:nvSpPr>
@@ -9492,7 +13546,7 @@
           <a:bodyPr wrap="square" lIns="0" tIns="0" rIns="0" bIns="0" rtlCol="0" anchor="ctr"/>
           <a:lstStyle/>
           <a:p>
-            <a:pPr marL="0" indent="0" algn="ctr">
+            <a:pPr algn="ctr" indent="0" marL="0">
               <a:buNone/>
             </a:pPr>
             <a:r>
@@ -9531,7 +13585,7 @@
           <a:bodyPr wrap="square" lIns="0" tIns="0" rIns="0" bIns="0" rtlCol="0" anchor="ctr"/>
           <a:lstStyle/>
           <a:p>
-            <a:pPr marL="0" indent="0" algn="l">
+            <a:pPr algn="l" indent="0" marL="0">
               <a:buNone/>
             </a:pPr>
             <a:r>
@@ -9570,7 +13624,7 @@
           <a:bodyPr wrap="square" lIns="0" tIns="0" rIns="0" bIns="0" rtlCol="0" anchor="t"/>
           <a:lstStyle/>
           <a:p>
-            <a:pPr marL="0" indent="0" algn="l">
+            <a:pPr algn="l" indent="0" marL="0">
               <a:buNone/>
             </a:pPr>
             <a:r>
@@ -9614,20 +13668,13 @@
             <a:prstDash val="solid"/>
           </a:ln>
           <a:effectLst>
-            <a:outerShdw blurRad="88900" dist="25400" dir="2700000" algn="bl" rotWithShape="0">
+            <a:outerShdw sx="100000" sy="100000" kx="0" ky="0" algn="bl" rotWithShape="0" blurRad="88900" dist="25400" dir="2700000">
               <a:srgbClr val="000000">
                 <a:alpha val="10000"/>
               </a:srgbClr>
             </a:outerShdw>
           </a:effectLst>
         </p:spPr>
-        <p:txBody>
-          <a:bodyPr/>
-          <a:lstStyle/>
-          <a:p>
-            <a:endParaRPr lang="en-US"/>
-          </a:p>
-        </p:txBody>
       </p:sp>
       <p:sp>
         <p:nvSpPr>
@@ -9653,13 +13700,6 @@
             <a:prstDash val="solid"/>
           </a:ln>
         </p:spPr>
-        <p:txBody>
-          <a:bodyPr/>
-          <a:lstStyle/>
-          <a:p>
-            <a:endParaRPr lang="en-US"/>
-          </a:p>
-        </p:txBody>
       </p:sp>
       <p:sp>
         <p:nvSpPr>
@@ -9682,7 +13722,7 @@
           <a:bodyPr wrap="square" lIns="0" tIns="0" rIns="0" bIns="0" rtlCol="0" anchor="ctr"/>
           <a:lstStyle/>
           <a:p>
-            <a:pPr marL="0" indent="0" algn="ctr">
+            <a:pPr algn="ctr" indent="0" marL="0">
               <a:buNone/>
             </a:pPr>
             <a:r>
@@ -9721,7 +13761,7 @@
           <a:bodyPr wrap="square" lIns="0" tIns="0" rIns="0" bIns="0" rtlCol="0" anchor="ctr"/>
           <a:lstStyle/>
           <a:p>
-            <a:pPr marL="0" indent="0" algn="l">
+            <a:pPr algn="l" indent="0" marL="0">
               <a:buNone/>
             </a:pPr>
             <a:r>
@@ -9760,7 +13800,7 @@
           <a:bodyPr wrap="square" lIns="0" tIns="0" rIns="0" bIns="0" rtlCol="0" anchor="t"/>
           <a:lstStyle/>
           <a:p>
-            <a:pPr marL="0" indent="0" algn="l">
+            <a:pPr algn="l" indent="0" marL="0">
               <a:buNone/>
             </a:pPr>
             <a:r>
@@ -9804,20 +13844,13 @@
             <a:prstDash val="solid"/>
           </a:ln>
           <a:effectLst>
-            <a:outerShdw blurRad="88900" dist="25400" dir="2700000" algn="bl" rotWithShape="0">
+            <a:outerShdw sx="100000" sy="100000" kx="0" ky="0" algn="bl" rotWithShape="0" blurRad="88900" dist="25400" dir="2700000">
               <a:srgbClr val="000000">
                 <a:alpha val="10000"/>
               </a:srgbClr>
             </a:outerShdw>
           </a:effectLst>
         </p:spPr>
-        <p:txBody>
-          <a:bodyPr/>
-          <a:lstStyle/>
-          <a:p>
-            <a:endParaRPr lang="en-US"/>
-          </a:p>
-        </p:txBody>
       </p:sp>
       <p:sp>
         <p:nvSpPr>
@@ -9843,13 +13876,6 @@
             <a:prstDash val="solid"/>
           </a:ln>
         </p:spPr>
-        <p:txBody>
-          <a:bodyPr/>
-          <a:lstStyle/>
-          <a:p>
-            <a:endParaRPr lang="en-US"/>
-          </a:p>
-        </p:txBody>
       </p:sp>
       <p:sp>
         <p:nvSpPr>
@@ -9872,7 +13898,7 @@
           <a:bodyPr wrap="square" lIns="0" tIns="0" rIns="0" bIns="0" rtlCol="0" anchor="ctr"/>
           <a:lstStyle/>
           <a:p>
-            <a:pPr marL="0" indent="0" algn="ctr">
+            <a:pPr algn="ctr" indent="0" marL="0">
               <a:buNone/>
             </a:pPr>
             <a:r>
@@ -9911,7 +13937,7 @@
           <a:bodyPr wrap="square" lIns="0" tIns="0" rIns="0" bIns="0" rtlCol="0" anchor="ctr"/>
           <a:lstStyle/>
           <a:p>
-            <a:pPr marL="0" indent="0" algn="l">
+            <a:pPr algn="l" indent="0" marL="0">
               <a:buNone/>
             </a:pPr>
             <a:r>
@@ -9950,7 +13976,7 @@
           <a:bodyPr wrap="square" lIns="0" tIns="0" rIns="0" bIns="0" rtlCol="0" anchor="t"/>
           <a:lstStyle/>
           <a:p>
-            <a:pPr marL="0" indent="0" algn="l">
+            <a:pPr algn="l" indent="0" marL="0">
               <a:buNone/>
             </a:pPr>
             <a:r>
@@ -9994,20 +14020,13 @@
             <a:prstDash val="solid"/>
           </a:ln>
           <a:effectLst>
-            <a:outerShdw blurRad="88900" dist="25400" dir="2700000" algn="bl" rotWithShape="0">
+            <a:outerShdw sx="100000" sy="100000" kx="0" ky="0" algn="bl" rotWithShape="0" blurRad="88900" dist="25400" dir="2700000">
               <a:srgbClr val="000000">
                 <a:alpha val="10000"/>
               </a:srgbClr>
             </a:outerShdw>
           </a:effectLst>
         </p:spPr>
-        <p:txBody>
-          <a:bodyPr/>
-          <a:lstStyle/>
-          <a:p>
-            <a:endParaRPr lang="en-US"/>
-          </a:p>
-        </p:txBody>
       </p:sp>
       <p:sp>
         <p:nvSpPr>
@@ -10033,13 +14052,6 @@
             <a:prstDash val="solid"/>
           </a:ln>
         </p:spPr>
-        <p:txBody>
-          <a:bodyPr/>
-          <a:lstStyle/>
-          <a:p>
-            <a:endParaRPr lang="en-US"/>
-          </a:p>
-        </p:txBody>
       </p:sp>
       <p:sp>
         <p:nvSpPr>
@@ -10062,7 +14074,7 @@
           <a:bodyPr wrap="square" lIns="0" tIns="0" rIns="0" bIns="0" rtlCol="0" anchor="ctr"/>
           <a:lstStyle/>
           <a:p>
-            <a:pPr marL="0" indent="0" algn="ctr">
+            <a:pPr algn="ctr" indent="0" marL="0">
               <a:buNone/>
             </a:pPr>
             <a:r>
@@ -10101,7 +14113,7 @@
           <a:bodyPr wrap="square" lIns="0" tIns="0" rIns="0" bIns="0" rtlCol="0" anchor="ctr"/>
           <a:lstStyle/>
           <a:p>
-            <a:pPr marL="0" indent="0" algn="l">
+            <a:pPr algn="l" indent="0" marL="0">
               <a:buNone/>
             </a:pPr>
             <a:r>
@@ -10140,7 +14152,7 @@
           <a:bodyPr wrap="square" lIns="0" tIns="0" rIns="0" bIns="0" rtlCol="0" anchor="t"/>
           <a:lstStyle/>
           <a:p>
-            <a:pPr marL="0" indent="0" algn="l">
+            <a:pPr algn="l" indent="0" marL="0">
               <a:buNone/>
             </a:pPr>
             <a:r>
@@ -10184,20 +14196,13 @@
             <a:prstDash val="solid"/>
           </a:ln>
           <a:effectLst>
-            <a:outerShdw blurRad="88900" dist="25400" dir="2700000" algn="bl" rotWithShape="0">
+            <a:outerShdw sx="100000" sy="100000" kx="0" ky="0" algn="bl" rotWithShape="0" blurRad="88900" dist="25400" dir="2700000">
               <a:srgbClr val="000000">
                 <a:alpha val="10000"/>
               </a:srgbClr>
             </a:outerShdw>
           </a:effectLst>
         </p:spPr>
-        <p:txBody>
-          <a:bodyPr/>
-          <a:lstStyle/>
-          <a:p>
-            <a:endParaRPr lang="en-US"/>
-          </a:p>
-        </p:txBody>
       </p:sp>
       <p:sp>
         <p:nvSpPr>
@@ -10223,13 +14228,6 @@
             <a:prstDash val="solid"/>
           </a:ln>
         </p:spPr>
-        <p:txBody>
-          <a:bodyPr/>
-          <a:lstStyle/>
-          <a:p>
-            <a:endParaRPr lang="en-US"/>
-          </a:p>
-        </p:txBody>
       </p:sp>
       <p:sp>
         <p:nvSpPr>
@@ -10252,7 +14250,7 @@
           <a:bodyPr wrap="square" lIns="0" tIns="0" rIns="0" bIns="0" rtlCol="0" anchor="ctr"/>
           <a:lstStyle/>
           <a:p>
-            <a:pPr marL="0" indent="0" algn="ctr">
+            <a:pPr algn="ctr" indent="0" marL="0">
               <a:buNone/>
             </a:pPr>
             <a:r>
@@ -10291,7 +14289,7 @@
           <a:bodyPr wrap="square" lIns="0" tIns="0" rIns="0" bIns="0" rtlCol="0" anchor="ctr"/>
           <a:lstStyle/>
           <a:p>
-            <a:pPr marL="0" indent="0" algn="l">
+            <a:pPr algn="l" indent="0" marL="0">
               <a:buNone/>
             </a:pPr>
             <a:r>
@@ -10330,7 +14328,7 @@
           <a:bodyPr wrap="square" lIns="0" tIns="0" rIns="0" bIns="0" rtlCol="0" anchor="t"/>
           <a:lstStyle/>
           <a:p>
-            <a:pPr marL="0" indent="0" algn="l">
+            <a:pPr algn="l" indent="0" marL="0">
               <a:buNone/>
             </a:pPr>
             <a:r>
@@ -10369,7 +14367,7 @@
           <a:bodyPr wrap="square" lIns="0" tIns="0" rIns="0" bIns="0" rtlCol="0" anchor="ctr"/>
           <a:lstStyle/>
           <a:p>
-            <a:pPr marL="0" indent="0" algn="ctr">
+            <a:pPr algn="ctr" indent="0" marL="0">
               <a:buNone/>
             </a:pPr>
             <a:r>
@@ -10688,319 +14686,4 @@
     </a:ext>
   </a:extLst>
 </a:theme>
-</file>
-
-<file path=ppt/theme/theme2.xml><?xml version="1.0" encoding="utf-8"?>
-<a:theme xmlns:a="http://schemas.openxmlformats.org/drawingml/2006/main" name="Office Theme">
-  <a:themeElements>
-    <a:clrScheme name="Office">
-      <a:dk1>
-        <a:sysClr val="windowText" lastClr="000000"/>
-      </a:dk1>
-      <a:lt1>
-        <a:sysClr val="window" lastClr="FFFFFF"/>
-      </a:lt1>
-      <a:dk2>
-        <a:srgbClr val="0E2841"/>
-      </a:dk2>
-      <a:lt2>
-        <a:srgbClr val="E8E8E8"/>
-      </a:lt2>
-      <a:accent1>
-        <a:srgbClr val="156082"/>
-      </a:accent1>
-      <a:accent2>
-        <a:srgbClr val="E97132"/>
-      </a:accent2>
-      <a:accent3>
-        <a:srgbClr val="196B24"/>
-      </a:accent3>
-      <a:accent4>
-        <a:srgbClr val="0F9ED5"/>
-      </a:accent4>
-      <a:accent5>
-        <a:srgbClr val="A02B93"/>
-      </a:accent5>
-      <a:accent6>
-        <a:srgbClr val="4EA72E"/>
-      </a:accent6>
-      <a:hlink>
-        <a:srgbClr val="467886"/>
-      </a:hlink>
-      <a:folHlink>
-        <a:srgbClr val="96607D"/>
-      </a:folHlink>
-    </a:clrScheme>
-    <a:fontScheme name="Office">
-      <a:majorFont>
-        <a:latin typeface="Aptos Display" panose="02110004020202020204"/>
-        <a:ea typeface=""/>
-        <a:cs typeface=""/>
-        <a:font script="Jpan" typeface="游ゴシック Light"/>
-        <a:font script="Hang" typeface="맑은 고딕"/>
-        <a:font script="Hans" typeface="等线 Light"/>
-        <a:font script="Hant" typeface="新細明體"/>
-        <a:font script="Arab" typeface="Times New Roman"/>
-        <a:font script="Hebr" typeface="Times New Roman"/>
-        <a:font script="Thai" typeface="Angsana New"/>
-        <a:font script="Ethi" typeface="Nyala"/>
-        <a:font script="Beng" typeface="Vrinda"/>
-        <a:font script="Gujr" typeface="Shruti"/>
-        <a:font script="Khmr" typeface="MoolBoran"/>
-        <a:font script="Knda" typeface="Tunga"/>
-        <a:font script="Guru" typeface="Raavi"/>
-        <a:font script="Cans" typeface="Euphemia"/>
-        <a:font script="Cher" typeface="Plantagenet Cherokee"/>
-        <a:font script="Yiii" typeface="Microsoft Yi Baiti"/>
-        <a:font script="Tibt" typeface="Microsoft Himalaya"/>
-        <a:font script="Thaa" typeface="MV Boli"/>
-        <a:font script="Deva" typeface="Mangal"/>
-        <a:font script="Telu" typeface="Gautami"/>
-        <a:font script="Taml" typeface="Latha"/>
-        <a:font script="Syrc" typeface="Estrangelo Edessa"/>
-        <a:font script="Orya" typeface="Kalinga"/>
-        <a:font script="Mlym" typeface="Kartika"/>
-        <a:font script="Laoo" typeface="DokChampa"/>
-        <a:font script="Sinh" typeface="Iskoola Pota"/>
-        <a:font script="Mong" typeface="Mongolian Baiti"/>
-        <a:font script="Viet" typeface="Times New Roman"/>
-        <a:font script="Uigh" typeface="Microsoft Uighur"/>
-        <a:font script="Geor" typeface="Sylfaen"/>
-        <a:font script="Armn" typeface="Arial"/>
-        <a:font script="Bugi" typeface="Leelawadee UI"/>
-        <a:font script="Bopo" typeface="Microsoft JhengHei"/>
-        <a:font script="Java" typeface="Javanese Text"/>
-        <a:font script="Lisu" typeface="Segoe UI"/>
-        <a:font script="Mymr" typeface="Myanmar Text"/>
-        <a:font script="Nkoo" typeface="Ebrima"/>
-        <a:font script="Olck" typeface="Nirmala UI"/>
-        <a:font script="Osma" typeface="Ebrima"/>
-        <a:font script="Phag" typeface="Phagspa"/>
-        <a:font script="Syrn" typeface="Estrangelo Edessa"/>
-        <a:font script="Syrj" typeface="Estrangelo Edessa"/>
-        <a:font script="Syre" typeface="Estrangelo Edessa"/>
-        <a:font script="Sora" typeface="Nirmala UI"/>
-        <a:font script="Tale" typeface="Microsoft Tai Le"/>
-        <a:font script="Talu" typeface="Microsoft New Tai Lue"/>
-        <a:font script="Tfng" typeface="Ebrima"/>
-      </a:majorFont>
-      <a:minorFont>
-        <a:latin typeface="Aptos" panose="02110004020202020204"/>
-        <a:ea typeface=""/>
-        <a:cs typeface=""/>
-        <a:font script="Jpan" typeface="游ゴシック"/>
-        <a:font script="Hang" typeface="맑은 고딕"/>
-        <a:font script="Hans" typeface="等线"/>
-        <a:font script="Hant" typeface="新細明體"/>
-        <a:font script="Arab" typeface="Arial"/>
-        <a:font script="Hebr" typeface="Arial"/>
-        <a:font script="Thai" typeface="Cordia New"/>
-        <a:font script="Ethi" typeface="Nyala"/>
-        <a:font script="Beng" typeface="Vrinda"/>
-        <a:font script="Gujr" typeface="Shruti"/>
-        <a:font script="Khmr" typeface="DaunPenh"/>
-        <a:font script="Knda" typeface="Tunga"/>
-        <a:font script="Guru" typeface="Raavi"/>
-        <a:font script="Cans" typeface="Euphemia"/>
-        <a:font script="Cher" typeface="Plantagenet Cherokee"/>
-        <a:font script="Yiii" typeface="Microsoft Yi Baiti"/>
-        <a:font script="Tibt" typeface="Microsoft Himalaya"/>
-        <a:font script="Thaa" typeface="MV Boli"/>
-        <a:font script="Deva" typeface="Mangal"/>
-        <a:font script="Telu" typeface="Gautami"/>
-        <a:font script="Taml" typeface="Latha"/>
-        <a:font script="Syrc" typeface="Estrangelo Edessa"/>
-        <a:font script="Orya" typeface="Kalinga"/>
-        <a:font script="Mlym" typeface="Kartika"/>
-        <a:font script="Laoo" typeface="DokChampa"/>
-        <a:font script="Sinh" typeface="Iskoola Pota"/>
-        <a:font script="Mong" typeface="Mongolian Baiti"/>
-        <a:font script="Viet" typeface="Arial"/>
-        <a:font script="Uigh" typeface="Microsoft Uighur"/>
-        <a:font script="Geor" typeface="Sylfaen"/>
-        <a:font script="Armn" typeface="Arial"/>
-        <a:font script="Bugi" typeface="Leelawadee UI"/>
-        <a:font script="Bopo" typeface="Microsoft JhengHei"/>
-        <a:font script="Java" typeface="Javanese Text"/>
-        <a:font script="Lisu" typeface="Segoe UI"/>
-        <a:font script="Mymr" typeface="Myanmar Text"/>
-        <a:font script="Nkoo" typeface="Ebrima"/>
-        <a:font script="Olck" typeface="Nirmala UI"/>
-        <a:font script="Osma" typeface="Ebrima"/>
-        <a:font script="Phag" typeface="Phagspa"/>
-        <a:font script="Syrn" typeface="Estrangelo Edessa"/>
-        <a:font script="Syrj" typeface="Estrangelo Edessa"/>
-        <a:font script="Syre" typeface="Estrangelo Edessa"/>
-        <a:font script="Sora" typeface="Nirmala UI"/>
-        <a:font script="Tale" typeface="Microsoft Tai Le"/>
-        <a:font script="Talu" typeface="Microsoft New Tai Lue"/>
-        <a:font script="Tfng" typeface="Ebrima"/>
-      </a:minorFont>
-    </a:fontScheme>
-    <a:fmtScheme name="Office">
-      <a:fillStyleLst>
-        <a:solidFill>
-          <a:schemeClr val="phClr"/>
-        </a:solidFill>
-        <a:gradFill rotWithShape="1">
-          <a:gsLst>
-            <a:gs pos="0">
-              <a:schemeClr val="phClr">
-                <a:lumMod val="110000"/>
-                <a:satMod val="105000"/>
-                <a:tint val="67000"/>
-              </a:schemeClr>
-            </a:gs>
-            <a:gs pos="50000">
-              <a:schemeClr val="phClr">
-                <a:lumMod val="105000"/>
-                <a:satMod val="103000"/>
-                <a:tint val="73000"/>
-              </a:schemeClr>
-            </a:gs>
-            <a:gs pos="100000">
-              <a:schemeClr val="phClr">
-                <a:lumMod val="105000"/>
-                <a:satMod val="109000"/>
-                <a:tint val="81000"/>
-              </a:schemeClr>
-            </a:gs>
-          </a:gsLst>
-          <a:lin ang="5400000" scaled="0"/>
-        </a:gradFill>
-        <a:gradFill rotWithShape="1">
-          <a:gsLst>
-            <a:gs pos="0">
-              <a:schemeClr val="phClr">
-                <a:satMod val="103000"/>
-                <a:lumMod val="102000"/>
-                <a:tint val="94000"/>
-              </a:schemeClr>
-            </a:gs>
-            <a:gs pos="50000">
-              <a:schemeClr val="phClr">
-                <a:satMod val="110000"/>
-                <a:lumMod val="100000"/>
-                <a:shade val="100000"/>
-              </a:schemeClr>
-            </a:gs>
-            <a:gs pos="100000">
-              <a:schemeClr val="phClr">
-                <a:lumMod val="99000"/>
-                <a:satMod val="120000"/>
-                <a:shade val="78000"/>
-              </a:schemeClr>
-            </a:gs>
-          </a:gsLst>
-          <a:lin ang="5400000" scaled="0"/>
-        </a:gradFill>
-      </a:fillStyleLst>
-      <a:lnStyleLst>
-        <a:ln w="12700" cap="flat" cmpd="sng" algn="ctr">
-          <a:solidFill>
-            <a:schemeClr val="phClr"/>
-          </a:solidFill>
-          <a:prstDash val="solid"/>
-          <a:miter lim="800000"/>
-        </a:ln>
-        <a:ln w="19050" cap="flat" cmpd="sng" algn="ctr">
-          <a:solidFill>
-            <a:schemeClr val="phClr"/>
-          </a:solidFill>
-          <a:prstDash val="solid"/>
-          <a:miter lim="800000"/>
-        </a:ln>
-        <a:ln w="25400" cap="flat" cmpd="sng" algn="ctr">
-          <a:solidFill>
-            <a:schemeClr val="phClr"/>
-          </a:solidFill>
-          <a:prstDash val="solid"/>
-          <a:miter lim="800000"/>
-        </a:ln>
-      </a:lnStyleLst>
-      <a:effectStyleLst>
-        <a:effectStyle>
-          <a:effectLst/>
-        </a:effectStyle>
-        <a:effectStyle>
-          <a:effectLst/>
-        </a:effectStyle>
-        <a:effectStyle>
-          <a:effectLst>
-            <a:outerShdw blurRad="57150" dist="19050" dir="5400000" algn="ctr" rotWithShape="0">
-              <a:srgbClr val="000000">
-                <a:alpha val="63000"/>
-              </a:srgbClr>
-            </a:outerShdw>
-          </a:effectLst>
-        </a:effectStyle>
-      </a:effectStyleLst>
-      <a:bgFillStyleLst>
-        <a:solidFill>
-          <a:schemeClr val="phClr"/>
-        </a:solidFill>
-        <a:solidFill>
-          <a:schemeClr val="phClr">
-            <a:tint val="95000"/>
-            <a:satMod val="170000"/>
-          </a:schemeClr>
-        </a:solidFill>
-        <a:gradFill rotWithShape="1">
-          <a:gsLst>
-            <a:gs pos="0">
-              <a:schemeClr val="phClr">
-                <a:tint val="93000"/>
-                <a:satMod val="150000"/>
-                <a:shade val="98000"/>
-                <a:lumMod val="102000"/>
-              </a:schemeClr>
-            </a:gs>
-            <a:gs pos="50000">
-              <a:schemeClr val="phClr">
-                <a:tint val="98000"/>
-                <a:satMod val="130000"/>
-                <a:shade val="90000"/>
-                <a:lumMod val="103000"/>
-              </a:schemeClr>
-            </a:gs>
-            <a:gs pos="100000">
-              <a:schemeClr val="phClr">
-                <a:shade val="63000"/>
-                <a:satMod val="120000"/>
-              </a:schemeClr>
-            </a:gs>
-          </a:gsLst>
-          <a:lin ang="5400000" scaled="0"/>
-        </a:gradFill>
-      </a:bgFillStyleLst>
-    </a:fmtScheme>
-  </a:themeElements>
-  <a:objectDefaults>
-    <a:lnDef>
-      <a:spPr/>
-      <a:bodyPr/>
-      <a:lstStyle/>
-      <a:style>
-        <a:lnRef idx="2">
-          <a:schemeClr val="accent1"/>
-        </a:lnRef>
-        <a:fillRef idx="0">
-          <a:schemeClr val="accent1"/>
-        </a:fillRef>
-        <a:effectRef idx="1">
-          <a:schemeClr val="accent1"/>
-        </a:effectRef>
-        <a:fontRef idx="minor">
-          <a:schemeClr val="tx1"/>
-        </a:fontRef>
-      </a:style>
-    </a:lnDef>
-  </a:objectDefaults>
-  <a:extraClrSchemeLst/>
-  <a:extLst>
-    <a:ext uri="{05A4C25C-085E-4340-85A3-A5531E510DB2}">
-      <thm15:themeFamily xmlns:thm15="http://schemas.microsoft.com/office/thememl/2012/main" name="Office Theme" id="{2E142A2C-CD16-42D6-873A-C26D2A0506FA}" vid="{1BDDFF52-6CD6-40A5-AB3C-68EB2F1E4D0A}"/>
-    </a:ext>
-  </a:extLst>
-</a:theme>
 </file>